--- a/reviews/storyboard-bariah/k5_calibration/K5PL06T03B03_LAMPIRAN_KEADAAN_DRAF_v0_1_3panel.pptx
+++ b/reviews/storyboard-bariah/k5_calibration/K5PL06T03B03_LAMPIRAN_KEADAAN_DRAF_v0_1_3panel.pptx
@@ -3120,7 +3120,7 @@
         </p:spPr>
         <p:txBody>
           <a:bodyPr wrap="square" lIns="0" rIns="0" tIns="0" bIns="0">
-            <a:spAutoFit/>
+            <a:noAutofit/>
           </a:bodyPr>
           <a:lstStyle/>
           <a:p>
@@ -3180,7 +3180,7 @@
                 </a:solidFill>
                 <a:latin typeface="Arial"/>
               </a:rPr>
-              <a:t>DRAFT_FOR_BARIAH_REVIEW · NOT_INSTRUCTIONALLY_APPROVED · NOT_LEARNER_FACING_FINAL</a:t>
+              <a:t>TECHNICAL_PROOF · DRAFT_FOR_BARIAH_REVIEW · NOT_INSTRUCTIONALLY_APPROVED · NOT_LEARNER_FACING_FINAL</a:t>
             </a:r>
           </a:p>
           <a:p>
@@ -3245,7 +3245,7 @@
         </p:spPr>
         <p:txBody>
           <a:bodyPr wrap="square" lIns="0" rIns="0" tIns="0" bIns="0">
-            <a:spAutoFit/>
+            <a:noAutofit/>
           </a:bodyPr>
           <a:lstStyle/>
           <a:p>
@@ -3303,7 +3303,7 @@
           <a:fillRef idx="3">
             <a:schemeClr val="accent1"/>
           </a:fillRef>
-          <a:effectRef idx="2">
+          <a:effectRef idx="0">
             <a:schemeClr val="accent1"/>
           </a:effectRef>
           <a:fontRef idx="minor">
@@ -3311,7 +3311,9 @@
           </a:fontRef>
         </p:style>
         <p:txBody>
-          <a:bodyPr rtlCol="0" anchor="ctr"/>
+          <a:bodyPr rtlCol="0" anchor="ctr">
+            <a:noAutofit/>
+          </a:bodyPr>
           <a:lstStyle/>
           <a:p>
             <a:pPr algn="ctr"/>
@@ -3349,7 +3351,7 @@
           <a:fillRef idx="3">
             <a:schemeClr val="accent1"/>
           </a:fillRef>
-          <a:effectRef idx="2">
+          <a:effectRef idx="0">
             <a:schemeClr val="accent1"/>
           </a:effectRef>
           <a:fontRef idx="minor">
@@ -3357,7 +3359,9 @@
           </a:fontRef>
         </p:style>
         <p:txBody>
-          <a:bodyPr rtlCol="0" anchor="ctr"/>
+          <a:bodyPr rtlCol="0" anchor="ctr">
+            <a:noAutofit/>
+          </a:bodyPr>
           <a:lstStyle/>
           <a:p>
             <a:pPr algn="ctr"/>
@@ -3382,7 +3386,7 @@
         </p:spPr>
         <p:txBody>
           <a:bodyPr wrap="square" lIns="0" rIns="0" tIns="0" bIns="0">
-            <a:spAutoFit/>
+            <a:noAutofit/>
           </a:bodyPr>
           <a:lstStyle/>
           <a:p>
@@ -3586,7 +3590,7 @@
                 </a:solidFill>
                 <a:latin typeface="Arial"/>
               </a:rPr>
-              <a:t>Baris: T03B03-ROW-055, T03B03-ROW-056, T03B03-ROW-056, T03B03-ROW-057, T03B03-ROW-058, T03B03-ROW-059, T03B03-ROW-060, T03B03-ROW-062</a:t>
+              <a:t>Baris: T03B03-ROW-055, T03B03-ROW-056, (+6)</a:t>
             </a:r>
           </a:p>
           <a:p>
@@ -3634,7 +3638,7 @@
           <a:fillRef idx="3">
             <a:schemeClr val="accent1"/>
           </a:fillRef>
-          <a:effectRef idx="2">
+          <a:effectRef idx="0">
             <a:schemeClr val="accent1"/>
           </a:effectRef>
           <a:fontRef idx="minor">
@@ -3642,7 +3646,9 @@
           </a:fontRef>
         </p:style>
         <p:txBody>
-          <a:bodyPr rtlCol="0" anchor="ctr"/>
+          <a:bodyPr rtlCol="0" anchor="ctr">
+            <a:noAutofit/>
+          </a:bodyPr>
           <a:lstStyle/>
           <a:p>
             <a:pPr algn="ctr"/>
@@ -3667,7 +3673,7 @@
         </p:spPr>
         <p:txBody>
           <a:bodyPr wrap="square" lIns="0" rIns="0" tIns="0" bIns="0">
-            <a:spAutoFit/>
+            <a:noAutofit/>
           </a:bodyPr>
           <a:lstStyle/>
           <a:p>
@@ -3835,7 +3841,7 @@
           <a:fillRef idx="3">
             <a:schemeClr val="accent1"/>
           </a:fillRef>
-          <a:effectRef idx="2">
+          <a:effectRef idx="0">
             <a:schemeClr val="accent1"/>
           </a:effectRef>
           <a:fontRef idx="minor">
@@ -3843,7 +3849,9 @@
           </a:fontRef>
         </p:style>
         <p:txBody>
-          <a:bodyPr rtlCol="0" anchor="ctr"/>
+          <a:bodyPr rtlCol="0" anchor="ctr">
+            <a:noAutofit/>
+          </a:bodyPr>
           <a:lstStyle/>
           <a:p>
             <a:pPr algn="ctr"/>
@@ -3868,7 +3876,7 @@
         </p:spPr>
         <p:txBody>
           <a:bodyPr wrap="square" lIns="0" rIns="0" tIns="0" bIns="0">
-            <a:spAutoFit/>
+            <a:noAutofit/>
           </a:bodyPr>
           <a:lstStyle/>
           <a:p>
@@ -4023,7 +4031,7 @@
         </p:spPr>
         <p:txBody>
           <a:bodyPr wrap="square" lIns="0" rIns="0" tIns="0" bIns="0">
-            <a:spAutoFit/>
+            <a:noAutofit/>
           </a:bodyPr>
           <a:lstStyle/>
           <a:p>
@@ -4035,7 +4043,7 @@
                 </a:solidFill>
                 <a:latin typeface="Arial"/>
               </a:rPr>
-              <a:t>Lampiran keadaan · 3 panel/halaman · halaman 9 daripada 14   ·   DRAFT_FOR_BARIAH_REVIEW · NOT_INSTRUCTIONALLY_APPROVED · NOT_LEARNER_FACING_FINAL</a:t>
+              <a:t>Lampiran keadaan · 3 panel/halaman · halaman 9 daripada 14   ·   TECHNICAL_PROOF · DRAFT_FOR_BARIAH_REVIEW · NOT_INSTRUCTIONALLY_APPROVED · NOT_LEARNER_FACING_FINAL</a:t>
             </a:r>
           </a:p>
         </p:txBody>
@@ -4076,7 +4084,7 @@
         </p:spPr>
         <p:txBody>
           <a:bodyPr wrap="square" lIns="0" rIns="0" tIns="0" bIns="0">
-            <a:spAutoFit/>
+            <a:noAutofit/>
           </a:bodyPr>
           <a:lstStyle/>
           <a:p>
@@ -4134,7 +4142,7 @@
           <a:fillRef idx="3">
             <a:schemeClr val="accent1"/>
           </a:fillRef>
-          <a:effectRef idx="2">
+          <a:effectRef idx="0">
             <a:schemeClr val="accent1"/>
           </a:effectRef>
           <a:fontRef idx="minor">
@@ -4142,7 +4150,9 @@
           </a:fontRef>
         </p:style>
         <p:txBody>
-          <a:bodyPr rtlCol="0" anchor="ctr"/>
+          <a:bodyPr rtlCol="0" anchor="ctr">
+            <a:noAutofit/>
+          </a:bodyPr>
           <a:lstStyle/>
           <a:p>
             <a:pPr algn="ctr"/>
@@ -4180,7 +4190,7 @@
           <a:fillRef idx="3">
             <a:schemeClr val="accent1"/>
           </a:fillRef>
-          <a:effectRef idx="2">
+          <a:effectRef idx="0">
             <a:schemeClr val="accent1"/>
           </a:effectRef>
           <a:fontRef idx="minor">
@@ -4188,7 +4198,9 @@
           </a:fontRef>
         </p:style>
         <p:txBody>
-          <a:bodyPr rtlCol="0" anchor="ctr"/>
+          <a:bodyPr rtlCol="0" anchor="ctr">
+            <a:noAutofit/>
+          </a:bodyPr>
           <a:lstStyle/>
           <a:p>
             <a:pPr algn="ctr"/>
@@ -4213,7 +4225,7 @@
         </p:spPr>
         <p:txBody>
           <a:bodyPr wrap="square" lIns="0" rIns="0" tIns="0" bIns="0">
-            <a:spAutoFit/>
+            <a:noAutofit/>
           </a:bodyPr>
           <a:lstStyle/>
           <a:p>
@@ -4368,7 +4380,7 @@
         </p:spPr>
         <p:txBody>
           <a:bodyPr wrap="square" lIns="0" rIns="0" tIns="0" bIns="0">
-            <a:spAutoFit/>
+            <a:noAutofit/>
           </a:bodyPr>
           <a:lstStyle/>
           <a:p>
@@ -4380,7 +4392,7 @@
                 </a:solidFill>
                 <a:latin typeface="Arial"/>
               </a:rPr>
-              <a:t>Lampiran keadaan · 3 panel/halaman · halaman 10 daripada 14   ·   DRAFT_FOR_BARIAH_REVIEW · NOT_INSTRUCTIONALLY_APPROVED · NOT_LEARNER_FACING_FINAL</a:t>
+              <a:t>Lampiran keadaan · 3 panel/halaman · halaman 10 daripada 14   ·   TECHNICAL_PROOF · DRAFT_FOR_BARIAH_REVIEW · NOT_INSTRUCTIONALLY_APPROVED · NOT_LEARNER_FACING_FINAL</a:t>
             </a:r>
           </a:p>
         </p:txBody>
@@ -4421,7 +4433,7 @@
         </p:spPr>
         <p:txBody>
           <a:bodyPr wrap="square" lIns="0" rIns="0" tIns="0" bIns="0">
-            <a:spAutoFit/>
+            <a:noAutofit/>
           </a:bodyPr>
           <a:lstStyle/>
           <a:p>
@@ -4479,7 +4491,7 @@
           <a:fillRef idx="3">
             <a:schemeClr val="accent1"/>
           </a:fillRef>
-          <a:effectRef idx="2">
+          <a:effectRef idx="0">
             <a:schemeClr val="accent1"/>
           </a:effectRef>
           <a:fontRef idx="minor">
@@ -4487,7 +4499,9 @@
           </a:fontRef>
         </p:style>
         <p:txBody>
-          <a:bodyPr rtlCol="0" anchor="ctr"/>
+          <a:bodyPr rtlCol="0" anchor="ctr">
+            <a:noAutofit/>
+          </a:bodyPr>
           <a:lstStyle/>
           <a:p>
             <a:pPr algn="ctr"/>
@@ -4525,7 +4539,7 @@
           <a:fillRef idx="3">
             <a:schemeClr val="accent1"/>
           </a:fillRef>
-          <a:effectRef idx="2">
+          <a:effectRef idx="0">
             <a:schemeClr val="accent1"/>
           </a:effectRef>
           <a:fontRef idx="minor">
@@ -4533,7 +4547,9 @@
           </a:fontRef>
         </p:style>
         <p:txBody>
-          <a:bodyPr rtlCol="0" anchor="ctr"/>
+          <a:bodyPr rtlCol="0" anchor="ctr">
+            <a:noAutofit/>
+          </a:bodyPr>
           <a:lstStyle/>
           <a:p>
             <a:pPr algn="ctr"/>
@@ -4558,7 +4574,7 @@
         </p:spPr>
         <p:txBody>
           <a:bodyPr wrap="square" lIns="0" rIns="0" tIns="0" bIns="0">
-            <a:spAutoFit/>
+            <a:noAutofit/>
           </a:bodyPr>
           <a:lstStyle/>
           <a:p>
@@ -4762,7 +4778,7 @@
                 </a:solidFill>
                 <a:latin typeface="Arial"/>
               </a:rPr>
-              <a:t>Baris: T03B03-ROW-064, T03B03-ROW-065, T03B03-ROW-066, T03B03-ROW-067, T03B03-ROW-068, T03B03-ROW-069, T03B03-ROW-071, T03B03-ROW-073, T03B03-ROW-075</a:t>
+              <a:t>Baris: T03B03-ROW-064, T03B03-ROW-065, (+7)</a:t>
             </a:r>
           </a:p>
           <a:p>
@@ -4810,7 +4826,7 @@
           <a:fillRef idx="3">
             <a:schemeClr val="accent1"/>
           </a:fillRef>
-          <a:effectRef idx="2">
+          <a:effectRef idx="0">
             <a:schemeClr val="accent1"/>
           </a:effectRef>
           <a:fontRef idx="minor">
@@ -4818,7 +4834,9 @@
           </a:fontRef>
         </p:style>
         <p:txBody>
-          <a:bodyPr rtlCol="0" anchor="ctr"/>
+          <a:bodyPr rtlCol="0" anchor="ctr">
+            <a:noAutofit/>
+          </a:bodyPr>
           <a:lstStyle/>
           <a:p>
             <a:pPr algn="ctr"/>
@@ -4843,7 +4861,7 @@
         </p:spPr>
         <p:txBody>
           <a:bodyPr wrap="square" lIns="0" rIns="0" tIns="0" bIns="0">
-            <a:spAutoFit/>
+            <a:noAutofit/>
           </a:bodyPr>
           <a:lstStyle/>
           <a:p>
@@ -5011,7 +5029,7 @@
           <a:fillRef idx="3">
             <a:schemeClr val="accent1"/>
           </a:fillRef>
-          <a:effectRef idx="2">
+          <a:effectRef idx="0">
             <a:schemeClr val="accent1"/>
           </a:effectRef>
           <a:fontRef idx="minor">
@@ -5019,7 +5037,9 @@
           </a:fontRef>
         </p:style>
         <p:txBody>
-          <a:bodyPr rtlCol="0" anchor="ctr"/>
+          <a:bodyPr rtlCol="0" anchor="ctr">
+            <a:noAutofit/>
+          </a:bodyPr>
           <a:lstStyle/>
           <a:p>
             <a:pPr algn="ctr"/>
@@ -5044,7 +5064,7 @@
         </p:spPr>
         <p:txBody>
           <a:bodyPr wrap="square" lIns="0" rIns="0" tIns="0" bIns="0">
-            <a:spAutoFit/>
+            <a:noAutofit/>
           </a:bodyPr>
           <a:lstStyle/>
           <a:p>
@@ -5199,7 +5219,7 @@
         </p:spPr>
         <p:txBody>
           <a:bodyPr wrap="square" lIns="0" rIns="0" tIns="0" bIns="0">
-            <a:spAutoFit/>
+            <a:noAutofit/>
           </a:bodyPr>
           <a:lstStyle/>
           <a:p>
@@ -5211,7 +5231,7 @@
                 </a:solidFill>
                 <a:latin typeface="Arial"/>
               </a:rPr>
-              <a:t>Lampiran keadaan · 3 panel/halaman · halaman 11 daripada 14   ·   DRAFT_FOR_BARIAH_REVIEW · NOT_INSTRUCTIONALLY_APPROVED · NOT_LEARNER_FACING_FINAL</a:t>
+              <a:t>Lampiran keadaan · 3 panel/halaman · halaman 11 daripada 14   ·   TECHNICAL_PROOF · DRAFT_FOR_BARIAH_REVIEW · NOT_INSTRUCTIONALLY_APPROVED · NOT_LEARNER_FACING_FINAL</a:t>
             </a:r>
           </a:p>
         </p:txBody>
@@ -5252,7 +5272,7 @@
         </p:spPr>
         <p:txBody>
           <a:bodyPr wrap="square" lIns="0" rIns="0" tIns="0" bIns="0">
-            <a:spAutoFit/>
+            <a:noAutofit/>
           </a:bodyPr>
           <a:lstStyle/>
           <a:p>
@@ -5310,7 +5330,7 @@
           <a:fillRef idx="3">
             <a:schemeClr val="accent1"/>
           </a:fillRef>
-          <a:effectRef idx="2">
+          <a:effectRef idx="0">
             <a:schemeClr val="accent1"/>
           </a:effectRef>
           <a:fontRef idx="minor">
@@ -5318,7 +5338,9 @@
           </a:fontRef>
         </p:style>
         <p:txBody>
-          <a:bodyPr rtlCol="0" anchor="ctr"/>
+          <a:bodyPr rtlCol="0" anchor="ctr">
+            <a:noAutofit/>
+          </a:bodyPr>
           <a:lstStyle/>
           <a:p>
             <a:pPr algn="ctr"/>
@@ -5356,7 +5378,7 @@
           <a:fillRef idx="3">
             <a:schemeClr val="accent1"/>
           </a:fillRef>
-          <a:effectRef idx="2">
+          <a:effectRef idx="0">
             <a:schemeClr val="accent1"/>
           </a:effectRef>
           <a:fontRef idx="minor">
@@ -5364,7 +5386,9 @@
           </a:fontRef>
         </p:style>
         <p:txBody>
-          <a:bodyPr rtlCol="0" anchor="ctr"/>
+          <a:bodyPr rtlCol="0" anchor="ctr">
+            <a:noAutofit/>
+          </a:bodyPr>
           <a:lstStyle/>
           <a:p>
             <a:pPr algn="ctr"/>
@@ -5389,7 +5413,7 @@
         </p:spPr>
         <p:txBody>
           <a:bodyPr wrap="square" lIns="0" rIns="0" tIns="0" bIns="0">
-            <a:spAutoFit/>
+            <a:noAutofit/>
           </a:bodyPr>
           <a:lstStyle/>
           <a:p>
@@ -5557,7 +5581,7 @@
           <a:fillRef idx="3">
             <a:schemeClr val="accent1"/>
           </a:fillRef>
-          <a:effectRef idx="2">
+          <a:effectRef idx="0">
             <a:schemeClr val="accent1"/>
           </a:effectRef>
           <a:fontRef idx="minor">
@@ -5565,7 +5589,9 @@
           </a:fontRef>
         </p:style>
         <p:txBody>
-          <a:bodyPr rtlCol="0" anchor="ctr"/>
+          <a:bodyPr rtlCol="0" anchor="ctr">
+            <a:noAutofit/>
+          </a:bodyPr>
           <a:lstStyle/>
           <a:p>
             <a:pPr algn="ctr"/>
@@ -5590,7 +5616,7 @@
         </p:spPr>
         <p:txBody>
           <a:bodyPr wrap="square" lIns="0" rIns="0" tIns="0" bIns="0">
-            <a:spAutoFit/>
+            <a:noAutofit/>
           </a:bodyPr>
           <a:lstStyle/>
           <a:p>
@@ -5758,7 +5784,7 @@
           <a:fillRef idx="3">
             <a:schemeClr val="accent1"/>
           </a:fillRef>
-          <a:effectRef idx="2">
+          <a:effectRef idx="0">
             <a:schemeClr val="accent1"/>
           </a:effectRef>
           <a:fontRef idx="minor">
@@ -5766,7 +5792,9 @@
           </a:fontRef>
         </p:style>
         <p:txBody>
-          <a:bodyPr rtlCol="0" anchor="ctr"/>
+          <a:bodyPr rtlCol="0" anchor="ctr">
+            <a:noAutofit/>
+          </a:bodyPr>
           <a:lstStyle/>
           <a:p>
             <a:pPr algn="ctr"/>
@@ -5791,7 +5819,7 @@
         </p:spPr>
         <p:txBody>
           <a:bodyPr wrap="square" lIns="0" rIns="0" tIns="0" bIns="0">
-            <a:spAutoFit/>
+            <a:noAutofit/>
           </a:bodyPr>
           <a:lstStyle/>
           <a:p>
@@ -5946,7 +5974,7 @@
         </p:spPr>
         <p:txBody>
           <a:bodyPr wrap="square" lIns="0" rIns="0" tIns="0" bIns="0">
-            <a:spAutoFit/>
+            <a:noAutofit/>
           </a:bodyPr>
           <a:lstStyle/>
           <a:p>
@@ -5958,7 +5986,7 @@
                 </a:solidFill>
                 <a:latin typeface="Arial"/>
               </a:rPr>
-              <a:t>Lampiran keadaan · 3 panel/halaman · halaman 12 daripada 14   ·   DRAFT_FOR_BARIAH_REVIEW · NOT_INSTRUCTIONALLY_APPROVED · NOT_LEARNER_FACING_FINAL</a:t>
+              <a:t>Lampiran keadaan · 3 panel/halaman · halaman 12 daripada 14   ·   TECHNICAL_PROOF · DRAFT_FOR_BARIAH_REVIEW · NOT_INSTRUCTIONALLY_APPROVED · NOT_LEARNER_FACING_FINAL</a:t>
             </a:r>
           </a:p>
         </p:txBody>
@@ -5999,7 +6027,7 @@
         </p:spPr>
         <p:txBody>
           <a:bodyPr wrap="square" lIns="0" rIns="0" tIns="0" bIns="0">
-            <a:spAutoFit/>
+            <a:noAutofit/>
           </a:bodyPr>
           <a:lstStyle/>
           <a:p>
@@ -6057,7 +6085,7 @@
           <a:fillRef idx="3">
             <a:schemeClr val="accent1"/>
           </a:fillRef>
-          <a:effectRef idx="2">
+          <a:effectRef idx="0">
             <a:schemeClr val="accent1"/>
           </a:effectRef>
           <a:fontRef idx="minor">
@@ -6065,7 +6093,9 @@
           </a:fontRef>
         </p:style>
         <p:txBody>
-          <a:bodyPr rtlCol="0" anchor="ctr"/>
+          <a:bodyPr rtlCol="0" anchor="ctr">
+            <a:noAutofit/>
+          </a:bodyPr>
           <a:lstStyle/>
           <a:p>
             <a:pPr algn="ctr"/>
@@ -6103,7 +6133,7 @@
           <a:fillRef idx="3">
             <a:schemeClr val="accent1"/>
           </a:fillRef>
-          <a:effectRef idx="2">
+          <a:effectRef idx="0">
             <a:schemeClr val="accent1"/>
           </a:effectRef>
           <a:fontRef idx="minor">
@@ -6111,7 +6141,9 @@
           </a:fontRef>
         </p:style>
         <p:txBody>
-          <a:bodyPr rtlCol="0" anchor="ctr"/>
+          <a:bodyPr rtlCol="0" anchor="ctr">
+            <a:noAutofit/>
+          </a:bodyPr>
           <a:lstStyle/>
           <a:p>
             <a:pPr algn="ctr"/>
@@ -6136,7 +6168,7 @@
         </p:spPr>
         <p:txBody>
           <a:bodyPr wrap="square" lIns="0" rIns="0" tIns="0" bIns="0">
-            <a:spAutoFit/>
+            <a:noAutofit/>
           </a:bodyPr>
           <a:lstStyle/>
           <a:p>
@@ -6364,7 +6396,7 @@
           <a:fillRef idx="3">
             <a:schemeClr val="accent1"/>
           </a:fillRef>
-          <a:effectRef idx="2">
+          <a:effectRef idx="0">
             <a:schemeClr val="accent1"/>
           </a:effectRef>
           <a:fontRef idx="minor">
@@ -6372,7 +6404,9 @@
           </a:fontRef>
         </p:style>
         <p:txBody>
-          <a:bodyPr rtlCol="0" anchor="ctr"/>
+          <a:bodyPr rtlCol="0" anchor="ctr">
+            <a:noAutofit/>
+          </a:bodyPr>
           <a:lstStyle/>
           <a:p>
             <a:pPr algn="ctr"/>
@@ -6397,7 +6431,7 @@
         </p:spPr>
         <p:txBody>
           <a:bodyPr wrap="square" lIns="0" rIns="0" tIns="0" bIns="0">
-            <a:spAutoFit/>
+            <a:noAutofit/>
           </a:bodyPr>
           <a:lstStyle/>
           <a:p>
@@ -6625,7 +6659,7 @@
           <a:fillRef idx="3">
             <a:schemeClr val="accent1"/>
           </a:fillRef>
-          <a:effectRef idx="2">
+          <a:effectRef idx="0">
             <a:schemeClr val="accent1"/>
           </a:effectRef>
           <a:fontRef idx="minor">
@@ -6633,7 +6667,9 @@
           </a:fontRef>
         </p:style>
         <p:txBody>
-          <a:bodyPr rtlCol="0" anchor="ctr"/>
+          <a:bodyPr rtlCol="0" anchor="ctr">
+            <a:noAutofit/>
+          </a:bodyPr>
           <a:lstStyle/>
           <a:p>
             <a:pPr algn="ctr"/>
@@ -6658,7 +6694,7 @@
         </p:spPr>
         <p:txBody>
           <a:bodyPr wrap="square" lIns="0" rIns="0" tIns="0" bIns="0">
-            <a:spAutoFit/>
+            <a:noAutofit/>
           </a:bodyPr>
           <a:lstStyle/>
           <a:p>
@@ -6873,7 +6909,7 @@
         </p:spPr>
         <p:txBody>
           <a:bodyPr wrap="square" lIns="0" rIns="0" tIns="0" bIns="0">
-            <a:spAutoFit/>
+            <a:noAutofit/>
           </a:bodyPr>
           <a:lstStyle/>
           <a:p>
@@ -6885,7 +6921,7 @@
                 </a:solidFill>
                 <a:latin typeface="Arial"/>
               </a:rPr>
-              <a:t>Lampiran keadaan · 3 panel/halaman · halaman 13 daripada 14   ·   DRAFT_FOR_BARIAH_REVIEW · NOT_INSTRUCTIONALLY_APPROVED · NOT_LEARNER_FACING_FINAL</a:t>
+              <a:t>Lampiran keadaan · 3 panel/halaman · halaman 13 daripada 14   ·   TECHNICAL_PROOF · DRAFT_FOR_BARIAH_REVIEW · NOT_INSTRUCTIONALLY_APPROVED · NOT_LEARNER_FACING_FINAL</a:t>
             </a:r>
           </a:p>
         </p:txBody>
@@ -6926,7 +6962,7 @@
         </p:spPr>
         <p:txBody>
           <a:bodyPr wrap="square" lIns="0" rIns="0" tIns="0" bIns="0">
-            <a:spAutoFit/>
+            <a:noAutofit/>
           </a:bodyPr>
           <a:lstStyle/>
           <a:p>
@@ -6984,7 +7020,7 @@
           <a:fillRef idx="3">
             <a:schemeClr val="accent1"/>
           </a:fillRef>
-          <a:effectRef idx="2">
+          <a:effectRef idx="0">
             <a:schemeClr val="accent1"/>
           </a:effectRef>
           <a:fontRef idx="minor">
@@ -6992,7 +7028,9 @@
           </a:fontRef>
         </p:style>
         <p:txBody>
-          <a:bodyPr rtlCol="0" anchor="ctr"/>
+          <a:bodyPr rtlCol="0" anchor="ctr">
+            <a:noAutofit/>
+          </a:bodyPr>
           <a:lstStyle/>
           <a:p>
             <a:pPr algn="ctr"/>
@@ -7030,7 +7068,7 @@
           <a:fillRef idx="3">
             <a:schemeClr val="accent1"/>
           </a:fillRef>
-          <a:effectRef idx="2">
+          <a:effectRef idx="0">
             <a:schemeClr val="accent1"/>
           </a:effectRef>
           <a:fontRef idx="minor">
@@ -7038,7 +7076,9 @@
           </a:fontRef>
         </p:style>
         <p:txBody>
-          <a:bodyPr rtlCol="0" anchor="ctr"/>
+          <a:bodyPr rtlCol="0" anchor="ctr">
+            <a:noAutofit/>
+          </a:bodyPr>
           <a:lstStyle/>
           <a:p>
             <a:pPr algn="ctr"/>
@@ -7063,7 +7103,7 @@
         </p:spPr>
         <p:txBody>
           <a:bodyPr wrap="square" lIns="0" rIns="0" tIns="0" bIns="0">
-            <a:spAutoFit/>
+            <a:noAutofit/>
           </a:bodyPr>
           <a:lstStyle/>
           <a:p>
@@ -7291,7 +7331,7 @@
           <a:fillRef idx="3">
             <a:schemeClr val="accent1"/>
           </a:fillRef>
-          <a:effectRef idx="2">
+          <a:effectRef idx="0">
             <a:schemeClr val="accent1"/>
           </a:effectRef>
           <a:fontRef idx="minor">
@@ -7299,7 +7339,9 @@
           </a:fontRef>
         </p:style>
         <p:txBody>
-          <a:bodyPr rtlCol="0" anchor="ctr"/>
+          <a:bodyPr rtlCol="0" anchor="ctr">
+            <a:noAutofit/>
+          </a:bodyPr>
           <a:lstStyle/>
           <a:p>
             <a:pPr algn="ctr"/>
@@ -7324,7 +7366,7 @@
         </p:spPr>
         <p:txBody>
           <a:bodyPr wrap="square" lIns="0" rIns="0" tIns="0" bIns="0">
-            <a:spAutoFit/>
+            <a:noAutofit/>
           </a:bodyPr>
           <a:lstStyle/>
           <a:p>
@@ -7516,7 +7558,7 @@
                 </a:solidFill>
                 <a:latin typeface="Arial"/>
               </a:rPr>
-              <a:t>Baris: T03B03-ROW-056, T03B03-ROW-058, T03B03-ROW-063</a:t>
+              <a:t>Baris: T03B03-ROW-056, T03B03-ROW-058, (+1)</a:t>
             </a:r>
           </a:p>
           <a:p>
@@ -7576,7 +7618,7 @@
           <a:fillRef idx="3">
             <a:schemeClr val="accent1"/>
           </a:fillRef>
-          <a:effectRef idx="2">
+          <a:effectRef idx="0">
             <a:schemeClr val="accent1"/>
           </a:effectRef>
           <a:fontRef idx="minor">
@@ -7584,7 +7626,9 @@
           </a:fontRef>
         </p:style>
         <p:txBody>
-          <a:bodyPr rtlCol="0" anchor="ctr"/>
+          <a:bodyPr rtlCol="0" anchor="ctr">
+            <a:noAutofit/>
+          </a:bodyPr>
           <a:lstStyle/>
           <a:p>
             <a:pPr algn="ctr"/>
@@ -7609,7 +7653,7 @@
         </p:spPr>
         <p:txBody>
           <a:bodyPr wrap="square" lIns="0" rIns="0" tIns="0" bIns="0">
-            <a:spAutoFit/>
+            <a:noAutofit/>
           </a:bodyPr>
           <a:lstStyle/>
           <a:p>
@@ -7764,7 +7808,7 @@
         </p:spPr>
         <p:txBody>
           <a:bodyPr wrap="square" lIns="0" rIns="0" tIns="0" bIns="0">
-            <a:spAutoFit/>
+            <a:noAutofit/>
           </a:bodyPr>
           <a:lstStyle/>
           <a:p>
@@ -7776,7 +7820,7 @@
                 </a:solidFill>
                 <a:latin typeface="Arial"/>
               </a:rPr>
-              <a:t>Lampiran keadaan · 3 panel/halaman · halaman 14 daripada 14   ·   DRAFT_FOR_BARIAH_REVIEW · NOT_INSTRUCTIONALLY_APPROVED · NOT_LEARNER_FACING_FINAL</a:t>
+              <a:t>Lampiran keadaan · 3 panel/halaman · halaman 14 daripada 14   ·   TECHNICAL_PROOF · DRAFT_FOR_BARIAH_REVIEW · NOT_INSTRUCTIONALLY_APPROVED · NOT_LEARNER_FACING_FINAL</a:t>
             </a:r>
           </a:p>
         </p:txBody>
@@ -7817,7 +7861,7 @@
         </p:spPr>
         <p:txBody>
           <a:bodyPr wrap="square" lIns="0" rIns="0" tIns="0" bIns="0">
-            <a:spAutoFit/>
+            <a:noAutofit/>
           </a:bodyPr>
           <a:lstStyle/>
           <a:p>
@@ -7875,7 +7919,7 @@
           <a:fillRef idx="3">
             <a:schemeClr val="accent1"/>
           </a:fillRef>
-          <a:effectRef idx="2">
+          <a:effectRef idx="0">
             <a:schemeClr val="accent1"/>
           </a:effectRef>
           <a:fontRef idx="minor">
@@ -7883,7 +7927,9 @@
           </a:fontRef>
         </p:style>
         <p:txBody>
-          <a:bodyPr rtlCol="0" anchor="ctr"/>
+          <a:bodyPr rtlCol="0" anchor="ctr">
+            <a:noAutofit/>
+          </a:bodyPr>
           <a:lstStyle/>
           <a:p>
             <a:pPr algn="ctr"/>
@@ -7921,7 +7967,7 @@
           <a:fillRef idx="3">
             <a:schemeClr val="accent1"/>
           </a:fillRef>
-          <a:effectRef idx="2">
+          <a:effectRef idx="0">
             <a:schemeClr val="accent1"/>
           </a:effectRef>
           <a:fontRef idx="minor">
@@ -7929,7 +7975,9 @@
           </a:fontRef>
         </p:style>
         <p:txBody>
-          <a:bodyPr rtlCol="0" anchor="ctr"/>
+          <a:bodyPr rtlCol="0" anchor="ctr">
+            <a:noAutofit/>
+          </a:bodyPr>
           <a:lstStyle/>
           <a:p>
             <a:pPr algn="ctr"/>
@@ -7954,7 +8002,7 @@
         </p:spPr>
         <p:txBody>
           <a:bodyPr wrap="square" lIns="0" rIns="0" tIns="0" bIns="0">
-            <a:spAutoFit/>
+            <a:noAutofit/>
           </a:bodyPr>
           <a:lstStyle/>
           <a:p>
@@ -8158,7 +8206,7 @@
                 </a:solidFill>
                 <a:latin typeface="Arial"/>
               </a:rPr>
-              <a:t>Baris: T03B03-ROW-002, T03B03-ROW-003, T03B03-ROW-004, T03B03-ROW-005, T03B03-ROW-006, T03B03-ROW-007, T03B03-ROW-008, T03B03-ROW-010, T03B03-ROW-012, T03B03-ROW-014</a:t>
+              <a:t>Baris: T03B03-ROW-002, T03B03-ROW-003, (+8)</a:t>
             </a:r>
           </a:p>
           <a:p>
@@ -8206,7 +8254,7 @@
           <a:fillRef idx="3">
             <a:schemeClr val="accent1"/>
           </a:fillRef>
-          <a:effectRef idx="2">
+          <a:effectRef idx="0">
             <a:schemeClr val="accent1"/>
           </a:effectRef>
           <a:fontRef idx="minor">
@@ -8214,7 +8262,9 @@
           </a:fontRef>
         </p:style>
         <p:txBody>
-          <a:bodyPr rtlCol="0" anchor="ctr"/>
+          <a:bodyPr rtlCol="0" anchor="ctr">
+            <a:noAutofit/>
+          </a:bodyPr>
           <a:lstStyle/>
           <a:p>
             <a:pPr algn="ctr"/>
@@ -8239,7 +8289,7 @@
         </p:spPr>
         <p:txBody>
           <a:bodyPr wrap="square" lIns="0" rIns="0" tIns="0" bIns="0">
-            <a:spAutoFit/>
+            <a:noAutofit/>
           </a:bodyPr>
           <a:lstStyle/>
           <a:p>
@@ -8407,7 +8457,7 @@
           <a:fillRef idx="3">
             <a:schemeClr val="accent1"/>
           </a:fillRef>
-          <a:effectRef idx="2">
+          <a:effectRef idx="0">
             <a:schemeClr val="accent1"/>
           </a:effectRef>
           <a:fontRef idx="minor">
@@ -8415,7 +8465,9 @@
           </a:fontRef>
         </p:style>
         <p:txBody>
-          <a:bodyPr rtlCol="0" anchor="ctr"/>
+          <a:bodyPr rtlCol="0" anchor="ctr">
+            <a:noAutofit/>
+          </a:bodyPr>
           <a:lstStyle/>
           <a:p>
             <a:pPr algn="ctr"/>
@@ -8440,7 +8492,7 @@
         </p:spPr>
         <p:txBody>
           <a:bodyPr wrap="square" lIns="0" rIns="0" tIns="0" bIns="0">
-            <a:spAutoFit/>
+            <a:noAutofit/>
           </a:bodyPr>
           <a:lstStyle/>
           <a:p>
@@ -8595,7 +8647,7 @@
         </p:spPr>
         <p:txBody>
           <a:bodyPr wrap="square" lIns="0" rIns="0" tIns="0" bIns="0">
-            <a:spAutoFit/>
+            <a:noAutofit/>
           </a:bodyPr>
           <a:lstStyle/>
           <a:p>
@@ -8607,7 +8659,7 @@
                 </a:solidFill>
                 <a:latin typeface="Arial"/>
               </a:rPr>
-              <a:t>Lampiran keadaan · 3 panel/halaman · halaman 1 daripada 14   ·   DRAFT_FOR_BARIAH_REVIEW · NOT_INSTRUCTIONALLY_APPROVED · NOT_LEARNER_FACING_FINAL</a:t>
+              <a:t>Lampiran keadaan · 3 panel/halaman · halaman 1 daripada 14   ·   TECHNICAL_PROOF · DRAFT_FOR_BARIAH_REVIEW · NOT_INSTRUCTIONALLY_APPROVED · NOT_LEARNER_FACING_FINAL</a:t>
             </a:r>
           </a:p>
         </p:txBody>
@@ -8648,7 +8700,7 @@
         </p:spPr>
         <p:txBody>
           <a:bodyPr wrap="square" lIns="0" rIns="0" tIns="0" bIns="0">
-            <a:spAutoFit/>
+            <a:noAutofit/>
           </a:bodyPr>
           <a:lstStyle/>
           <a:p>
@@ -8706,7 +8758,7 @@
           <a:fillRef idx="3">
             <a:schemeClr val="accent1"/>
           </a:fillRef>
-          <a:effectRef idx="2">
+          <a:effectRef idx="0">
             <a:schemeClr val="accent1"/>
           </a:effectRef>
           <a:fontRef idx="minor">
@@ -8714,7 +8766,9 @@
           </a:fontRef>
         </p:style>
         <p:txBody>
-          <a:bodyPr rtlCol="0" anchor="ctr"/>
+          <a:bodyPr rtlCol="0" anchor="ctr">
+            <a:noAutofit/>
+          </a:bodyPr>
           <a:lstStyle/>
           <a:p>
             <a:pPr algn="ctr"/>
@@ -8752,7 +8806,7 @@
           <a:fillRef idx="3">
             <a:schemeClr val="accent1"/>
           </a:fillRef>
-          <a:effectRef idx="2">
+          <a:effectRef idx="0">
             <a:schemeClr val="accent1"/>
           </a:effectRef>
           <a:fontRef idx="minor">
@@ -8760,7 +8814,9 @@
           </a:fontRef>
         </p:style>
         <p:txBody>
-          <a:bodyPr rtlCol="0" anchor="ctr"/>
+          <a:bodyPr rtlCol="0" anchor="ctr">
+            <a:noAutofit/>
+          </a:bodyPr>
           <a:lstStyle/>
           <a:p>
             <a:pPr algn="ctr"/>
@@ -8785,7 +8841,7 @@
         </p:spPr>
         <p:txBody>
           <a:bodyPr wrap="square" lIns="0" rIns="0" tIns="0" bIns="0">
-            <a:spAutoFit/>
+            <a:noAutofit/>
           </a:bodyPr>
           <a:lstStyle/>
           <a:p>
@@ -8953,7 +9009,7 @@
           <a:fillRef idx="3">
             <a:schemeClr val="accent1"/>
           </a:fillRef>
-          <a:effectRef idx="2">
+          <a:effectRef idx="0">
             <a:schemeClr val="accent1"/>
           </a:effectRef>
           <a:fontRef idx="minor">
@@ -8961,7 +9017,9 @@
           </a:fontRef>
         </p:style>
         <p:txBody>
-          <a:bodyPr rtlCol="0" anchor="ctr"/>
+          <a:bodyPr rtlCol="0" anchor="ctr">
+            <a:noAutofit/>
+          </a:bodyPr>
           <a:lstStyle/>
           <a:p>
             <a:pPr algn="ctr"/>
@@ -8986,7 +9044,7 @@
         </p:spPr>
         <p:txBody>
           <a:bodyPr wrap="square" lIns="0" rIns="0" tIns="0" bIns="0">
-            <a:spAutoFit/>
+            <a:noAutofit/>
           </a:bodyPr>
           <a:lstStyle/>
           <a:p>
@@ -9154,7 +9212,7 @@
           <a:fillRef idx="3">
             <a:schemeClr val="accent1"/>
           </a:fillRef>
-          <a:effectRef idx="2">
+          <a:effectRef idx="0">
             <a:schemeClr val="accent1"/>
           </a:effectRef>
           <a:fontRef idx="minor">
@@ -9162,7 +9220,9 @@
           </a:fontRef>
         </p:style>
         <p:txBody>
-          <a:bodyPr rtlCol="0" anchor="ctr"/>
+          <a:bodyPr rtlCol="0" anchor="ctr">
+            <a:noAutofit/>
+          </a:bodyPr>
           <a:lstStyle/>
           <a:p>
             <a:pPr algn="ctr"/>
@@ -9187,7 +9247,7 @@
         </p:spPr>
         <p:txBody>
           <a:bodyPr wrap="square" lIns="0" rIns="0" tIns="0" bIns="0">
-            <a:spAutoFit/>
+            <a:noAutofit/>
           </a:bodyPr>
           <a:lstStyle/>
           <a:p>
@@ -9342,7 +9402,7 @@
         </p:spPr>
         <p:txBody>
           <a:bodyPr wrap="square" lIns="0" rIns="0" tIns="0" bIns="0">
-            <a:spAutoFit/>
+            <a:noAutofit/>
           </a:bodyPr>
           <a:lstStyle/>
           <a:p>
@@ -9354,7 +9414,7 @@
                 </a:solidFill>
                 <a:latin typeface="Arial"/>
               </a:rPr>
-              <a:t>Lampiran keadaan · 3 panel/halaman · halaman 2 daripada 14   ·   DRAFT_FOR_BARIAH_REVIEW · NOT_INSTRUCTIONALLY_APPROVED · NOT_LEARNER_FACING_FINAL</a:t>
+              <a:t>Lampiran keadaan · 3 panel/halaman · halaman 2 daripada 14   ·   TECHNICAL_PROOF · DRAFT_FOR_BARIAH_REVIEW · NOT_INSTRUCTIONALLY_APPROVED · NOT_LEARNER_FACING_FINAL</a:t>
             </a:r>
           </a:p>
         </p:txBody>
@@ -9395,7 +9455,7 @@
         </p:spPr>
         <p:txBody>
           <a:bodyPr wrap="square" lIns="0" rIns="0" tIns="0" bIns="0">
-            <a:spAutoFit/>
+            <a:noAutofit/>
           </a:bodyPr>
           <a:lstStyle/>
           <a:p>
@@ -9453,7 +9513,7 @@
           <a:fillRef idx="3">
             <a:schemeClr val="accent1"/>
           </a:fillRef>
-          <a:effectRef idx="2">
+          <a:effectRef idx="0">
             <a:schemeClr val="accent1"/>
           </a:effectRef>
           <a:fontRef idx="minor">
@@ -9461,7 +9521,9 @@
           </a:fontRef>
         </p:style>
         <p:txBody>
-          <a:bodyPr rtlCol="0" anchor="ctr"/>
+          <a:bodyPr rtlCol="0" anchor="ctr">
+            <a:noAutofit/>
+          </a:bodyPr>
           <a:lstStyle/>
           <a:p>
             <a:pPr algn="ctr"/>
@@ -9499,7 +9561,7 @@
           <a:fillRef idx="3">
             <a:schemeClr val="accent1"/>
           </a:fillRef>
-          <a:effectRef idx="2">
+          <a:effectRef idx="0">
             <a:schemeClr val="accent1"/>
           </a:effectRef>
           <a:fontRef idx="minor">
@@ -9507,7 +9569,9 @@
           </a:fontRef>
         </p:style>
         <p:txBody>
-          <a:bodyPr rtlCol="0" anchor="ctr"/>
+          <a:bodyPr rtlCol="0" anchor="ctr">
+            <a:noAutofit/>
+          </a:bodyPr>
           <a:lstStyle/>
           <a:p>
             <a:pPr algn="ctr"/>
@@ -9532,7 +9596,7 @@
         </p:spPr>
         <p:txBody>
           <a:bodyPr wrap="square" lIns="0" rIns="0" tIns="0" bIns="0">
-            <a:spAutoFit/>
+            <a:noAutofit/>
           </a:bodyPr>
           <a:lstStyle/>
           <a:p>
@@ -9736,7 +9800,7 @@
                 </a:solidFill>
                 <a:latin typeface="Arial"/>
               </a:rPr>
-              <a:t>Baris: T03B03-ROW-016, T03B03-ROW-017, T03B03-ROW-018, T03B03-ROW-019, T03B03-ROW-020, T03B03-ROW-022, T03B03-ROW-030</a:t>
+              <a:t>Baris: T03B03-ROW-016, T03B03-ROW-017, (+5)</a:t>
             </a:r>
           </a:p>
           <a:p>
@@ -9784,7 +9848,7 @@
           <a:fillRef idx="3">
             <a:schemeClr val="accent1"/>
           </a:fillRef>
-          <a:effectRef idx="2">
+          <a:effectRef idx="0">
             <a:schemeClr val="accent1"/>
           </a:effectRef>
           <a:fontRef idx="minor">
@@ -9792,7 +9856,9 @@
           </a:fontRef>
         </p:style>
         <p:txBody>
-          <a:bodyPr rtlCol="0" anchor="ctr"/>
+          <a:bodyPr rtlCol="0" anchor="ctr">
+            <a:noAutofit/>
+          </a:bodyPr>
           <a:lstStyle/>
           <a:p>
             <a:pPr algn="ctr"/>
@@ -9817,7 +9883,7 @@
         </p:spPr>
         <p:txBody>
           <a:bodyPr wrap="square" lIns="0" rIns="0" tIns="0" bIns="0">
-            <a:spAutoFit/>
+            <a:noAutofit/>
           </a:bodyPr>
           <a:lstStyle/>
           <a:p>
@@ -9985,7 +10051,7 @@
           <a:fillRef idx="3">
             <a:schemeClr val="accent1"/>
           </a:fillRef>
-          <a:effectRef idx="2">
+          <a:effectRef idx="0">
             <a:schemeClr val="accent1"/>
           </a:effectRef>
           <a:fontRef idx="minor">
@@ -9993,7 +10059,9 @@
           </a:fontRef>
         </p:style>
         <p:txBody>
-          <a:bodyPr rtlCol="0" anchor="ctr"/>
+          <a:bodyPr rtlCol="0" anchor="ctr">
+            <a:noAutofit/>
+          </a:bodyPr>
           <a:lstStyle/>
           <a:p>
             <a:pPr algn="ctr"/>
@@ -10018,7 +10086,7 @@
         </p:spPr>
         <p:txBody>
           <a:bodyPr wrap="square" lIns="0" rIns="0" tIns="0" bIns="0">
-            <a:spAutoFit/>
+            <a:noAutofit/>
           </a:bodyPr>
           <a:lstStyle/>
           <a:p>
@@ -10210,7 +10278,7 @@
                 </a:solidFill>
                 <a:latin typeface="Arial"/>
               </a:rPr>
-              <a:t>Baris: T03B03-ROW-023, T03B03-ROW-024, T03B03-ROW-025, T03B03-ROW-026, T03B03-ROW-027, T03B03-ROW-028, T03B03-ROW-029</a:t>
+              <a:t>Baris: T03B03-ROW-023, T03B03-ROW-024, (+5)</a:t>
             </a:r>
           </a:p>
           <a:p>
@@ -10245,7 +10313,7 @@
         </p:spPr>
         <p:txBody>
           <a:bodyPr wrap="square" lIns="0" rIns="0" tIns="0" bIns="0">
-            <a:spAutoFit/>
+            <a:noAutofit/>
           </a:bodyPr>
           <a:lstStyle/>
           <a:p>
@@ -10257,7 +10325,7 @@
                 </a:solidFill>
                 <a:latin typeface="Arial"/>
               </a:rPr>
-              <a:t>Lampiran keadaan · 3 panel/halaman · halaman 3 daripada 14   ·   DRAFT_FOR_BARIAH_REVIEW · NOT_INSTRUCTIONALLY_APPROVED · NOT_LEARNER_FACING_FINAL</a:t>
+              <a:t>Lampiran keadaan · 3 panel/halaman · halaman 3 daripada 14   ·   TECHNICAL_PROOF · DRAFT_FOR_BARIAH_REVIEW · NOT_INSTRUCTIONALLY_APPROVED · NOT_LEARNER_FACING_FINAL</a:t>
             </a:r>
           </a:p>
         </p:txBody>
@@ -10298,7 +10366,7 @@
         </p:spPr>
         <p:txBody>
           <a:bodyPr wrap="square" lIns="0" rIns="0" tIns="0" bIns="0">
-            <a:spAutoFit/>
+            <a:noAutofit/>
           </a:bodyPr>
           <a:lstStyle/>
           <a:p>
@@ -10356,7 +10424,7 @@
           <a:fillRef idx="3">
             <a:schemeClr val="accent1"/>
           </a:fillRef>
-          <a:effectRef idx="2">
+          <a:effectRef idx="0">
             <a:schemeClr val="accent1"/>
           </a:effectRef>
           <a:fontRef idx="minor">
@@ -10364,7 +10432,9 @@
           </a:fontRef>
         </p:style>
         <p:txBody>
-          <a:bodyPr rtlCol="0" anchor="ctr"/>
+          <a:bodyPr rtlCol="0" anchor="ctr">
+            <a:noAutofit/>
+          </a:bodyPr>
           <a:lstStyle/>
           <a:p>
             <a:pPr algn="ctr"/>
@@ -10402,7 +10472,7 @@
           <a:fillRef idx="3">
             <a:schemeClr val="accent1"/>
           </a:fillRef>
-          <a:effectRef idx="2">
+          <a:effectRef idx="0">
             <a:schemeClr val="accent1"/>
           </a:effectRef>
           <a:fontRef idx="minor">
@@ -10410,7 +10480,9 @@
           </a:fontRef>
         </p:style>
         <p:txBody>
-          <a:bodyPr rtlCol="0" anchor="ctr"/>
+          <a:bodyPr rtlCol="0" anchor="ctr">
+            <a:noAutofit/>
+          </a:bodyPr>
           <a:lstStyle/>
           <a:p>
             <a:pPr algn="ctr"/>
@@ -10435,7 +10507,7 @@
         </p:spPr>
         <p:txBody>
           <a:bodyPr wrap="square" lIns="0" rIns="0" tIns="0" bIns="0">
-            <a:spAutoFit/>
+            <a:noAutofit/>
           </a:bodyPr>
           <a:lstStyle/>
           <a:p>
@@ -10603,7 +10675,7 @@
           <a:fillRef idx="3">
             <a:schemeClr val="accent1"/>
           </a:fillRef>
-          <a:effectRef idx="2">
+          <a:effectRef idx="0">
             <a:schemeClr val="accent1"/>
           </a:effectRef>
           <a:fontRef idx="minor">
@@ -10611,7 +10683,9 @@
           </a:fontRef>
         </p:style>
         <p:txBody>
-          <a:bodyPr rtlCol="0" anchor="ctr"/>
+          <a:bodyPr rtlCol="0" anchor="ctr">
+            <a:noAutofit/>
+          </a:bodyPr>
           <a:lstStyle/>
           <a:p>
             <a:pPr algn="ctr"/>
@@ -10636,7 +10710,7 @@
         </p:spPr>
         <p:txBody>
           <a:bodyPr wrap="square" lIns="0" rIns="0" tIns="0" bIns="0">
-            <a:spAutoFit/>
+            <a:noAutofit/>
           </a:bodyPr>
           <a:lstStyle/>
           <a:p>
@@ -10791,7 +10865,7 @@
         </p:spPr>
         <p:txBody>
           <a:bodyPr wrap="square" lIns="0" rIns="0" tIns="0" bIns="0">
-            <a:spAutoFit/>
+            <a:noAutofit/>
           </a:bodyPr>
           <a:lstStyle/>
           <a:p>
@@ -10803,7 +10877,7 @@
                 </a:solidFill>
                 <a:latin typeface="Arial"/>
               </a:rPr>
-              <a:t>Lampiran keadaan · 3 panel/halaman · halaman 4 daripada 14   ·   DRAFT_FOR_BARIAH_REVIEW · NOT_INSTRUCTIONALLY_APPROVED · NOT_LEARNER_FACING_FINAL</a:t>
+              <a:t>Lampiran keadaan · 3 panel/halaman · halaman 4 daripada 14   ·   TECHNICAL_PROOF · DRAFT_FOR_BARIAH_REVIEW · NOT_INSTRUCTIONALLY_APPROVED · NOT_LEARNER_FACING_FINAL</a:t>
             </a:r>
           </a:p>
         </p:txBody>
@@ -10844,7 +10918,7 @@
         </p:spPr>
         <p:txBody>
           <a:bodyPr wrap="square" lIns="0" rIns="0" tIns="0" bIns="0">
-            <a:spAutoFit/>
+            <a:noAutofit/>
           </a:bodyPr>
           <a:lstStyle/>
           <a:p>
@@ -10902,7 +10976,7 @@
           <a:fillRef idx="3">
             <a:schemeClr val="accent1"/>
           </a:fillRef>
-          <a:effectRef idx="2">
+          <a:effectRef idx="0">
             <a:schemeClr val="accent1"/>
           </a:effectRef>
           <a:fontRef idx="minor">
@@ -10910,7 +10984,9 @@
           </a:fontRef>
         </p:style>
         <p:txBody>
-          <a:bodyPr rtlCol="0" anchor="ctr"/>
+          <a:bodyPr rtlCol="0" anchor="ctr">
+            <a:noAutofit/>
+          </a:bodyPr>
           <a:lstStyle/>
           <a:p>
             <a:pPr algn="ctr"/>
@@ -10948,7 +11024,7 @@
           <a:fillRef idx="3">
             <a:schemeClr val="accent1"/>
           </a:fillRef>
-          <a:effectRef idx="2">
+          <a:effectRef idx="0">
             <a:schemeClr val="accent1"/>
           </a:effectRef>
           <a:fontRef idx="minor">
@@ -10956,7 +11032,9 @@
           </a:fontRef>
         </p:style>
         <p:txBody>
-          <a:bodyPr rtlCol="0" anchor="ctr"/>
+          <a:bodyPr rtlCol="0" anchor="ctr">
+            <a:noAutofit/>
+          </a:bodyPr>
           <a:lstStyle/>
           <a:p>
             <a:pPr algn="ctr"/>
@@ -10981,7 +11059,7 @@
         </p:spPr>
         <p:txBody>
           <a:bodyPr wrap="square" lIns="0" rIns="0" tIns="0" bIns="0">
-            <a:spAutoFit/>
+            <a:noAutofit/>
           </a:bodyPr>
           <a:lstStyle/>
           <a:p>
@@ -11185,7 +11263,7 @@
                 </a:solidFill>
                 <a:latin typeface="Arial"/>
               </a:rPr>
-              <a:t>Baris: T03B03-ROW-032, T03B03-ROW-033, T03B03-ROW-034, T03B03-ROW-035, T03B03-ROW-036, T03B03-ROW-038, T03B03-ROW-040</a:t>
+              <a:t>Baris: T03B03-ROW-032, T03B03-ROW-033, (+5)</a:t>
             </a:r>
           </a:p>
           <a:p>
@@ -11233,7 +11311,7 @@
           <a:fillRef idx="3">
             <a:schemeClr val="accent1"/>
           </a:fillRef>
-          <a:effectRef idx="2">
+          <a:effectRef idx="0">
             <a:schemeClr val="accent1"/>
           </a:effectRef>
           <a:fontRef idx="minor">
@@ -11241,7 +11319,9 @@
           </a:fontRef>
         </p:style>
         <p:txBody>
-          <a:bodyPr rtlCol="0" anchor="ctr"/>
+          <a:bodyPr rtlCol="0" anchor="ctr">
+            <a:noAutofit/>
+          </a:bodyPr>
           <a:lstStyle/>
           <a:p>
             <a:pPr algn="ctr"/>
@@ -11266,7 +11346,7 @@
         </p:spPr>
         <p:txBody>
           <a:bodyPr wrap="square" lIns="0" rIns="0" tIns="0" bIns="0">
-            <a:spAutoFit/>
+            <a:noAutofit/>
           </a:bodyPr>
           <a:lstStyle/>
           <a:p>
@@ -11434,7 +11514,7 @@
           <a:fillRef idx="3">
             <a:schemeClr val="accent1"/>
           </a:fillRef>
-          <a:effectRef idx="2">
+          <a:effectRef idx="0">
             <a:schemeClr val="accent1"/>
           </a:effectRef>
           <a:fontRef idx="minor">
@@ -11442,7 +11522,9 @@
           </a:fontRef>
         </p:style>
         <p:txBody>
-          <a:bodyPr rtlCol="0" anchor="ctr"/>
+          <a:bodyPr rtlCol="0" anchor="ctr">
+            <a:noAutofit/>
+          </a:bodyPr>
           <a:lstStyle/>
           <a:p>
             <a:pPr algn="ctr"/>
@@ -11467,7 +11549,7 @@
         </p:spPr>
         <p:txBody>
           <a:bodyPr wrap="square" lIns="0" rIns="0" tIns="0" bIns="0">
-            <a:spAutoFit/>
+            <a:noAutofit/>
           </a:bodyPr>
           <a:lstStyle/>
           <a:p>
@@ -11622,7 +11704,7 @@
         </p:spPr>
         <p:txBody>
           <a:bodyPr wrap="square" lIns="0" rIns="0" tIns="0" bIns="0">
-            <a:spAutoFit/>
+            <a:noAutofit/>
           </a:bodyPr>
           <a:lstStyle/>
           <a:p>
@@ -11634,7 +11716,7 @@
                 </a:solidFill>
                 <a:latin typeface="Arial"/>
               </a:rPr>
-              <a:t>Lampiran keadaan · 3 panel/halaman · halaman 5 daripada 14   ·   DRAFT_FOR_BARIAH_REVIEW · NOT_INSTRUCTIONALLY_APPROVED · NOT_LEARNER_FACING_FINAL</a:t>
+              <a:t>Lampiran keadaan · 3 panel/halaman · halaman 5 daripada 14   ·   TECHNICAL_PROOF · DRAFT_FOR_BARIAH_REVIEW · NOT_INSTRUCTIONALLY_APPROVED · NOT_LEARNER_FACING_FINAL</a:t>
             </a:r>
           </a:p>
         </p:txBody>
@@ -11675,7 +11757,7 @@
         </p:spPr>
         <p:txBody>
           <a:bodyPr wrap="square" lIns="0" rIns="0" tIns="0" bIns="0">
-            <a:spAutoFit/>
+            <a:noAutofit/>
           </a:bodyPr>
           <a:lstStyle/>
           <a:p>
@@ -11733,7 +11815,7 @@
           <a:fillRef idx="3">
             <a:schemeClr val="accent1"/>
           </a:fillRef>
-          <a:effectRef idx="2">
+          <a:effectRef idx="0">
             <a:schemeClr val="accent1"/>
           </a:effectRef>
           <a:fontRef idx="minor">
@@ -11741,7 +11823,9 @@
           </a:fontRef>
         </p:style>
         <p:txBody>
-          <a:bodyPr rtlCol="0" anchor="ctr"/>
+          <a:bodyPr rtlCol="0" anchor="ctr">
+            <a:noAutofit/>
+          </a:bodyPr>
           <a:lstStyle/>
           <a:p>
             <a:pPr algn="ctr"/>
@@ -11779,7 +11863,7 @@
           <a:fillRef idx="3">
             <a:schemeClr val="accent1"/>
           </a:fillRef>
-          <a:effectRef idx="2">
+          <a:effectRef idx="0">
             <a:schemeClr val="accent1"/>
           </a:effectRef>
           <a:fontRef idx="minor">
@@ -11787,7 +11871,9 @@
           </a:fontRef>
         </p:style>
         <p:txBody>
-          <a:bodyPr rtlCol="0" anchor="ctr"/>
+          <a:bodyPr rtlCol="0" anchor="ctr">
+            <a:noAutofit/>
+          </a:bodyPr>
           <a:lstStyle/>
           <a:p>
             <a:pPr algn="ctr"/>
@@ -11812,7 +11898,7 @@
         </p:spPr>
         <p:txBody>
           <a:bodyPr wrap="square" lIns="0" rIns="0" tIns="0" bIns="0">
-            <a:spAutoFit/>
+            <a:noAutofit/>
           </a:bodyPr>
           <a:lstStyle/>
           <a:p>
@@ -11980,7 +12066,7 @@
           <a:fillRef idx="3">
             <a:schemeClr val="accent1"/>
           </a:fillRef>
-          <a:effectRef idx="2">
+          <a:effectRef idx="0">
             <a:schemeClr val="accent1"/>
           </a:effectRef>
           <a:fontRef idx="minor">
@@ -11988,7 +12074,9 @@
           </a:fontRef>
         </p:style>
         <p:txBody>
-          <a:bodyPr rtlCol="0" anchor="ctr"/>
+          <a:bodyPr rtlCol="0" anchor="ctr">
+            <a:noAutofit/>
+          </a:bodyPr>
           <a:lstStyle/>
           <a:p>
             <a:pPr algn="ctr"/>
@@ -12013,7 +12101,7 @@
         </p:spPr>
         <p:txBody>
           <a:bodyPr wrap="square" lIns="0" rIns="0" tIns="0" bIns="0">
-            <a:spAutoFit/>
+            <a:noAutofit/>
           </a:bodyPr>
           <a:lstStyle/>
           <a:p>
@@ -12168,7 +12256,7 @@
         </p:spPr>
         <p:txBody>
           <a:bodyPr wrap="square" lIns="0" rIns="0" tIns="0" bIns="0">
-            <a:spAutoFit/>
+            <a:noAutofit/>
           </a:bodyPr>
           <a:lstStyle/>
           <a:p>
@@ -12180,7 +12268,7 @@
                 </a:solidFill>
                 <a:latin typeface="Arial"/>
               </a:rPr>
-              <a:t>Lampiran keadaan · 3 panel/halaman · halaman 6 daripada 14   ·   DRAFT_FOR_BARIAH_REVIEW · NOT_INSTRUCTIONALLY_APPROVED · NOT_LEARNER_FACING_FINAL</a:t>
+              <a:t>Lampiran keadaan · 3 panel/halaman · halaman 6 daripada 14   ·   TECHNICAL_PROOF · DRAFT_FOR_BARIAH_REVIEW · NOT_INSTRUCTIONALLY_APPROVED · NOT_LEARNER_FACING_FINAL</a:t>
             </a:r>
           </a:p>
         </p:txBody>
@@ -12221,7 +12309,7 @@
         </p:spPr>
         <p:txBody>
           <a:bodyPr wrap="square" lIns="0" rIns="0" tIns="0" bIns="0">
-            <a:spAutoFit/>
+            <a:noAutofit/>
           </a:bodyPr>
           <a:lstStyle/>
           <a:p>
@@ -12279,7 +12367,7 @@
           <a:fillRef idx="3">
             <a:schemeClr val="accent1"/>
           </a:fillRef>
-          <a:effectRef idx="2">
+          <a:effectRef idx="0">
             <a:schemeClr val="accent1"/>
           </a:effectRef>
           <a:fontRef idx="minor">
@@ -12287,7 +12375,9 @@
           </a:fontRef>
         </p:style>
         <p:txBody>
-          <a:bodyPr rtlCol="0" anchor="ctr"/>
+          <a:bodyPr rtlCol="0" anchor="ctr">
+            <a:noAutofit/>
+          </a:bodyPr>
           <a:lstStyle/>
           <a:p>
             <a:pPr algn="ctr"/>
@@ -12325,7 +12415,7 @@
           <a:fillRef idx="3">
             <a:schemeClr val="accent1"/>
           </a:fillRef>
-          <a:effectRef idx="2">
+          <a:effectRef idx="0">
             <a:schemeClr val="accent1"/>
           </a:effectRef>
           <a:fontRef idx="minor">
@@ -12333,7 +12423,9 @@
           </a:fontRef>
         </p:style>
         <p:txBody>
-          <a:bodyPr rtlCol="0" anchor="ctr"/>
+          <a:bodyPr rtlCol="0" anchor="ctr">
+            <a:noAutofit/>
+          </a:bodyPr>
           <a:lstStyle/>
           <a:p>
             <a:pPr algn="ctr"/>
@@ -12358,7 +12450,7 @@
         </p:spPr>
         <p:txBody>
           <a:bodyPr wrap="square" lIns="0" rIns="0" tIns="0" bIns="0">
-            <a:spAutoFit/>
+            <a:noAutofit/>
           </a:bodyPr>
           <a:lstStyle/>
           <a:p>
@@ -12562,7 +12654,7 @@
                 </a:solidFill>
                 <a:latin typeface="Arial"/>
               </a:rPr>
-              <a:t>Baris: T03B03-ROW-042, T03B03-ROW-043, T03B03-ROW-044, T03B03-ROW-045, T03B03-ROW-046, T03B03-ROW-047, T03B03-ROW-049, T03B03-ROW-051, T03B03-ROW-053</a:t>
+              <a:t>Baris: T03B03-ROW-042, T03B03-ROW-043, (+7)</a:t>
             </a:r>
           </a:p>
           <a:p>
@@ -12610,7 +12702,7 @@
           <a:fillRef idx="3">
             <a:schemeClr val="accent1"/>
           </a:fillRef>
-          <a:effectRef idx="2">
+          <a:effectRef idx="0">
             <a:schemeClr val="accent1"/>
           </a:effectRef>
           <a:fontRef idx="minor">
@@ -12618,7 +12710,9 @@
           </a:fontRef>
         </p:style>
         <p:txBody>
-          <a:bodyPr rtlCol="0" anchor="ctr"/>
+          <a:bodyPr rtlCol="0" anchor="ctr">
+            <a:noAutofit/>
+          </a:bodyPr>
           <a:lstStyle/>
           <a:p>
             <a:pPr algn="ctr"/>
@@ -12643,7 +12737,7 @@
         </p:spPr>
         <p:txBody>
           <a:bodyPr wrap="square" lIns="0" rIns="0" tIns="0" bIns="0">
-            <a:spAutoFit/>
+            <a:noAutofit/>
           </a:bodyPr>
           <a:lstStyle/>
           <a:p>
@@ -12811,7 +12905,7 @@
           <a:fillRef idx="3">
             <a:schemeClr val="accent1"/>
           </a:fillRef>
-          <a:effectRef idx="2">
+          <a:effectRef idx="0">
             <a:schemeClr val="accent1"/>
           </a:effectRef>
           <a:fontRef idx="minor">
@@ -12819,7 +12913,9 @@
           </a:fontRef>
         </p:style>
         <p:txBody>
-          <a:bodyPr rtlCol="0" anchor="ctr"/>
+          <a:bodyPr rtlCol="0" anchor="ctr">
+            <a:noAutofit/>
+          </a:bodyPr>
           <a:lstStyle/>
           <a:p>
             <a:pPr algn="ctr"/>
@@ -12844,7 +12940,7 @@
         </p:spPr>
         <p:txBody>
           <a:bodyPr wrap="square" lIns="0" rIns="0" tIns="0" bIns="0">
-            <a:spAutoFit/>
+            <a:noAutofit/>
           </a:bodyPr>
           <a:lstStyle/>
           <a:p>
@@ -12999,7 +13095,7 @@
         </p:spPr>
         <p:txBody>
           <a:bodyPr wrap="square" lIns="0" rIns="0" tIns="0" bIns="0">
-            <a:spAutoFit/>
+            <a:noAutofit/>
           </a:bodyPr>
           <a:lstStyle/>
           <a:p>
@@ -13011,7 +13107,7 @@
                 </a:solidFill>
                 <a:latin typeface="Arial"/>
               </a:rPr>
-              <a:t>Lampiran keadaan · 3 panel/halaman · halaman 7 daripada 14   ·   DRAFT_FOR_BARIAH_REVIEW · NOT_INSTRUCTIONALLY_APPROVED · NOT_LEARNER_FACING_FINAL</a:t>
+              <a:t>Lampiran keadaan · 3 panel/halaman · halaman 7 daripada 14   ·   TECHNICAL_PROOF · DRAFT_FOR_BARIAH_REVIEW · NOT_INSTRUCTIONALLY_APPROVED · NOT_LEARNER_FACING_FINAL</a:t>
             </a:r>
           </a:p>
         </p:txBody>
@@ -13052,7 +13148,7 @@
         </p:spPr>
         <p:txBody>
           <a:bodyPr wrap="square" lIns="0" rIns="0" tIns="0" bIns="0">
-            <a:spAutoFit/>
+            <a:noAutofit/>
           </a:bodyPr>
           <a:lstStyle/>
           <a:p>
@@ -13110,7 +13206,7 @@
           <a:fillRef idx="3">
             <a:schemeClr val="accent1"/>
           </a:fillRef>
-          <a:effectRef idx="2">
+          <a:effectRef idx="0">
             <a:schemeClr val="accent1"/>
           </a:effectRef>
           <a:fontRef idx="minor">
@@ -13118,7 +13214,9 @@
           </a:fontRef>
         </p:style>
         <p:txBody>
-          <a:bodyPr rtlCol="0" anchor="ctr"/>
+          <a:bodyPr rtlCol="0" anchor="ctr">
+            <a:noAutofit/>
+          </a:bodyPr>
           <a:lstStyle/>
           <a:p>
             <a:pPr algn="ctr"/>
@@ -13156,7 +13254,7 @@
           <a:fillRef idx="3">
             <a:schemeClr val="accent1"/>
           </a:fillRef>
-          <a:effectRef idx="2">
+          <a:effectRef idx="0">
             <a:schemeClr val="accent1"/>
           </a:effectRef>
           <a:fontRef idx="minor">
@@ -13164,7 +13262,9 @@
           </a:fontRef>
         </p:style>
         <p:txBody>
-          <a:bodyPr rtlCol="0" anchor="ctr"/>
+          <a:bodyPr rtlCol="0" anchor="ctr">
+            <a:noAutofit/>
+          </a:bodyPr>
           <a:lstStyle/>
           <a:p>
             <a:pPr algn="ctr"/>
@@ -13189,7 +13289,7 @@
         </p:spPr>
         <p:txBody>
           <a:bodyPr wrap="square" lIns="0" rIns="0" tIns="0" bIns="0">
-            <a:spAutoFit/>
+            <a:noAutofit/>
           </a:bodyPr>
           <a:lstStyle/>
           <a:p>
@@ -13357,7 +13457,7 @@
           <a:fillRef idx="3">
             <a:schemeClr val="accent1"/>
           </a:fillRef>
-          <a:effectRef idx="2">
+          <a:effectRef idx="0">
             <a:schemeClr val="accent1"/>
           </a:effectRef>
           <a:fontRef idx="minor">
@@ -13365,7 +13465,9 @@
           </a:fontRef>
         </p:style>
         <p:txBody>
-          <a:bodyPr rtlCol="0" anchor="ctr"/>
+          <a:bodyPr rtlCol="0" anchor="ctr">
+            <a:noAutofit/>
+          </a:bodyPr>
           <a:lstStyle/>
           <a:p>
             <a:pPr algn="ctr"/>
@@ -13390,7 +13492,7 @@
         </p:spPr>
         <p:txBody>
           <a:bodyPr wrap="square" lIns="0" rIns="0" tIns="0" bIns="0">
-            <a:spAutoFit/>
+            <a:noAutofit/>
           </a:bodyPr>
           <a:lstStyle/>
           <a:p>
@@ -13558,7 +13660,7 @@
           <a:fillRef idx="3">
             <a:schemeClr val="accent1"/>
           </a:fillRef>
-          <a:effectRef idx="2">
+          <a:effectRef idx="0">
             <a:schemeClr val="accent1"/>
           </a:effectRef>
           <a:fontRef idx="minor">
@@ -13566,7 +13668,9 @@
           </a:fontRef>
         </p:style>
         <p:txBody>
-          <a:bodyPr rtlCol="0" anchor="ctr"/>
+          <a:bodyPr rtlCol="0" anchor="ctr">
+            <a:noAutofit/>
+          </a:bodyPr>
           <a:lstStyle/>
           <a:p>
             <a:pPr algn="ctr"/>
@@ -13591,7 +13695,7 @@
         </p:spPr>
         <p:txBody>
           <a:bodyPr wrap="square" lIns="0" rIns="0" tIns="0" bIns="0">
-            <a:spAutoFit/>
+            <a:noAutofit/>
           </a:bodyPr>
           <a:lstStyle/>
           <a:p>
@@ -13746,7 +13850,7 @@
         </p:spPr>
         <p:txBody>
           <a:bodyPr wrap="square" lIns="0" rIns="0" tIns="0" bIns="0">
-            <a:spAutoFit/>
+            <a:noAutofit/>
           </a:bodyPr>
           <a:lstStyle/>
           <a:p>
@@ -13758,7 +13862,7 @@
                 </a:solidFill>
                 <a:latin typeface="Arial"/>
               </a:rPr>
-              <a:t>Lampiran keadaan · 3 panel/halaman · halaman 8 daripada 14   ·   DRAFT_FOR_BARIAH_REVIEW · NOT_INSTRUCTIONALLY_APPROVED · NOT_LEARNER_FACING_FINAL</a:t>
+              <a:t>Lampiran keadaan · 3 panel/halaman · halaman 8 daripada 14   ·   TECHNICAL_PROOF · DRAFT_FOR_BARIAH_REVIEW · NOT_INSTRUCTIONALLY_APPROVED · NOT_LEARNER_FACING_FINAL</a:t>
             </a:r>
           </a:p>
         </p:txBody>

--- a/reviews/storyboard-bariah/k5_calibration/K5PL06T03B03_LAMPIRAN_KEADAAN_DRAF_v0_1_3panel.pptx
+++ b/reviews/storyboard-bariah/k5_calibration/K5PL06T03B03_LAMPIRAN_KEADAAN_DRAF_v0_1_3panel.pptx
@@ -20,6 +20,7 @@
     <p:sldId id="268" r:id="rId19"/>
     <p:sldId id="269" r:id="rId20"/>
     <p:sldId id="270" r:id="rId21"/>
+    <p:sldId id="271" r:id="rId22"/>
   </p:sldIdLst>
   <p:sldSz cx="12192000" cy="6858000" type="screen4x3"/>
   <p:notesSz cx="6858000" cy="9144000"/>
@@ -3156,7 +3157,7 @@
                 </a:solidFill>
                 <a:latin typeface="Arial"/>
               </a:rPr>
-              <a:t>38 keadaan dipanelkan daripada 43 keadaan runtime · 3 panel setiap halaman · 14 halaman</a:t>
+              <a:t>41 keadaan dipanelkan daripada 46 keadaan runtime · 3 panel setiap halaman · 15 halaman</a:t>
             </a:r>
           </a:p>
           <a:p>
@@ -3257,7 +3258,7 @@
                 </a:solidFill>
                 <a:latin typeface="Arial"/>
               </a:rPr>
-              <a:t>T03B03-S08   ·   click-to-reveal</a:t>
+              <a:t>T03B03-S07   ·   Click-to-Reveal</a:t>
             </a:r>
           </a:p>
           <a:p>
@@ -3269,7 +3270,7 @@
                 </a:solidFill>
                 <a:latin typeface="Arial"/>
               </a:rPr>
-              <a:t>Swale/ Natural Drain</a:t>
+              <a:t>Fencing</a:t>
             </a:r>
           </a:p>
         </p:txBody>
@@ -3398,7 +3399,7 @@
                 </a:solidFill>
                 <a:latin typeface="Arial"/>
               </a:rPr>
-              <a:t>T03B03-S08-ST-BASE   ·   Keadaan asas</a:t>
+              <a:t>T03B03-S07-ST-03   ·   Panel pendedahan</a:t>
             </a:r>
           </a:p>
           <a:p>
@@ -3406,11 +3407,11 @@
             <a:r>
               <a:rPr sz="1200" b="1" i="0">
                 <a:solidFill>
-                  <a:srgbClr val="1B5E20"/>
-                </a:solidFill>
-                <a:latin typeface="Arial"/>
-              </a:rPr>
-              <a:t>Pencetus: screen entry</a:t>
+                  <a:srgbClr val="37474F"/>
+                </a:solidFill>
+                <a:latin typeface="Arial"/>
+              </a:rPr>
+              <a:t>Pencetus: Ketegangan Pemasangan  [T03B03-S07-TRG-03]</a:t>
             </a:r>
           </a:p>
           <a:p>
@@ -3434,79 +3435,67 @@
                 </a:solidFill>
                 <a:latin typeface="Arial"/>
               </a:rPr>
-              <a:t>· Swale/ Natural Drain</a:t>
-            </a:r>
-          </a:p>
-          <a:p>
-            <a:pPr algn="l" lvl="1"/>
-            <a:r>
-              <a:rPr sz="1000" b="0" i="0">
-                <a:solidFill>
-                  <a:srgbClr val="1A1A1A"/>
-                </a:solidFill>
-                <a:latin typeface="Arial"/>
-              </a:rPr>
-              <a:t>· Swale adalah sejenis parit yang cetek, lebar, dan ditanami dengan rumput atau tumbuhan. Ia merupakan alternatif mesra alam kepada parit konkrit.</a:t>
-            </a:r>
-          </a:p>
-          <a:p>
-            <a:pPr algn="l" lvl="1"/>
-            <a:r>
-              <a:rPr sz="1000" b="0" i="0">
-                <a:solidFill>
-                  <a:srgbClr val="1A1A1A"/>
-                </a:solidFill>
-                <a:latin typeface="Arial"/>
-              </a:rPr>
-              <a:t>· Swale ialah parit cetek dan lebar yang ditanami tumbuhan, alternatif kepada longkang konkrit, yang memperlahankan aliran dan menggalakkan penyerapan.</a:t>
-            </a:r>
-          </a:p>
-          <a:p>
-            <a:pPr algn="l" lvl="1"/>
-            <a:r>
-              <a:rPr sz="1000" b="0" i="0">
-                <a:solidFill>
-                  <a:srgbClr val="1A1A1A"/>
-                </a:solidFill>
-                <a:latin typeface="Arial"/>
-              </a:rPr>
-              <a:t>· Fungsi</a:t>
-            </a:r>
-          </a:p>
-          <a:p>
-            <a:pPr algn="l" lvl="1"/>
-            <a:r>
-              <a:rPr sz="1000" b="0" i="0">
-                <a:solidFill>
-                  <a:srgbClr val="1A1A1A"/>
-                </a:solidFill>
-                <a:latin typeface="Arial"/>
-              </a:rPr>
-              <a:t>· Menguruskan aliran air larian permukaan dengan memperlahankannya, menggalakkan penyerapan air ke dalam tanah, dan menapis bahan cemar.</a:t>
-            </a:r>
-          </a:p>
-          <a:p>
-            <a:pPr algn="l" lvl="1"/>
-            <a:r>
-              <a:rPr sz="1000" b="0" i="0">
-                <a:solidFill>
-                  <a:srgbClr val="1A1A1A"/>
-                </a:solidFill>
-                <a:latin typeface="Arial"/>
-              </a:rPr>
-              <a:t>· Fokus Utama Kontraktor:</a:t>
-            </a:r>
-          </a:p>
-          <a:p>
-            <a:pPr algn="l" lvl="1"/>
-            <a:r>
-              <a:rPr sz="1000" b="0" i="0">
-                <a:solidFill>
-                  <a:srgbClr val="1A1A1A"/>
-                </a:solidFill>
-                <a:latin typeface="Arial"/>
-              </a:rPr>
-              <a:t>· Pembentukan Landskap</a:t>
+              <a:t>· Bagi pagar jenis jejaring (chain-link) atau BRC, ia mesti ditegangkan dengan sempurna untuk mengelakkannya daripada melendut.</a:t>
+            </a:r>
+          </a:p>
+          <a:p>
+            <a:pPr algn="l"/>
+            <a:r>
+              <a:rPr sz="1000" b="1" i="0">
+                <a:solidFill>
+                  <a:srgbClr val="6B6B6B"/>
+                </a:solidFill>
+                <a:latin typeface="Arial"/>
+              </a:rPr>
+              <a:t>Beza daripada keadaan asas</a:t>
+            </a:r>
+          </a:p>
+          <a:p>
+            <a:pPr algn="l" lvl="1"/>
+            <a:r>
+              <a:rPr sz="1000" b="0" i="0">
+                <a:solidFill>
+                  <a:srgbClr val="1A1A1A"/>
+                </a:solidFill>
+                <a:latin typeface="Arial"/>
+              </a:rPr>
+              <a:t>Menambah 1 rekod yang tersembunyi dalam keadaan asas.</a:t>
+            </a:r>
+          </a:p>
+          <a:p>
+            <a:pPr algn="l"/>
+            <a:r>
+              <a:rPr sz="1000" b="1" i="0">
+                <a:solidFill>
+                  <a:srgbClr val="6B6B6B"/>
+                </a:solidFill>
+                <a:latin typeface="Arial"/>
+              </a:rPr>
+              <a:t>Cara pelajar kembali / meneruskan</a:t>
+            </a:r>
+          </a:p>
+          <a:p>
+            <a:pPr algn="l" lvl="1"/>
+            <a:r>
+              <a:rPr sz="1000" b="0" i="0">
+                <a:solidFill>
+                  <a:srgbClr val="1A1A1A"/>
+                </a:solidFill>
+                <a:latin typeface="Arial"/>
+              </a:rPr>
+              <a:t>Panel tertutup apabila ditekan sekali lagi atau apabila panel lain dibuka. Keadaan asas kembali dan sentiasa boleh dicapai. Tiada navigasi berlaku.</a:t>
+            </a:r>
+          </a:p>
+          <a:p>
+            <a:pPr algn="l"/>
+            <a:r>
+              <a:rPr sz="1000" b="1" i="0">
+                <a:solidFill>
+                  <a:srgbClr val="6B6B6B"/>
+                </a:solidFill>
+                <a:latin typeface="Arial"/>
+              </a:rPr>
+              <a:t>Sumber dan kuasa</a:t>
             </a:r>
           </a:p>
           <a:p>
@@ -3514,83 +3503,11 @@
             <a:r>
               <a:rPr sz="900" b="0" i="0">
                 <a:solidFill>
-                  <a:srgbClr val="6B6B6B"/>
-                </a:solidFill>
-                <a:latin typeface="Arial"/>
-              </a:rPr>
-              <a:t>· … 2 rekod lagi</a:t>
-            </a:r>
-          </a:p>
-          <a:p>
-            <a:pPr algn="l"/>
-            <a:r>
-              <a:rPr sz="1000" b="1" i="0">
-                <a:solidFill>
-                  <a:srgbClr val="6B6B6B"/>
-                </a:solidFill>
-                <a:latin typeface="Arial"/>
-              </a:rPr>
-              <a:t>Beza daripada keadaan asas</a:t>
-            </a:r>
-          </a:p>
-          <a:p>
-            <a:pPr algn="l" lvl="1"/>
-            <a:r>
-              <a:rPr sz="1000" b="0" i="0">
-                <a:solidFill>
-                  <a:srgbClr val="1A1A1A"/>
-                </a:solidFill>
-                <a:latin typeface="Arial"/>
-              </a:rPr>
-              <a:t>— ini keadaan asas —</a:t>
-            </a:r>
-          </a:p>
-          <a:p>
-            <a:pPr algn="l"/>
-            <a:r>
-              <a:rPr sz="1000" b="1" i="0">
-                <a:solidFill>
-                  <a:srgbClr val="6B6B6B"/>
-                </a:solidFill>
-                <a:latin typeface="Arial"/>
-              </a:rPr>
-              <a:t>Cara pelajar kembali / meneruskan</a:t>
-            </a:r>
-          </a:p>
-          <a:p>
-            <a:pPr algn="l" lvl="1"/>
-            <a:r>
-              <a:rPr sz="1000" b="0" i="0">
-                <a:solidFill>
-                  <a:srgbClr val="1A1A1A"/>
-                </a:solidFill>
-                <a:latin typeface="Arial"/>
-              </a:rPr>
-              <a:t>Keadaan masuk. Pelajar meneruskan dengan SETERUSNYA setelah syarat selesai dipenuhi.</a:t>
-            </a:r>
-          </a:p>
-          <a:p>
-            <a:pPr algn="l"/>
-            <a:r>
-              <a:rPr sz="1000" b="1" i="0">
-                <a:solidFill>
-                  <a:srgbClr val="6B6B6B"/>
-                </a:solidFill>
-                <a:latin typeface="Arial"/>
-              </a:rPr>
-              <a:t>Sumber dan kuasa</a:t>
-            </a:r>
-          </a:p>
-          <a:p>
-            <a:pPr algn="l" lvl="1"/>
-            <a:r>
-              <a:rPr sz="900" b="0" i="0">
-                <a:solidFill>
                   <a:srgbClr val="0D47A1"/>
                 </a:solidFill>
                 <a:latin typeface="Arial"/>
               </a:rPr>
-              <a:t>Baris: T03B03-ROW-055, T03B03-ROW-056, (+6)</a:t>
+              <a:t>Baris: T03B03-ROW-052</a:t>
             </a:r>
           </a:p>
           <a:p>
@@ -3685,7 +3602,7 @@
                 </a:solidFill>
                 <a:latin typeface="Arial"/>
               </a:rPr>
-              <a:t>T03B03-S08-ST-01   ·   Panel pendedahan</a:t>
+              <a:t>T03B03-S07-ST-04   ·   Panel pendedahan</a:t>
             </a:r>
           </a:p>
           <a:p>
@@ -3697,7 +3614,7 @@
                 </a:solidFill>
                 <a:latin typeface="Arial"/>
               </a:rPr>
-              <a:t>Pencetus: Pembentukan Landskap  [T03B03-S08-TRG-01]</a:t>
+              <a:t>Pencetus: Kemasan Anti-Karat  [T03B03-S07-TRG-04]</a:t>
             </a:r>
           </a:p>
           <a:p>
@@ -3721,7 +3638,7 @@
                 </a:solidFill>
                 <a:latin typeface="Arial"/>
               </a:rPr>
-              <a:t>· Swale dibentuk melalui kerja penggalian yang minimum untuk menghasilkan satu lekukan yang landai dan lebar, bukannya parit yang dalam dan curam.</a:t>
+              <a:t>· Pastikan semua komponen keluli mempunyai lapisan pelindung karat yang sempurna seperti tergalvani panas (hot-dip galvanized) atau cat epoksi.</a:t>
             </a:r>
           </a:p>
           <a:p>
@@ -3793,7 +3710,7 @@
                 </a:solidFill>
                 <a:latin typeface="Arial"/>
               </a:rPr>
-              <a:t>Baris: T03B03-ROW-061</a:t>
+              <a:t>Baris: T03B03-ROW-054</a:t>
             </a:r>
           </a:p>
           <a:p>
@@ -3888,7 +3805,7 @@
                 </a:solidFill>
                 <a:latin typeface="Arial"/>
               </a:rPr>
-              <a:t>T03B03-S08-ST-02   ·   Panel pendedahan</a:t>
+              <a:t>T03B03-S07-ST-ALL_VIEWED   ·   Penanda selesai</a:t>
             </a:r>
           </a:p>
           <a:p>
@@ -3900,7 +3817,7 @@
                 </a:solidFill>
                 <a:latin typeface="Arial"/>
               </a:rPr>
-              <a:t>Pencetus: Penanaman Tumbuhan  [T03B03-S08-TRG-02]</a:t>
+              <a:t>Pencetus: semua 4 panel dilihat  [T03B03-S07-TRG-ALL]</a:t>
             </a:r>
           </a:p>
           <a:p>
@@ -3918,13 +3835,13 @@
           <a:p>
             <a:pPr algn="l" lvl="1"/>
             <a:r>
-              <a:rPr sz="1000" b="0" i="0">
-                <a:solidFill>
-                  <a:srgbClr val="1A1A1A"/>
-                </a:solidFill>
-                <a:latin typeface="Arial"/>
-              </a:rPr>
-              <a:t>· Permukaan swale mesti ditanam dengan spesies rumput atau tumbuhan tahan air yang sesuai. Tumbuh-tumbuhan ini berfungsi untuk menstabilkan tanah, mengelakkan hakisan, dan membantu dalam proses penapisan air.</a:t>
+              <a:rPr sz="1000" b="0" i="1">
+                <a:solidFill>
+                  <a:srgbClr val="6B6B6B"/>
+                </a:solidFill>
+                <a:latin typeface="Arial"/>
+              </a:rPr>
+              <a:t>Tiada kandungan dipaparkan — penanda sahaja.</a:t>
             </a:r>
           </a:p>
           <a:p>
@@ -3948,7 +3865,7 @@
                 </a:solidFill>
                 <a:latin typeface="Arial"/>
               </a:rPr>
-              <a:t>Menambah 1 rekod yang tersembunyi dalam keadaan asas.</a:t>
+              <a:t>Tidak dipaparkan; membuka SETERUSNYA.</a:t>
             </a:r>
           </a:p>
           <a:p>
@@ -3972,7 +3889,7 @@
                 </a:solidFill>
                 <a:latin typeface="Arial"/>
               </a:rPr>
-              <a:t>Panel tertutup apabila ditekan sekali lagi atau apabila panel lain dibuka. Keadaan asas kembali dan sentiasa boleh dicapai. Tiada navigasi berlaku.</a:t>
+              <a:t>Bukan keadaan yang dipaparkan. Penanda yang menjadi benar setelah semua pendedahan dilihat, dan inilah yang membuka SETERUSNYA.</a:t>
             </a:r>
           </a:p>
           <a:p>
@@ -3996,7 +3913,7 @@
                 </a:solidFill>
                 <a:latin typeface="Arial"/>
               </a:rPr>
-              <a:t>Baris: T03B03-ROW-063</a:t>
+              <a:t>Tiada baris modul — keadaan struktur</a:t>
             </a:r>
           </a:p>
           <a:p>
@@ -4043,7 +3960,7 @@
                 </a:solidFill>
                 <a:latin typeface="Arial"/>
               </a:rPr>
-              <a:t>Lampiran keadaan · 3 panel/halaman · halaman 9 daripada 14   ·   TECHNICAL_PROOF · DRAFT_FOR_BARIAH_REVIEW · NOT_INSTRUCTIONALLY_APPROVED · NOT_LEARNER_FACING_FINAL</a:t>
+              <a:t>Lampiran keadaan · 3 panel/halaman · halaman 9 daripada 15   ·   TECHNICAL_PROOF · DRAFT_FOR_BARIAH_REVIEW · NOT_INSTRUCTIONALLY_APPROVED · NOT_LEARNER_FACING_FINAL</a:t>
             </a:r>
           </a:p>
         </p:txBody>
@@ -4096,7 +4013,7 @@
                 </a:solidFill>
                 <a:latin typeface="Arial"/>
               </a:rPr>
-              <a:t>T03B03-S08   ·   click-to-reveal</a:t>
+              <a:t>T03B03-S08   ·   Click-to-Reveal</a:t>
             </a:r>
           </a:p>
           <a:p>
@@ -4237,7 +4154,7 @@
                 </a:solidFill>
                 <a:latin typeface="Arial"/>
               </a:rPr>
-              <a:t>T03B03-S08-ST-ALL_VIEWED   ·   Penanda selesai</a:t>
+              <a:t>T03B03-S08-ST-BASE   ·   Keadaan asas</a:t>
             </a:r>
           </a:p>
           <a:p>
@@ -4245,11 +4162,11 @@
             <a:r>
               <a:rPr sz="1200" b="1" i="0">
                 <a:solidFill>
-                  <a:srgbClr val="37474F"/>
-                </a:solidFill>
-                <a:latin typeface="Arial"/>
-              </a:rPr>
-              <a:t>Pencetus: semua 2 panel dilihat  [T03B03-S08-TRG-ALL]</a:t>
+                  <a:srgbClr val="1B5E20"/>
+                </a:solidFill>
+                <a:latin typeface="Arial"/>
+              </a:rPr>
+              <a:t>Pencetus: screen entry</a:t>
             </a:r>
           </a:p>
           <a:p>
@@ -4267,13 +4184,97 @@
           <a:p>
             <a:pPr algn="l" lvl="1"/>
             <a:r>
-              <a:rPr sz="1000" b="0" i="1">
-                <a:solidFill>
-                  <a:srgbClr val="6B6B6B"/>
-                </a:solidFill>
-                <a:latin typeface="Arial"/>
-              </a:rPr>
-              <a:t>Tiada kandungan dipaparkan — penanda sahaja.</a:t>
+              <a:rPr sz="1000" b="0" i="0">
+                <a:solidFill>
+                  <a:srgbClr val="1A1A1A"/>
+                </a:solidFill>
+                <a:latin typeface="Arial"/>
+              </a:rPr>
+              <a:t>· Swale/ Natural Drain</a:t>
+            </a:r>
+          </a:p>
+          <a:p>
+            <a:pPr algn="l" lvl="1"/>
+            <a:r>
+              <a:rPr sz="1000" b="0" i="0">
+                <a:solidFill>
+                  <a:srgbClr val="1A1A1A"/>
+                </a:solidFill>
+                <a:latin typeface="Arial"/>
+              </a:rPr>
+              <a:t>· Swale adalah sejenis parit yang cetek, lebar, dan ditanami dengan rumput atau tumbuhan. Ia merupakan alternatif mesra alam kepada parit konkrit.</a:t>
+            </a:r>
+          </a:p>
+          <a:p>
+            <a:pPr algn="l" lvl="1"/>
+            <a:r>
+              <a:rPr sz="1000" b="0" i="0">
+                <a:solidFill>
+                  <a:srgbClr val="1A1A1A"/>
+                </a:solidFill>
+                <a:latin typeface="Arial"/>
+              </a:rPr>
+              <a:t>· Swale ialah parit cetek dan lebar yang ditanami tumbuhan, alternatif kepada longkang konkrit, yang memperlahankan aliran dan menggalakkan penyerapan.</a:t>
+            </a:r>
+          </a:p>
+          <a:p>
+            <a:pPr algn="l" lvl="1"/>
+            <a:r>
+              <a:rPr sz="1000" b="0" i="0">
+                <a:solidFill>
+                  <a:srgbClr val="1A1A1A"/>
+                </a:solidFill>
+                <a:latin typeface="Arial"/>
+              </a:rPr>
+              <a:t>· Fungsi</a:t>
+            </a:r>
+          </a:p>
+          <a:p>
+            <a:pPr algn="l" lvl="1"/>
+            <a:r>
+              <a:rPr sz="1000" b="0" i="0">
+                <a:solidFill>
+                  <a:srgbClr val="1A1A1A"/>
+                </a:solidFill>
+                <a:latin typeface="Arial"/>
+              </a:rPr>
+              <a:t>· Menguruskan aliran air larian permukaan dengan memperlahankannya, menggalakkan penyerapan air ke dalam tanah, dan menapis bahan cemar.</a:t>
+            </a:r>
+          </a:p>
+          <a:p>
+            <a:pPr algn="l" lvl="1"/>
+            <a:r>
+              <a:rPr sz="1000" b="0" i="0">
+                <a:solidFill>
+                  <a:srgbClr val="1A1A1A"/>
+                </a:solidFill>
+                <a:latin typeface="Arial"/>
+              </a:rPr>
+              <a:t>· Fokus Utama Kontraktor:</a:t>
+            </a:r>
+          </a:p>
+          <a:p>
+            <a:pPr algn="l" lvl="1"/>
+            <a:r>
+              <a:rPr sz="1000" b="0" i="0">
+                <a:solidFill>
+                  <a:srgbClr val="1A1A1A"/>
+                </a:solidFill>
+                <a:latin typeface="Arial"/>
+              </a:rPr>
+              <a:t>· Pembentukan Landskap</a:t>
+            </a:r>
+          </a:p>
+          <a:p>
+            <a:pPr algn="l" lvl="1"/>
+            <a:r>
+              <a:rPr sz="900" b="0" i="0">
+                <a:solidFill>
+                  <a:srgbClr val="6B6B6B"/>
+                </a:solidFill>
+                <a:latin typeface="Arial"/>
+              </a:rPr>
+              <a:t>· … 2 rekod lagi</a:t>
             </a:r>
           </a:p>
           <a:p>
@@ -4297,7 +4298,7 @@
                 </a:solidFill>
                 <a:latin typeface="Arial"/>
               </a:rPr>
-              <a:t>Tidak dipaparkan; membuka SETERUSNYA.</a:t>
+              <a:t>— ini keadaan asas —</a:t>
             </a:r>
           </a:p>
           <a:p>
@@ -4321,7 +4322,7 @@
                 </a:solidFill>
                 <a:latin typeface="Arial"/>
               </a:rPr>
-              <a:t>Bukan keadaan yang dipaparkan. Penanda yang menjadi benar setelah semua pendedahan dilihat, dan inilah yang membuka SETERUSNYA.</a:t>
+              <a:t>Keadaan masuk. Pelajar meneruskan dengan SETERUSNYA setelah syarat selesai dipenuhi.</a:t>
             </a:r>
           </a:p>
           <a:p>
@@ -4345,7 +4346,7 @@
                 </a:solidFill>
                 <a:latin typeface="Arial"/>
               </a:rPr>
-              <a:t>Tiada baris modul — keadaan struktur</a:t>
+              <a:t>Baris: T03B03-ROW-055, T03B03-ROW-056, (+6)</a:t>
             </a:r>
           </a:p>
           <a:p>
@@ -4364,14 +4365,62 @@
       </p:sp>
       <p:sp>
         <p:nvSpPr>
-          <p:cNvPr id="6" name="TextBox 5"/>
+          <p:cNvPr id="6" name="Rectangle 5"/>
+          <p:cNvSpPr/>
+          <p:nvPr/>
+        </p:nvSpPr>
+        <p:spPr>
+          <a:xfrm>
+            <a:off x="4283066" y="1280000"/>
+            <a:ext cx="3625866" cy="4700000"/>
+          </a:xfrm>
+          <a:prstGeom prst="rect">
+            <a:avLst/>
+          </a:prstGeom>
+          <a:solidFill>
+            <a:srgbClr val="F7F7F7"/>
+          </a:solidFill>
+          <a:ln>
+            <a:solidFill>
+              <a:srgbClr val="D8D8D8"/>
+            </a:solidFill>
+          </a:ln>
+          <a:effectLst/>
+        </p:spPr>
+        <p:style>
+          <a:lnRef idx="1">
+            <a:schemeClr val="accent1"/>
+          </a:lnRef>
+          <a:fillRef idx="3">
+            <a:schemeClr val="accent1"/>
+          </a:fillRef>
+          <a:effectRef idx="0">
+            <a:schemeClr val="accent1"/>
+          </a:effectRef>
+          <a:fontRef idx="minor">
+            <a:schemeClr val="lt1"/>
+          </a:fontRef>
+        </p:style>
+        <p:txBody>
+          <a:bodyPr rtlCol="0" anchor="ctr">
+            <a:noAutofit/>
+          </a:bodyPr>
+          <a:lstStyle/>
+          <a:p>
+            <a:pPr algn="ctr"/>
+          </a:p>
+        </p:txBody>
+      </p:sp>
+      <p:sp>
+        <p:nvSpPr>
+          <p:cNvPr id="7" name="TextBox 6"/>
           <p:cNvSpPr txBox="1"/>
           <p:nvPr/>
         </p:nvSpPr>
         <p:spPr>
           <a:xfrm>
-            <a:off x="457200" y="6150000"/>
-            <a:ext cx="11277600" cy="400000"/>
+            <a:off x="4463066" y="1460000"/>
+            <a:ext cx="3265866" cy="4340000"/>
           </a:xfrm>
           <a:prstGeom prst="rect">
             <a:avLst/>
@@ -4386,13 +4435,371 @@
           <a:p>
             <a:pPr algn="l"/>
             <a:r>
+              <a:rPr sz="1100" b="1" i="0">
+                <a:solidFill>
+                  <a:srgbClr val="6B6B6B"/>
+                </a:solidFill>
+                <a:latin typeface="Arial"/>
+              </a:rPr>
+              <a:t>T03B03-S08-ST-01   ·   Panel pendedahan</a:t>
+            </a:r>
+          </a:p>
+          <a:p>
+            <a:pPr algn="l"/>
+            <a:r>
+              <a:rPr sz="1200" b="1" i="0">
+                <a:solidFill>
+                  <a:srgbClr val="37474F"/>
+                </a:solidFill>
+                <a:latin typeface="Arial"/>
+              </a:rPr>
+              <a:t>Pencetus: Pembentukan Landskap  [T03B03-S08-TRG-01]</a:t>
+            </a:r>
+          </a:p>
+          <a:p>
+            <a:pPr algn="l"/>
+            <a:r>
+              <a:rPr sz="1000" b="1" i="0">
+                <a:solidFill>
+                  <a:srgbClr val="6B6B6B"/>
+                </a:solidFill>
+                <a:latin typeface="Arial"/>
+              </a:rPr>
+              <a:t>Apa yang dipaparkan</a:t>
+            </a:r>
+          </a:p>
+          <a:p>
+            <a:pPr algn="l" lvl="1"/>
+            <a:r>
+              <a:rPr sz="1000" b="0" i="0">
+                <a:solidFill>
+                  <a:srgbClr val="1A1A1A"/>
+                </a:solidFill>
+                <a:latin typeface="Arial"/>
+              </a:rPr>
+              <a:t>· Swale dibentuk melalui kerja penggalian yang minimum untuk menghasilkan satu lekukan yang landai dan lebar, bukannya parit yang dalam dan curam.</a:t>
+            </a:r>
+          </a:p>
+          <a:p>
+            <a:pPr algn="l"/>
+            <a:r>
+              <a:rPr sz="1000" b="1" i="0">
+                <a:solidFill>
+                  <a:srgbClr val="6B6B6B"/>
+                </a:solidFill>
+                <a:latin typeface="Arial"/>
+              </a:rPr>
+              <a:t>Beza daripada keadaan asas</a:t>
+            </a:r>
+          </a:p>
+          <a:p>
+            <a:pPr algn="l" lvl="1"/>
+            <a:r>
+              <a:rPr sz="1000" b="0" i="0">
+                <a:solidFill>
+                  <a:srgbClr val="1A1A1A"/>
+                </a:solidFill>
+                <a:latin typeface="Arial"/>
+              </a:rPr>
+              <a:t>Menambah 1 rekod yang tersembunyi dalam keadaan asas.</a:t>
+            </a:r>
+          </a:p>
+          <a:p>
+            <a:pPr algn="l"/>
+            <a:r>
+              <a:rPr sz="1000" b="1" i="0">
+                <a:solidFill>
+                  <a:srgbClr val="6B6B6B"/>
+                </a:solidFill>
+                <a:latin typeface="Arial"/>
+              </a:rPr>
+              <a:t>Cara pelajar kembali / meneruskan</a:t>
+            </a:r>
+          </a:p>
+          <a:p>
+            <a:pPr algn="l" lvl="1"/>
+            <a:r>
+              <a:rPr sz="1000" b="0" i="0">
+                <a:solidFill>
+                  <a:srgbClr val="1A1A1A"/>
+                </a:solidFill>
+                <a:latin typeface="Arial"/>
+              </a:rPr>
+              <a:t>Panel tertutup apabila ditekan sekali lagi atau apabila panel lain dibuka. Keadaan asas kembali dan sentiasa boleh dicapai. Tiada navigasi berlaku.</a:t>
+            </a:r>
+          </a:p>
+          <a:p>
+            <a:pPr algn="l"/>
+            <a:r>
+              <a:rPr sz="1000" b="1" i="0">
+                <a:solidFill>
+                  <a:srgbClr val="6B6B6B"/>
+                </a:solidFill>
+                <a:latin typeface="Arial"/>
+              </a:rPr>
+              <a:t>Sumber dan kuasa</a:t>
+            </a:r>
+          </a:p>
+          <a:p>
+            <a:pPr algn="l" lvl="1"/>
+            <a:r>
               <a:rPr sz="900" b="0" i="0">
                 <a:solidFill>
-                  <a:srgbClr val="6B6B6B"/>
-                </a:solidFill>
-                <a:latin typeface="Arial"/>
-              </a:rPr>
-              <a:t>Lampiran keadaan · 3 panel/halaman · halaman 10 daripada 14   ·   TECHNICAL_PROOF · DRAFT_FOR_BARIAH_REVIEW · NOT_INSTRUCTIONALLY_APPROVED · NOT_LEARNER_FACING_FINAL</a:t>
+                  <a:srgbClr val="0D47A1"/>
+                </a:solidFill>
+                <a:latin typeface="Arial"/>
+              </a:rPr>
+              <a:t>Baris: T03B03-ROW-061</a:t>
+            </a:r>
+          </a:p>
+          <a:p>
+            <a:pPr algn="l" lvl="1"/>
+            <a:r>
+              <a:rPr sz="900" b="0" i="0">
+                <a:solidFill>
+                  <a:srgbClr val="6B6B6B"/>
+                </a:solidFill>
+                <a:latin typeface="Arial"/>
+              </a:rPr>
+              <a:t>Keputusan: A1, A2</a:t>
+            </a:r>
+          </a:p>
+        </p:txBody>
+      </p:sp>
+      <p:sp>
+        <p:nvSpPr>
+          <p:cNvPr id="8" name="Rectangle 7"/>
+          <p:cNvSpPr/>
+          <p:nvPr/>
+        </p:nvSpPr>
+        <p:spPr>
+          <a:xfrm>
+            <a:off x="8108932" y="1280000"/>
+            <a:ext cx="3625866" cy="4700000"/>
+          </a:xfrm>
+          <a:prstGeom prst="rect">
+            <a:avLst/>
+          </a:prstGeom>
+          <a:solidFill>
+            <a:srgbClr val="F7F7F7"/>
+          </a:solidFill>
+          <a:ln>
+            <a:solidFill>
+              <a:srgbClr val="D8D8D8"/>
+            </a:solidFill>
+          </a:ln>
+          <a:effectLst/>
+        </p:spPr>
+        <p:style>
+          <a:lnRef idx="1">
+            <a:schemeClr val="accent1"/>
+          </a:lnRef>
+          <a:fillRef idx="3">
+            <a:schemeClr val="accent1"/>
+          </a:fillRef>
+          <a:effectRef idx="0">
+            <a:schemeClr val="accent1"/>
+          </a:effectRef>
+          <a:fontRef idx="minor">
+            <a:schemeClr val="lt1"/>
+          </a:fontRef>
+        </p:style>
+        <p:txBody>
+          <a:bodyPr rtlCol="0" anchor="ctr">
+            <a:noAutofit/>
+          </a:bodyPr>
+          <a:lstStyle/>
+          <a:p>
+            <a:pPr algn="ctr"/>
+          </a:p>
+        </p:txBody>
+      </p:sp>
+      <p:sp>
+        <p:nvSpPr>
+          <p:cNvPr id="9" name="TextBox 8"/>
+          <p:cNvSpPr txBox="1"/>
+          <p:nvPr/>
+        </p:nvSpPr>
+        <p:spPr>
+          <a:xfrm>
+            <a:off x="8288932" y="1460000"/>
+            <a:ext cx="3265866" cy="4340000"/>
+          </a:xfrm>
+          <a:prstGeom prst="rect">
+            <a:avLst/>
+          </a:prstGeom>
+          <a:noFill/>
+        </p:spPr>
+        <p:txBody>
+          <a:bodyPr wrap="square" lIns="0" rIns="0" tIns="0" bIns="0">
+            <a:noAutofit/>
+          </a:bodyPr>
+          <a:lstStyle/>
+          <a:p>
+            <a:pPr algn="l"/>
+            <a:r>
+              <a:rPr sz="1100" b="1" i="0">
+                <a:solidFill>
+                  <a:srgbClr val="6B6B6B"/>
+                </a:solidFill>
+                <a:latin typeface="Arial"/>
+              </a:rPr>
+              <a:t>T03B03-S08-ST-02   ·   Panel pendedahan</a:t>
+            </a:r>
+          </a:p>
+          <a:p>
+            <a:pPr algn="l"/>
+            <a:r>
+              <a:rPr sz="1200" b="1" i="0">
+                <a:solidFill>
+                  <a:srgbClr val="37474F"/>
+                </a:solidFill>
+                <a:latin typeface="Arial"/>
+              </a:rPr>
+              <a:t>Pencetus: Penanaman Tumbuhan  [T03B03-S08-TRG-02]</a:t>
+            </a:r>
+          </a:p>
+          <a:p>
+            <a:pPr algn="l"/>
+            <a:r>
+              <a:rPr sz="1000" b="1" i="0">
+                <a:solidFill>
+                  <a:srgbClr val="6B6B6B"/>
+                </a:solidFill>
+                <a:latin typeface="Arial"/>
+              </a:rPr>
+              <a:t>Apa yang dipaparkan</a:t>
+            </a:r>
+          </a:p>
+          <a:p>
+            <a:pPr algn="l" lvl="1"/>
+            <a:r>
+              <a:rPr sz="1000" b="0" i="0">
+                <a:solidFill>
+                  <a:srgbClr val="1A1A1A"/>
+                </a:solidFill>
+                <a:latin typeface="Arial"/>
+              </a:rPr>
+              <a:t>· Permukaan swale mesti ditanam dengan spesies rumput atau tumbuhan tahan air yang sesuai. Tumbuh-tumbuhan ini berfungsi untuk menstabilkan tanah, mengelakkan hakisan, dan membantu dalam proses penapisan air.</a:t>
+            </a:r>
+          </a:p>
+          <a:p>
+            <a:pPr algn="l"/>
+            <a:r>
+              <a:rPr sz="1000" b="1" i="0">
+                <a:solidFill>
+                  <a:srgbClr val="6B6B6B"/>
+                </a:solidFill>
+                <a:latin typeface="Arial"/>
+              </a:rPr>
+              <a:t>Beza daripada keadaan asas</a:t>
+            </a:r>
+          </a:p>
+          <a:p>
+            <a:pPr algn="l" lvl="1"/>
+            <a:r>
+              <a:rPr sz="1000" b="0" i="0">
+                <a:solidFill>
+                  <a:srgbClr val="1A1A1A"/>
+                </a:solidFill>
+                <a:latin typeface="Arial"/>
+              </a:rPr>
+              <a:t>Menambah 1 rekod yang tersembunyi dalam keadaan asas.</a:t>
+            </a:r>
+          </a:p>
+          <a:p>
+            <a:pPr algn="l"/>
+            <a:r>
+              <a:rPr sz="1000" b="1" i="0">
+                <a:solidFill>
+                  <a:srgbClr val="6B6B6B"/>
+                </a:solidFill>
+                <a:latin typeface="Arial"/>
+              </a:rPr>
+              <a:t>Cara pelajar kembali / meneruskan</a:t>
+            </a:r>
+          </a:p>
+          <a:p>
+            <a:pPr algn="l" lvl="1"/>
+            <a:r>
+              <a:rPr sz="1000" b="0" i="0">
+                <a:solidFill>
+                  <a:srgbClr val="1A1A1A"/>
+                </a:solidFill>
+                <a:latin typeface="Arial"/>
+              </a:rPr>
+              <a:t>Panel tertutup apabila ditekan sekali lagi atau apabila panel lain dibuka. Keadaan asas kembali dan sentiasa boleh dicapai. Tiada navigasi berlaku.</a:t>
+            </a:r>
+          </a:p>
+          <a:p>
+            <a:pPr algn="l"/>
+            <a:r>
+              <a:rPr sz="1000" b="1" i="0">
+                <a:solidFill>
+                  <a:srgbClr val="6B6B6B"/>
+                </a:solidFill>
+                <a:latin typeface="Arial"/>
+              </a:rPr>
+              <a:t>Sumber dan kuasa</a:t>
+            </a:r>
+          </a:p>
+          <a:p>
+            <a:pPr algn="l" lvl="1"/>
+            <a:r>
+              <a:rPr sz="900" b="0" i="0">
+                <a:solidFill>
+                  <a:srgbClr val="0D47A1"/>
+                </a:solidFill>
+                <a:latin typeface="Arial"/>
+              </a:rPr>
+              <a:t>Baris: T03B03-ROW-063</a:t>
+            </a:r>
+          </a:p>
+          <a:p>
+            <a:pPr algn="l" lvl="1"/>
+            <a:r>
+              <a:rPr sz="900" b="0" i="0">
+                <a:solidFill>
+                  <a:srgbClr val="6B6B6B"/>
+                </a:solidFill>
+                <a:latin typeface="Arial"/>
+              </a:rPr>
+              <a:t>Keputusan: A1, A2</a:t>
+            </a:r>
+          </a:p>
+        </p:txBody>
+      </p:sp>
+      <p:sp>
+        <p:nvSpPr>
+          <p:cNvPr id="10" name="TextBox 9"/>
+          <p:cNvSpPr txBox="1"/>
+          <p:nvPr/>
+        </p:nvSpPr>
+        <p:spPr>
+          <a:xfrm>
+            <a:off x="457200" y="6150000"/>
+            <a:ext cx="11277600" cy="400000"/>
+          </a:xfrm>
+          <a:prstGeom prst="rect">
+            <a:avLst/>
+          </a:prstGeom>
+          <a:noFill/>
+        </p:spPr>
+        <p:txBody>
+          <a:bodyPr wrap="square" lIns="0" rIns="0" tIns="0" bIns="0">
+            <a:noAutofit/>
+          </a:bodyPr>
+          <a:lstStyle/>
+          <a:p>
+            <a:pPr algn="l"/>
+            <a:r>
+              <a:rPr sz="900" b="0" i="0">
+                <a:solidFill>
+                  <a:srgbClr val="6B6B6B"/>
+                </a:solidFill>
+                <a:latin typeface="Arial"/>
+              </a:rPr>
+              <a:t>Lampiran keadaan · 3 panel/halaman · halaman 10 daripada 15   ·   TECHNICAL_PROOF · DRAFT_FOR_BARIAH_REVIEW · NOT_INSTRUCTIONALLY_APPROVED · NOT_LEARNER_FACING_FINAL</a:t>
             </a:r>
           </a:p>
         </p:txBody>
@@ -4445,7 +4852,7 @@
                 </a:solidFill>
                 <a:latin typeface="Arial"/>
               </a:rPr>
-              <a:t>T03B03-S09   ·   click-to-reveal</a:t>
+              <a:t>T03B03-S08   ·   Click-to-Reveal</a:t>
             </a:r>
           </a:p>
           <a:p>
@@ -4457,7 +4864,7 @@
                 </a:solidFill>
                 <a:latin typeface="Arial"/>
               </a:rPr>
-              <a:t>Jalan akses</a:t>
+              <a:t>Swale/ Natural Drain</a:t>
             </a:r>
           </a:p>
         </p:txBody>
@@ -4586,7 +4993,7 @@
                 </a:solidFill>
                 <a:latin typeface="Arial"/>
               </a:rPr>
-              <a:t>T03B03-S09-ST-BASE   ·   Keadaan asas</a:t>
+              <a:t>T03B03-S08-ST-ALL_VIEWED   ·   Penanda selesai</a:t>
             </a:r>
           </a:p>
           <a:p>
@@ -4594,11 +5001,11 @@
             <a:r>
               <a:rPr sz="1200" b="1" i="0">
                 <a:solidFill>
-                  <a:srgbClr val="1B5E20"/>
-                </a:solidFill>
-                <a:latin typeface="Arial"/>
-              </a:rPr>
-              <a:t>Pencetus: screen entry</a:t>
+                  <a:srgbClr val="37474F"/>
+                </a:solidFill>
+                <a:latin typeface="Arial"/>
+              </a:rPr>
+              <a:t>Pencetus: semua 2 panel dilihat  [T03B03-S08-TRG-ALL]</a:t>
             </a:r>
           </a:p>
           <a:p>
@@ -4616,85 +5023,73 @@
           <a:p>
             <a:pPr algn="l" lvl="1"/>
             <a:r>
-              <a:rPr sz="1000" b="0" i="0">
-                <a:solidFill>
-                  <a:srgbClr val="1A1A1A"/>
-                </a:solidFill>
-                <a:latin typeface="Arial"/>
-              </a:rPr>
-              <a:t>· Jalan akses</a:t>
-            </a:r>
-          </a:p>
-          <a:p>
-            <a:pPr algn="l" lvl="1"/>
-            <a:r>
-              <a:rPr sz="1000" b="0" i="0">
-                <a:solidFill>
-                  <a:srgbClr val="1A1A1A"/>
-                </a:solidFill>
-                <a:latin typeface="Arial"/>
-              </a:rPr>
-              <a:t>· Jalan akses dalam konteks landskap menyediakan laluan untuk kenderaan penyelenggaraan atau laluan pejalan kaki utama.</a:t>
-            </a:r>
-          </a:p>
-          <a:p>
-            <a:pPr algn="l" lvl="1"/>
-            <a:r>
-              <a:rPr sz="1000" b="0" i="0">
-                <a:solidFill>
-                  <a:srgbClr val="1A1A1A"/>
-                </a:solidFill>
-                <a:latin typeface="Arial"/>
-              </a:rPr>
-              <a:t>· Fungsi</a:t>
-            </a:r>
-          </a:p>
-          <a:p>
-            <a:pPr algn="l" lvl="1"/>
-            <a:r>
-              <a:rPr sz="1000" b="0" i="0">
-                <a:solidFill>
-                  <a:srgbClr val="1A1A1A"/>
-                </a:solidFill>
-                <a:latin typeface="Arial"/>
-              </a:rPr>
-              <a:t>· Menyediakan perhubungan dan akses ke seluruh kawasan tapak.</a:t>
-            </a:r>
-          </a:p>
-          <a:p>
-            <a:pPr algn="l" lvl="1"/>
-            <a:r>
-              <a:rPr sz="1000" b="0" i="0">
-                <a:solidFill>
-                  <a:srgbClr val="1A1A1A"/>
-                </a:solidFill>
-                <a:latin typeface="Arial"/>
-              </a:rPr>
-              <a:t>· Fokus Utama Kontraktor</a:t>
-            </a:r>
-          </a:p>
-          <a:p>
-            <a:pPr algn="l" lvl="1"/>
-            <a:r>
-              <a:rPr sz="1000" b="0" i="0">
-                <a:solidFill>
-                  <a:srgbClr val="1A1A1A"/>
-                </a:solidFill>
-                <a:latin typeface="Arial"/>
-              </a:rPr>
-              <a:t>· Penyediaan Tapak Asas (Sub-base)</a:t>
-            </a:r>
-          </a:p>
-          <a:p>
-            <a:pPr algn="l" lvl="1"/>
-            <a:r>
-              <a:rPr sz="1000" b="0" i="0">
-                <a:solidFill>
-                  <a:srgbClr val="1A1A1A"/>
-                </a:solidFill>
-                <a:latin typeface="Arial"/>
-              </a:rPr>
-              <a:t>· Pemasangan Bebendul (Kerb)</a:t>
+              <a:rPr sz="1000" b="0" i="1">
+                <a:solidFill>
+                  <a:srgbClr val="6B6B6B"/>
+                </a:solidFill>
+                <a:latin typeface="Arial"/>
+              </a:rPr>
+              <a:t>Tiada kandungan dipaparkan — penanda sahaja.</a:t>
+            </a:r>
+          </a:p>
+          <a:p>
+            <a:pPr algn="l"/>
+            <a:r>
+              <a:rPr sz="1000" b="1" i="0">
+                <a:solidFill>
+                  <a:srgbClr val="6B6B6B"/>
+                </a:solidFill>
+                <a:latin typeface="Arial"/>
+              </a:rPr>
+              <a:t>Beza daripada keadaan asas</a:t>
+            </a:r>
+          </a:p>
+          <a:p>
+            <a:pPr algn="l" lvl="1"/>
+            <a:r>
+              <a:rPr sz="1000" b="0" i="0">
+                <a:solidFill>
+                  <a:srgbClr val="1A1A1A"/>
+                </a:solidFill>
+                <a:latin typeface="Arial"/>
+              </a:rPr>
+              <a:t>Tidak dipaparkan; membuka SETERUSNYA.</a:t>
+            </a:r>
+          </a:p>
+          <a:p>
+            <a:pPr algn="l"/>
+            <a:r>
+              <a:rPr sz="1000" b="1" i="0">
+                <a:solidFill>
+                  <a:srgbClr val="6B6B6B"/>
+                </a:solidFill>
+                <a:latin typeface="Arial"/>
+              </a:rPr>
+              <a:t>Cara pelajar kembali / meneruskan</a:t>
+            </a:r>
+          </a:p>
+          <a:p>
+            <a:pPr algn="l" lvl="1"/>
+            <a:r>
+              <a:rPr sz="1000" b="0" i="0">
+                <a:solidFill>
+                  <a:srgbClr val="1A1A1A"/>
+                </a:solidFill>
+                <a:latin typeface="Arial"/>
+              </a:rPr>
+              <a:t>Bukan keadaan yang dipaparkan. Penanda yang menjadi benar setelah semua pendedahan dilihat, dan inilah yang membuka SETERUSNYA.</a:t>
+            </a:r>
+          </a:p>
+          <a:p>
+            <a:pPr algn="l"/>
+            <a:r>
+              <a:rPr sz="1000" b="1" i="0">
+                <a:solidFill>
+                  <a:srgbClr val="6B6B6B"/>
+                </a:solidFill>
+                <a:latin typeface="Arial"/>
+              </a:rPr>
+              <a:t>Sumber dan kuasa</a:t>
             </a:r>
           </a:p>
           <a:p>
@@ -4702,71 +5097,11 @@
             <a:r>
               <a:rPr sz="900" b="0" i="0">
                 <a:solidFill>
-                  <a:srgbClr val="6B6B6B"/>
-                </a:solidFill>
-                <a:latin typeface="Arial"/>
-              </a:rPr>
-              <a:t>· … 3 rekod lagi</a:t>
-            </a:r>
-          </a:p>
-          <a:p>
-            <a:pPr algn="l"/>
-            <a:r>
-              <a:rPr sz="1000" b="1" i="0">
-                <a:solidFill>
-                  <a:srgbClr val="6B6B6B"/>
-                </a:solidFill>
-                <a:latin typeface="Arial"/>
-              </a:rPr>
-              <a:t>Beza daripada keadaan asas</a:t>
-            </a:r>
-          </a:p>
-          <a:p>
-            <a:pPr algn="l" lvl="1"/>
-            <a:r>
-              <a:rPr sz="1000" b="0" i="0">
-                <a:solidFill>
-                  <a:srgbClr val="1A1A1A"/>
-                </a:solidFill>
-                <a:latin typeface="Arial"/>
-              </a:rPr>
-              <a:t>— ini keadaan asas —</a:t>
-            </a:r>
-          </a:p>
-          <a:p>
-            <a:pPr algn="l"/>
-            <a:r>
-              <a:rPr sz="1000" b="1" i="0">
-                <a:solidFill>
-                  <a:srgbClr val="6B6B6B"/>
-                </a:solidFill>
-                <a:latin typeface="Arial"/>
-              </a:rPr>
-              <a:t>Cara pelajar kembali / meneruskan</a:t>
-            </a:r>
-          </a:p>
-          <a:p>
-            <a:pPr algn="l" lvl="1"/>
-            <a:r>
-              <a:rPr sz="1000" b="0" i="0">
-                <a:solidFill>
-                  <a:srgbClr val="1A1A1A"/>
-                </a:solidFill>
-                <a:latin typeface="Arial"/>
-              </a:rPr>
-              <a:t>Keadaan masuk. Pelajar meneruskan dengan SETERUSNYA setelah syarat selesai dipenuhi.</a:t>
-            </a:r>
-          </a:p>
-          <a:p>
-            <a:pPr algn="l"/>
-            <a:r>
-              <a:rPr sz="1000" b="1" i="0">
-                <a:solidFill>
-                  <a:srgbClr val="6B6B6B"/>
-                </a:solidFill>
-                <a:latin typeface="Arial"/>
-              </a:rPr>
-              <a:t>Sumber dan kuasa</a:t>
+                  <a:srgbClr val="0D47A1"/>
+                </a:solidFill>
+                <a:latin typeface="Arial"/>
+              </a:rPr>
+              <a:t>Tiada baris modul — keadaan struktur</a:t>
             </a:r>
           </a:p>
           <a:p>
@@ -4774,18 +5109,6 @@
             <a:r>
               <a:rPr sz="900" b="0" i="0">
                 <a:solidFill>
-                  <a:srgbClr val="0D47A1"/>
-                </a:solidFill>
-                <a:latin typeface="Arial"/>
-              </a:rPr>
-              <a:t>Baris: T03B03-ROW-064, T03B03-ROW-065, (+7)</a:t>
-            </a:r>
-          </a:p>
-          <a:p>
-            <a:pPr algn="l" lvl="1"/>
-            <a:r>
-              <a:rPr sz="900" b="0" i="0">
-                <a:solidFill>
                   <a:srgbClr val="6B6B6B"/>
                 </a:solidFill>
                 <a:latin typeface="Arial"/>
@@ -4797,62 +5120,14 @@
       </p:sp>
       <p:sp>
         <p:nvSpPr>
-          <p:cNvPr id="6" name="Rectangle 5"/>
-          <p:cNvSpPr/>
-          <p:nvPr/>
-        </p:nvSpPr>
-        <p:spPr>
-          <a:xfrm>
-            <a:off x="4283066" y="1280000"/>
-            <a:ext cx="3625866" cy="4700000"/>
-          </a:xfrm>
-          <a:prstGeom prst="rect">
-            <a:avLst/>
-          </a:prstGeom>
-          <a:solidFill>
-            <a:srgbClr val="F7F7F7"/>
-          </a:solidFill>
-          <a:ln>
-            <a:solidFill>
-              <a:srgbClr val="D8D8D8"/>
-            </a:solidFill>
-          </a:ln>
-          <a:effectLst/>
-        </p:spPr>
-        <p:style>
-          <a:lnRef idx="1">
-            <a:schemeClr val="accent1"/>
-          </a:lnRef>
-          <a:fillRef idx="3">
-            <a:schemeClr val="accent1"/>
-          </a:fillRef>
-          <a:effectRef idx="0">
-            <a:schemeClr val="accent1"/>
-          </a:effectRef>
-          <a:fontRef idx="minor">
-            <a:schemeClr val="lt1"/>
-          </a:fontRef>
-        </p:style>
-        <p:txBody>
-          <a:bodyPr rtlCol="0" anchor="ctr">
-            <a:noAutofit/>
-          </a:bodyPr>
-          <a:lstStyle/>
-          <a:p>
-            <a:pPr algn="ctr"/>
-          </a:p>
-        </p:txBody>
-      </p:sp>
-      <p:sp>
-        <p:nvSpPr>
-          <p:cNvPr id="7" name="TextBox 6"/>
+          <p:cNvPr id="6" name="TextBox 5"/>
           <p:cNvSpPr txBox="1"/>
           <p:nvPr/>
         </p:nvSpPr>
         <p:spPr>
           <a:xfrm>
-            <a:off x="4463066" y="1460000"/>
-            <a:ext cx="3265866" cy="4340000"/>
+            <a:off x="457200" y="6150000"/>
+            <a:ext cx="11277600" cy="400000"/>
           </a:xfrm>
           <a:prstGeom prst="rect">
             <a:avLst/>
@@ -4867,371 +5142,13 @@
           <a:p>
             <a:pPr algn="l"/>
             <a:r>
-              <a:rPr sz="1100" b="1" i="0">
-                <a:solidFill>
-                  <a:srgbClr val="6B6B6B"/>
-                </a:solidFill>
-                <a:latin typeface="Arial"/>
-              </a:rPr>
-              <a:t>T03B03-S09-ST-01   ·   Panel pendedahan</a:t>
-            </a:r>
-          </a:p>
-          <a:p>
-            <a:pPr algn="l"/>
-            <a:r>
-              <a:rPr sz="1200" b="1" i="0">
-                <a:solidFill>
-                  <a:srgbClr val="37474F"/>
-                </a:solidFill>
-                <a:latin typeface="Arial"/>
-              </a:rPr>
-              <a:t>Pencetus: Penyediaan Tapak Asas (Sub-base)  [T03B03-S09-TRG-01]</a:t>
-            </a:r>
-          </a:p>
-          <a:p>
-            <a:pPr algn="l"/>
-            <a:r>
-              <a:rPr sz="1000" b="1" i="0">
-                <a:solidFill>
-                  <a:srgbClr val="6B6B6B"/>
-                </a:solidFill>
-                <a:latin typeface="Arial"/>
-              </a:rPr>
-              <a:t>Apa yang dipaparkan</a:t>
-            </a:r>
-          </a:p>
-          <a:p>
-            <a:pPr algn="l" lvl="1"/>
-            <a:r>
-              <a:rPr sz="1000" b="0" i="0">
-                <a:solidFill>
-                  <a:srgbClr val="1A1A1A"/>
-                </a:solidFill>
-                <a:latin typeface="Arial"/>
-              </a:rPr>
-              <a:t>· Kualiti jalan bergantung pada tapak asasnya. Lapisan tanah asal mesti dipadatkan, diikuti dengan lapisan batu kasaran (crusher run) yang dipadatkan mengikut ketebalan yang ditetapkan dalam lukisan.</a:t>
-            </a:r>
-          </a:p>
-          <a:p>
-            <a:pPr algn="l"/>
-            <a:r>
-              <a:rPr sz="1000" b="1" i="0">
-                <a:solidFill>
-                  <a:srgbClr val="6B6B6B"/>
-                </a:solidFill>
-                <a:latin typeface="Arial"/>
-              </a:rPr>
-              <a:t>Beza daripada keadaan asas</a:t>
-            </a:r>
-          </a:p>
-          <a:p>
-            <a:pPr algn="l" lvl="1"/>
-            <a:r>
-              <a:rPr sz="1000" b="0" i="0">
-                <a:solidFill>
-                  <a:srgbClr val="1A1A1A"/>
-                </a:solidFill>
-                <a:latin typeface="Arial"/>
-              </a:rPr>
-              <a:t>Menambah 1 rekod yang tersembunyi dalam keadaan asas.</a:t>
-            </a:r>
-          </a:p>
-          <a:p>
-            <a:pPr algn="l"/>
-            <a:r>
-              <a:rPr sz="1000" b="1" i="0">
-                <a:solidFill>
-                  <a:srgbClr val="6B6B6B"/>
-                </a:solidFill>
-                <a:latin typeface="Arial"/>
-              </a:rPr>
-              <a:t>Cara pelajar kembali / meneruskan</a:t>
-            </a:r>
-          </a:p>
-          <a:p>
-            <a:pPr algn="l" lvl="1"/>
-            <a:r>
-              <a:rPr sz="1000" b="0" i="0">
-                <a:solidFill>
-                  <a:srgbClr val="1A1A1A"/>
-                </a:solidFill>
-                <a:latin typeface="Arial"/>
-              </a:rPr>
-              <a:t>Panel tertutup apabila ditekan sekali lagi atau apabila panel lain dibuka. Keadaan asas kembali dan sentiasa boleh dicapai. Tiada navigasi berlaku.</a:t>
-            </a:r>
-          </a:p>
-          <a:p>
-            <a:pPr algn="l"/>
-            <a:r>
-              <a:rPr sz="1000" b="1" i="0">
-                <a:solidFill>
-                  <a:srgbClr val="6B6B6B"/>
-                </a:solidFill>
-                <a:latin typeface="Arial"/>
-              </a:rPr>
-              <a:t>Sumber dan kuasa</a:t>
-            </a:r>
-          </a:p>
-          <a:p>
-            <a:pPr algn="l" lvl="1"/>
-            <a:r>
               <a:rPr sz="900" b="0" i="0">
                 <a:solidFill>
-                  <a:srgbClr val="0D47A1"/>
-                </a:solidFill>
-                <a:latin typeface="Arial"/>
-              </a:rPr>
-              <a:t>Baris: T03B03-ROW-070</a:t>
-            </a:r>
-          </a:p>
-          <a:p>
-            <a:pPr algn="l" lvl="1"/>
-            <a:r>
-              <a:rPr sz="900" b="0" i="0">
-                <a:solidFill>
-                  <a:srgbClr val="6B6B6B"/>
-                </a:solidFill>
-                <a:latin typeface="Arial"/>
-              </a:rPr>
-              <a:t>Keputusan: A1, A2</a:t>
-            </a:r>
-          </a:p>
-        </p:txBody>
-      </p:sp>
-      <p:sp>
-        <p:nvSpPr>
-          <p:cNvPr id="8" name="Rectangle 7"/>
-          <p:cNvSpPr/>
-          <p:nvPr/>
-        </p:nvSpPr>
-        <p:spPr>
-          <a:xfrm>
-            <a:off x="8108932" y="1280000"/>
-            <a:ext cx="3625866" cy="4700000"/>
-          </a:xfrm>
-          <a:prstGeom prst="rect">
-            <a:avLst/>
-          </a:prstGeom>
-          <a:solidFill>
-            <a:srgbClr val="F7F7F7"/>
-          </a:solidFill>
-          <a:ln>
-            <a:solidFill>
-              <a:srgbClr val="D8D8D8"/>
-            </a:solidFill>
-          </a:ln>
-          <a:effectLst/>
-        </p:spPr>
-        <p:style>
-          <a:lnRef idx="1">
-            <a:schemeClr val="accent1"/>
-          </a:lnRef>
-          <a:fillRef idx="3">
-            <a:schemeClr val="accent1"/>
-          </a:fillRef>
-          <a:effectRef idx="0">
-            <a:schemeClr val="accent1"/>
-          </a:effectRef>
-          <a:fontRef idx="minor">
-            <a:schemeClr val="lt1"/>
-          </a:fontRef>
-        </p:style>
-        <p:txBody>
-          <a:bodyPr rtlCol="0" anchor="ctr">
-            <a:noAutofit/>
-          </a:bodyPr>
-          <a:lstStyle/>
-          <a:p>
-            <a:pPr algn="ctr"/>
-          </a:p>
-        </p:txBody>
-      </p:sp>
-      <p:sp>
-        <p:nvSpPr>
-          <p:cNvPr id="9" name="TextBox 8"/>
-          <p:cNvSpPr txBox="1"/>
-          <p:nvPr/>
-        </p:nvSpPr>
-        <p:spPr>
-          <a:xfrm>
-            <a:off x="8288932" y="1460000"/>
-            <a:ext cx="3265866" cy="4340000"/>
-          </a:xfrm>
-          <a:prstGeom prst="rect">
-            <a:avLst/>
-          </a:prstGeom>
-          <a:noFill/>
-        </p:spPr>
-        <p:txBody>
-          <a:bodyPr wrap="square" lIns="0" rIns="0" tIns="0" bIns="0">
-            <a:noAutofit/>
-          </a:bodyPr>
-          <a:lstStyle/>
-          <a:p>
-            <a:pPr algn="l"/>
-            <a:r>
-              <a:rPr sz="1100" b="1" i="0">
-                <a:solidFill>
-                  <a:srgbClr val="6B6B6B"/>
-                </a:solidFill>
-                <a:latin typeface="Arial"/>
-              </a:rPr>
-              <a:t>T03B03-S09-ST-02   ·   Panel pendedahan</a:t>
-            </a:r>
-          </a:p>
-          <a:p>
-            <a:pPr algn="l"/>
-            <a:r>
-              <a:rPr sz="1200" b="1" i="0">
-                <a:solidFill>
-                  <a:srgbClr val="37474F"/>
-                </a:solidFill>
-                <a:latin typeface="Arial"/>
-              </a:rPr>
-              <a:t>Pencetus: Pemasangan Bebendul (Kerb)  [T03B03-S09-TRG-02]</a:t>
-            </a:r>
-          </a:p>
-          <a:p>
-            <a:pPr algn="l"/>
-            <a:r>
-              <a:rPr sz="1000" b="1" i="0">
-                <a:solidFill>
-                  <a:srgbClr val="6B6B6B"/>
-                </a:solidFill>
-                <a:latin typeface="Arial"/>
-              </a:rPr>
-              <a:t>Apa yang dipaparkan</a:t>
-            </a:r>
-          </a:p>
-          <a:p>
-            <a:pPr algn="l" lvl="1"/>
-            <a:r>
-              <a:rPr sz="1000" b="0" i="0">
-                <a:solidFill>
-                  <a:srgbClr val="1A1A1A"/>
-                </a:solidFill>
-                <a:latin typeface="Arial"/>
-              </a:rPr>
-              <a:t>· Bebendul konkrit dipasang di kedua-dua belah jalan untuk menetapkan jajaran dan menahan lapisan permukaan.</a:t>
-            </a:r>
-          </a:p>
-          <a:p>
-            <a:pPr algn="l"/>
-            <a:r>
-              <a:rPr sz="1000" b="1" i="0">
-                <a:solidFill>
-                  <a:srgbClr val="6B6B6B"/>
-                </a:solidFill>
-                <a:latin typeface="Arial"/>
-              </a:rPr>
-              <a:t>Beza daripada keadaan asas</a:t>
-            </a:r>
-          </a:p>
-          <a:p>
-            <a:pPr algn="l" lvl="1"/>
-            <a:r>
-              <a:rPr sz="1000" b="0" i="0">
-                <a:solidFill>
-                  <a:srgbClr val="1A1A1A"/>
-                </a:solidFill>
-                <a:latin typeface="Arial"/>
-              </a:rPr>
-              <a:t>Menambah 1 rekod yang tersembunyi dalam keadaan asas.</a:t>
-            </a:r>
-          </a:p>
-          <a:p>
-            <a:pPr algn="l"/>
-            <a:r>
-              <a:rPr sz="1000" b="1" i="0">
-                <a:solidFill>
-                  <a:srgbClr val="6B6B6B"/>
-                </a:solidFill>
-                <a:latin typeface="Arial"/>
-              </a:rPr>
-              <a:t>Cara pelajar kembali / meneruskan</a:t>
-            </a:r>
-          </a:p>
-          <a:p>
-            <a:pPr algn="l" lvl="1"/>
-            <a:r>
-              <a:rPr sz="1000" b="0" i="0">
-                <a:solidFill>
-                  <a:srgbClr val="1A1A1A"/>
-                </a:solidFill>
-                <a:latin typeface="Arial"/>
-              </a:rPr>
-              <a:t>Panel tertutup apabila ditekan sekali lagi atau apabila panel lain dibuka. Keadaan asas kembali dan sentiasa boleh dicapai. Tiada navigasi berlaku.</a:t>
-            </a:r>
-          </a:p>
-          <a:p>
-            <a:pPr algn="l"/>
-            <a:r>
-              <a:rPr sz="1000" b="1" i="0">
-                <a:solidFill>
-                  <a:srgbClr val="6B6B6B"/>
-                </a:solidFill>
-                <a:latin typeface="Arial"/>
-              </a:rPr>
-              <a:t>Sumber dan kuasa</a:t>
-            </a:r>
-          </a:p>
-          <a:p>
-            <a:pPr algn="l" lvl="1"/>
-            <a:r>
-              <a:rPr sz="900" b="0" i="0">
-                <a:solidFill>
-                  <a:srgbClr val="0D47A1"/>
-                </a:solidFill>
-                <a:latin typeface="Arial"/>
-              </a:rPr>
-              <a:t>Baris: T03B03-ROW-072</a:t>
-            </a:r>
-          </a:p>
-          <a:p>
-            <a:pPr algn="l" lvl="1"/>
-            <a:r>
-              <a:rPr sz="900" b="0" i="0">
-                <a:solidFill>
-                  <a:srgbClr val="6B6B6B"/>
-                </a:solidFill>
-                <a:latin typeface="Arial"/>
-              </a:rPr>
-              <a:t>Keputusan: A1, A2</a:t>
-            </a:r>
-          </a:p>
-        </p:txBody>
-      </p:sp>
-      <p:sp>
-        <p:nvSpPr>
-          <p:cNvPr id="10" name="TextBox 9"/>
-          <p:cNvSpPr txBox="1"/>
-          <p:nvPr/>
-        </p:nvSpPr>
-        <p:spPr>
-          <a:xfrm>
-            <a:off x="457200" y="6150000"/>
-            <a:ext cx="11277600" cy="400000"/>
-          </a:xfrm>
-          <a:prstGeom prst="rect">
-            <a:avLst/>
-          </a:prstGeom>
-          <a:noFill/>
-        </p:spPr>
-        <p:txBody>
-          <a:bodyPr wrap="square" lIns="0" rIns="0" tIns="0" bIns="0">
-            <a:noAutofit/>
-          </a:bodyPr>
-          <a:lstStyle/>
-          <a:p>
-            <a:pPr algn="l"/>
-            <a:r>
-              <a:rPr sz="900" b="0" i="0">
-                <a:solidFill>
-                  <a:srgbClr val="6B6B6B"/>
-                </a:solidFill>
-                <a:latin typeface="Arial"/>
-              </a:rPr>
-              <a:t>Lampiran keadaan · 3 panel/halaman · halaman 11 daripada 14   ·   TECHNICAL_PROOF · DRAFT_FOR_BARIAH_REVIEW · NOT_INSTRUCTIONALLY_APPROVED · NOT_LEARNER_FACING_FINAL</a:t>
+                  <a:srgbClr val="6B6B6B"/>
+                </a:solidFill>
+                <a:latin typeface="Arial"/>
+              </a:rPr>
+              <a:t>Lampiran keadaan · 3 panel/halaman · halaman 11 daripada 15   ·   TECHNICAL_PROOF · DRAFT_FOR_BARIAH_REVIEW · NOT_INSTRUCTIONALLY_APPROVED · NOT_LEARNER_FACING_FINAL</a:t>
             </a:r>
           </a:p>
         </p:txBody>
@@ -5284,7 +5201,7 @@
                 </a:solidFill>
                 <a:latin typeface="Arial"/>
               </a:rPr>
-              <a:t>T03B03-S09   ·   click-to-reveal</a:t>
+              <a:t>T03B03-S09   ·   Click-to-Reveal</a:t>
             </a:r>
           </a:p>
           <a:p>
@@ -5425,7 +5342,7 @@
                 </a:solidFill>
                 <a:latin typeface="Arial"/>
               </a:rPr>
-              <a:t>T03B03-S09-ST-03   ·   Panel pendedahan</a:t>
+              <a:t>T03B03-S09-ST-BASE   ·   Keadaan asas</a:t>
             </a:r>
           </a:p>
           <a:p>
@@ -5433,11 +5350,11 @@
             <a:r>
               <a:rPr sz="1200" b="1" i="0">
                 <a:solidFill>
-                  <a:srgbClr val="37474F"/>
-                </a:solidFill>
-                <a:latin typeface="Arial"/>
-              </a:rPr>
-              <a:t>Pencetus: Lapisan Permukaan  [T03B03-S09-TRG-03]</a:t>
+                  <a:srgbClr val="1B5E20"/>
+                </a:solidFill>
+                <a:latin typeface="Arial"/>
+              </a:rPr>
+              <a:t>Pencetus: screen entry</a:t>
             </a:r>
           </a:p>
           <a:p>
@@ -5461,7 +5378,91 @@
                 </a:solidFill>
                 <a:latin typeface="Arial"/>
               </a:rPr>
-              <a:t>· Permukaan akhir boleh terdiri daripada pelbagai bahan seperti premix/asphalt, blok turapan (interlocking pavers), atau konkrit bertetulang, dan mesti dibina mengikut spesifikasi yang betul.</a:t>
+              <a:t>· Jalan akses</a:t>
+            </a:r>
+          </a:p>
+          <a:p>
+            <a:pPr algn="l" lvl="1"/>
+            <a:r>
+              <a:rPr sz="1000" b="0" i="0">
+                <a:solidFill>
+                  <a:srgbClr val="1A1A1A"/>
+                </a:solidFill>
+                <a:latin typeface="Arial"/>
+              </a:rPr>
+              <a:t>· Jalan akses dalam konteks landskap menyediakan laluan untuk kenderaan penyelenggaraan atau laluan pejalan kaki utama.</a:t>
+            </a:r>
+          </a:p>
+          <a:p>
+            <a:pPr algn="l" lvl="1"/>
+            <a:r>
+              <a:rPr sz="1000" b="0" i="0">
+                <a:solidFill>
+                  <a:srgbClr val="1A1A1A"/>
+                </a:solidFill>
+                <a:latin typeface="Arial"/>
+              </a:rPr>
+              <a:t>· Fungsi</a:t>
+            </a:r>
+          </a:p>
+          <a:p>
+            <a:pPr algn="l" lvl="1"/>
+            <a:r>
+              <a:rPr sz="1000" b="0" i="0">
+                <a:solidFill>
+                  <a:srgbClr val="1A1A1A"/>
+                </a:solidFill>
+                <a:latin typeface="Arial"/>
+              </a:rPr>
+              <a:t>· Menyediakan perhubungan dan akses ke seluruh kawasan tapak.</a:t>
+            </a:r>
+          </a:p>
+          <a:p>
+            <a:pPr algn="l" lvl="1"/>
+            <a:r>
+              <a:rPr sz="1000" b="0" i="0">
+                <a:solidFill>
+                  <a:srgbClr val="1A1A1A"/>
+                </a:solidFill>
+                <a:latin typeface="Arial"/>
+              </a:rPr>
+              <a:t>· Fokus Utama Kontraktor</a:t>
+            </a:r>
+          </a:p>
+          <a:p>
+            <a:pPr algn="l" lvl="1"/>
+            <a:r>
+              <a:rPr sz="1000" b="0" i="0">
+                <a:solidFill>
+                  <a:srgbClr val="1A1A1A"/>
+                </a:solidFill>
+                <a:latin typeface="Arial"/>
+              </a:rPr>
+              <a:t>· Penyediaan Tapak Asas (Sub-base)</a:t>
+            </a:r>
+          </a:p>
+          <a:p>
+            <a:pPr algn="l" lvl="1"/>
+            <a:r>
+              <a:rPr sz="1000" b="0" i="0">
+                <a:solidFill>
+                  <a:srgbClr val="1A1A1A"/>
+                </a:solidFill>
+                <a:latin typeface="Arial"/>
+              </a:rPr>
+              <a:t>· Pemasangan Bebendul (Kerb)</a:t>
+            </a:r>
+          </a:p>
+          <a:p>
+            <a:pPr algn="l" lvl="1"/>
+            <a:r>
+              <a:rPr sz="900" b="0" i="0">
+                <a:solidFill>
+                  <a:srgbClr val="6B6B6B"/>
+                </a:solidFill>
+                <a:latin typeface="Arial"/>
+              </a:rPr>
+              <a:t>· … 3 rekod lagi</a:t>
             </a:r>
           </a:p>
           <a:p>
@@ -5485,7 +5486,7 @@
                 </a:solidFill>
                 <a:latin typeface="Arial"/>
               </a:rPr>
-              <a:t>Menambah 1 rekod yang tersembunyi dalam keadaan asas.</a:t>
+              <a:t>— ini keadaan asas —</a:t>
             </a:r>
           </a:p>
           <a:p>
@@ -5509,7 +5510,7 @@
                 </a:solidFill>
                 <a:latin typeface="Arial"/>
               </a:rPr>
-              <a:t>Panel tertutup apabila ditekan sekali lagi atau apabila panel lain dibuka. Keadaan asas kembali dan sentiasa boleh dicapai. Tiada navigasi berlaku.</a:t>
+              <a:t>Keadaan masuk. Pelajar meneruskan dengan SETERUSNYA setelah syarat selesai dipenuhi.</a:t>
             </a:r>
           </a:p>
           <a:p>
@@ -5533,7 +5534,7 @@
                 </a:solidFill>
                 <a:latin typeface="Arial"/>
               </a:rPr>
-              <a:t>Baris: T03B03-ROW-074</a:t>
+              <a:t>Baris: T03B03-ROW-064, T03B03-ROW-065, (+7)</a:t>
             </a:r>
           </a:p>
           <a:p>
@@ -5628,7 +5629,7 @@
                 </a:solidFill>
                 <a:latin typeface="Arial"/>
               </a:rPr>
-              <a:t>T03B03-S09-ST-04   ·   Panel pendedahan</a:t>
+              <a:t>T03B03-S09-ST-01   ·   Panel pendedahan</a:t>
             </a:r>
           </a:p>
           <a:p>
@@ -5640,7 +5641,7 @@
                 </a:solidFill>
                 <a:latin typeface="Arial"/>
               </a:rPr>
-              <a:t>Pencetus: Kamber (Camber)  [T03B03-S09-TRG-04]</a:t>
+              <a:t>Pencetus: Penyediaan Tapak Asas (Sub-base)  [T03B03-S09-TRG-01]</a:t>
             </a:r>
           </a:p>
           <a:p>
@@ -5664,7 +5665,7 @@
                 </a:solidFill>
                 <a:latin typeface="Arial"/>
               </a:rPr>
-              <a:t>· Permukaan jalan mesti dibina dengan sedikit kecerunan melintang dari bahagian tengah ke tepi untuk memastikan air hujan mengalir ke sistem perparitan.</a:t>
+              <a:t>· Kualiti jalan bergantung pada tapak asasnya. Lapisan tanah asal mesti dipadatkan, diikuti dengan lapisan batu kasaran (crusher run) yang dipadatkan mengikut ketebalan yang ditetapkan dalam lukisan.</a:t>
             </a:r>
           </a:p>
           <a:p>
@@ -5736,7 +5737,7 @@
                 </a:solidFill>
                 <a:latin typeface="Arial"/>
               </a:rPr>
-              <a:t>Baris: T03B03-ROW-076</a:t>
+              <a:t>Baris: T03B03-ROW-070</a:t>
             </a:r>
           </a:p>
           <a:p>
@@ -5831,7 +5832,7 @@
                 </a:solidFill>
                 <a:latin typeface="Arial"/>
               </a:rPr>
-              <a:t>T03B03-S09-ST-ALL_VIEWED   ·   Penanda selesai</a:t>
+              <a:t>T03B03-S09-ST-02   ·   Panel pendedahan</a:t>
             </a:r>
           </a:p>
           <a:p>
@@ -5843,7 +5844,7 @@
                 </a:solidFill>
                 <a:latin typeface="Arial"/>
               </a:rPr>
-              <a:t>Pencetus: semua 4 panel dilihat  [T03B03-S09-TRG-ALL]</a:t>
+              <a:t>Pencetus: Pemasangan Bebendul (Kerb)  [T03B03-S09-TRG-02]</a:t>
             </a:r>
           </a:p>
           <a:p>
@@ -5861,13 +5862,13 @@
           <a:p>
             <a:pPr algn="l" lvl="1"/>
             <a:r>
-              <a:rPr sz="1000" b="0" i="1">
-                <a:solidFill>
-                  <a:srgbClr val="6B6B6B"/>
-                </a:solidFill>
-                <a:latin typeface="Arial"/>
-              </a:rPr>
-              <a:t>Tiada kandungan dipaparkan — penanda sahaja.</a:t>
+              <a:rPr sz="1000" b="0" i="0">
+                <a:solidFill>
+                  <a:srgbClr val="1A1A1A"/>
+                </a:solidFill>
+                <a:latin typeface="Arial"/>
+              </a:rPr>
+              <a:t>· Bebendul konkrit dipasang di kedua-dua belah jalan untuk menetapkan jajaran dan menahan lapisan permukaan.</a:t>
             </a:r>
           </a:p>
           <a:p>
@@ -5891,7 +5892,7 @@
                 </a:solidFill>
                 <a:latin typeface="Arial"/>
               </a:rPr>
-              <a:t>Tidak dipaparkan; membuka SETERUSNYA.</a:t>
+              <a:t>Menambah 1 rekod yang tersembunyi dalam keadaan asas.</a:t>
             </a:r>
           </a:p>
           <a:p>
@@ -5915,7 +5916,7 @@
                 </a:solidFill>
                 <a:latin typeface="Arial"/>
               </a:rPr>
-              <a:t>Bukan keadaan yang dipaparkan. Penanda yang menjadi benar setelah semua pendedahan dilihat, dan inilah yang membuka SETERUSNYA.</a:t>
+              <a:t>Panel tertutup apabila ditekan sekali lagi atau apabila panel lain dibuka. Keadaan asas kembali dan sentiasa boleh dicapai. Tiada navigasi berlaku.</a:t>
             </a:r>
           </a:p>
           <a:p>
@@ -5939,7 +5940,7 @@
                 </a:solidFill>
                 <a:latin typeface="Arial"/>
               </a:rPr>
-              <a:t>Tiada baris modul — keadaan struktur</a:t>
+              <a:t>Baris: T03B03-ROW-072</a:t>
             </a:r>
           </a:p>
           <a:p>
@@ -5986,7 +5987,7 @@
                 </a:solidFill>
                 <a:latin typeface="Arial"/>
               </a:rPr>
-              <a:t>Lampiran keadaan · 3 panel/halaman · halaman 12 daripada 14   ·   TECHNICAL_PROOF · DRAFT_FOR_BARIAH_REVIEW · NOT_INSTRUCTIONALLY_APPROVED · NOT_LEARNER_FACING_FINAL</a:t>
+              <a:t>Lampiran keadaan · 3 panel/halaman · halaman 12 daripada 15   ·   TECHNICAL_PROOF · DRAFT_FOR_BARIAH_REVIEW · NOT_INSTRUCTIONALLY_APPROVED · NOT_LEARNER_FACING_FINAL</a:t>
             </a:r>
           </a:p>
         </p:txBody>
@@ -6039,7 +6040,7 @@
                 </a:solidFill>
                 <a:latin typeface="Arial"/>
               </a:rPr>
-              <a:t>T03B03-S11   ·   static content</a:t>
+              <a:t>T03B03-S09   ·   Click-to-Reveal</a:t>
             </a:r>
           </a:p>
           <a:p>
@@ -6051,7 +6052,7 @@
                 </a:solidFill>
                 <a:latin typeface="Arial"/>
               </a:rPr>
-              <a:t>Kuiz</a:t>
+              <a:t>Jalan akses</a:t>
             </a:r>
           </a:p>
         </p:txBody>
@@ -6180,7 +6181,7 @@
                 </a:solidFill>
                 <a:latin typeface="Arial"/>
               </a:rPr>
-              <a:t>T03B03-S11-ST-01   ·   Item kuiz</a:t>
+              <a:t>T03B03-S09-ST-03   ·   Panel pendedahan</a:t>
             </a:r>
           </a:p>
           <a:p>
@@ -6192,7 +6193,7 @@
                 </a:solidFill>
                 <a:latin typeface="Arial"/>
               </a:rPr>
-              <a:t>Pencetus: Q1 · MULTIPLE_CHOICE  [T03B03-S11-TRG-01]</a:t>
+              <a:t>Pencetus: Lapisan Permukaan  [T03B03-S09-TRG-03]</a:t>
             </a:r>
           </a:p>
           <a:p>
@@ -6216,55 +6217,7 @@
                 </a:solidFill>
                 <a:latin typeface="Arial"/>
               </a:rPr>
-              <a:t>· Apakah ketebalan maksimum setiap lapisan semasa membina busut tanah (earthmound)?</a:t>
-            </a:r>
-          </a:p>
-          <a:p>
-            <a:pPr algn="l" lvl="1"/>
-            <a:r>
-              <a:rPr sz="1000" b="0" i="0">
-                <a:solidFill>
-                  <a:srgbClr val="1A1A1A"/>
-                </a:solidFill>
-                <a:latin typeface="Arial"/>
-              </a:rPr>
-              <a:t>· Tidak melebihi 300mm setiap lapisan, dan setiap lapisan dipadatkan.</a:t>
-            </a:r>
-          </a:p>
-          <a:p>
-            <a:pPr algn="l" lvl="1"/>
-            <a:r>
-              <a:rPr sz="1000" b="0" i="0">
-                <a:solidFill>
-                  <a:srgbClr val="1A1A1A"/>
-                </a:solidFill>
-                <a:latin typeface="Arial"/>
-              </a:rPr>
-              <a:t>· Tidak melebihi 600mm, dipadatkan sekali pada akhir</a:t>
-            </a:r>
-          </a:p>
-          <a:p>
-            <a:pPr algn="l" lvl="1"/>
-            <a:r>
-              <a:rPr sz="1000" b="0" i="0">
-                <a:solidFill>
-                  <a:srgbClr val="1A1A1A"/>
-                </a:solidFill>
-                <a:latin typeface="Arial"/>
-              </a:rPr>
-              <a:t>· Tiada had ketebalan selagi jentera boleh memadat</a:t>
-            </a:r>
-          </a:p>
-          <a:p>
-            <a:pPr algn="l" lvl="1"/>
-            <a:r>
-              <a:rPr sz="1000" b="0" i="0">
-                <a:solidFill>
-                  <a:srgbClr val="1A1A1A"/>
-                </a:solidFill>
-                <a:latin typeface="Arial"/>
-              </a:rPr>
-              <a:t>· Satu lapisan penuh sehingga ketinggian puncak</a:t>
+              <a:t>· Permukaan akhir boleh terdiri daripada pelbagai bahan seperti premix/asphalt, blok turapan (interlocking pavers), atau konkrit bertetulang, dan mesti dibina mengikut spesifikasi yang betul.</a:t>
             </a:r>
           </a:p>
           <a:p>
@@ -6288,7 +6241,7 @@
                 </a:solidFill>
                 <a:latin typeface="Arial"/>
               </a:rPr>
-              <a:t>Item 1 daripada 5.</a:t>
+              <a:t>Menambah 1 rekod yang tersembunyi dalam keadaan asas.</a:t>
             </a:r>
           </a:p>
           <a:p>
@@ -6312,7 +6265,7 @@
                 </a:solidFill>
                 <a:latin typeface="Arial"/>
               </a:rPr>
-              <a:t>Menghantar jawapan membawa pelajar ke item berikutnya. Tiada navigasi kembali antara item kuiz.</a:t>
+              <a:t>Panel tertutup apabila ditekan sekali lagi atau apabila panel lain dibuka. Keadaan asas kembali dan sentiasa boleh dicapai. Tiada navigasi berlaku.</a:t>
             </a:r>
           </a:p>
           <a:p>
@@ -6336,7 +6289,7 @@
                 </a:solidFill>
                 <a:latin typeface="Arial"/>
               </a:rPr>
-              <a:t>Baris: T03B03-ROW-013</a:t>
+              <a:t>Baris: T03B03-ROW-074</a:t>
             </a:r>
           </a:p>
           <a:p>
@@ -6348,19 +6301,7 @@
                 </a:solidFill>
                 <a:latin typeface="Arial"/>
               </a:rPr>
-              <a:t>Keputusan: A7</a:t>
-            </a:r>
-          </a:p>
-          <a:p>
-            <a:pPr algn="l" lvl="1"/>
-            <a:r>
-              <a:rPr sz="900" b="0" i="0">
-                <a:solidFill>
-                  <a:srgbClr val="B71C1C"/>
-                </a:solidFill>
-                <a:latin typeface="Arial"/>
-              </a:rPr>
-              <a:t>HAD: Kunci jawapan draf — belum disahkan.</a:t>
+              <a:t>Keputusan: A1, A2</a:t>
             </a:r>
           </a:p>
         </p:txBody>
@@ -6443,7 +6384,7 @@
                 </a:solidFill>
                 <a:latin typeface="Arial"/>
               </a:rPr>
-              <a:t>T03B03-S11-ST-02   ·   Item kuiz</a:t>
+              <a:t>T03B03-S09-ST-04   ·   Panel pendedahan</a:t>
             </a:r>
           </a:p>
           <a:p>
@@ -6455,7 +6396,7 @@
                 </a:solidFill>
                 <a:latin typeface="Arial"/>
               </a:rPr>
-              <a:t>Pencetus: Q2 · MULTIPLE_CHOICE  [T03B03-S11-TRG-02]</a:t>
+              <a:t>Pencetus: Kamber (Camber)  [T03B03-S09-TRG-04]</a:t>
             </a:r>
           </a:p>
           <a:p>
@@ -6479,55 +6420,7 @@
                 </a:solidFill>
                 <a:latin typeface="Arial"/>
               </a:rPr>
-              <a:t>· Mengapakah sistem perparitan di belakang dinding penahan adalah wajib?</a:t>
-            </a:r>
-          </a:p>
-          <a:p>
-            <a:pPr algn="l" lvl="1"/>
-            <a:r>
-              <a:rPr sz="1000" b="0" i="0">
-                <a:solidFill>
-                  <a:srgbClr val="1A1A1A"/>
-                </a:solidFill>
-                <a:latin typeface="Arial"/>
-              </a:rPr>
-              <a:t>· Kerana kegagalan dinding penahan selalunya berpunca daripada tekanan air (hydrostatic pressure).</a:t>
-            </a:r>
-          </a:p>
-          <a:p>
-            <a:pPr algn="l" lvl="1"/>
-            <a:r>
-              <a:rPr sz="1000" b="0" i="0">
-                <a:solidFill>
-                  <a:srgbClr val="1A1A1A"/>
-                </a:solidFill>
-                <a:latin typeface="Arial"/>
-              </a:rPr>
-              <a:t>· Kerana ia mengurangkan kos konkrit dinding</a:t>
-            </a:r>
-          </a:p>
-          <a:p>
-            <a:pPr algn="l" lvl="1"/>
-            <a:r>
-              <a:rPr sz="1000" b="0" i="0">
-                <a:solidFill>
-                  <a:srgbClr val="1A1A1A"/>
-                </a:solidFill>
-                <a:latin typeface="Arial"/>
-              </a:rPr>
-              <a:t>· Kerana ia diperlukan untuk kemasan estetik belakang dinding</a:t>
-            </a:r>
-          </a:p>
-          <a:p>
-            <a:pPr algn="l" lvl="1"/>
-            <a:r>
-              <a:rPr sz="1000" b="0" i="0">
-                <a:solidFill>
-                  <a:srgbClr val="1A1A1A"/>
-                </a:solidFill>
-                <a:latin typeface="Arial"/>
-              </a:rPr>
-              <a:t>· Kerana ia menggantikan keperluan tapak asas</a:t>
+              <a:t>· Permukaan jalan mesti dibina dengan sedikit kecerunan melintang dari bahagian tengah ke tepi untuk memastikan air hujan mengalir ke sistem perparitan.</a:t>
             </a:r>
           </a:p>
           <a:p>
@@ -6551,7 +6444,7 @@
                 </a:solidFill>
                 <a:latin typeface="Arial"/>
               </a:rPr>
-              <a:t>Item 2 daripada 5.</a:t>
+              <a:t>Menambah 1 rekod yang tersembunyi dalam keadaan asas.</a:t>
             </a:r>
           </a:p>
           <a:p>
@@ -6575,7 +6468,7 @@
                 </a:solidFill>
                 <a:latin typeface="Arial"/>
               </a:rPr>
-              <a:t>Menghantar jawapan membawa pelajar ke item berikutnya. Tiada navigasi kembali antara item kuiz.</a:t>
+              <a:t>Panel tertutup apabila ditekan sekali lagi atau apabila panel lain dibuka. Keadaan asas kembali dan sentiasa boleh dicapai. Tiada navigasi berlaku.</a:t>
             </a:r>
           </a:p>
           <a:p>
@@ -6599,7 +6492,7 @@
                 </a:solidFill>
                 <a:latin typeface="Arial"/>
               </a:rPr>
-              <a:t>Baris: T03B03-ROW-041</a:t>
+              <a:t>Baris: T03B03-ROW-076</a:t>
             </a:r>
           </a:p>
           <a:p>
@@ -6611,19 +6504,7 @@
                 </a:solidFill>
                 <a:latin typeface="Arial"/>
               </a:rPr>
-              <a:t>Keputusan: A7</a:t>
-            </a:r>
-          </a:p>
-          <a:p>
-            <a:pPr algn="l" lvl="1"/>
-            <a:r>
-              <a:rPr sz="900" b="0" i="0">
-                <a:solidFill>
-                  <a:srgbClr val="B71C1C"/>
-                </a:solidFill>
-                <a:latin typeface="Arial"/>
-              </a:rPr>
-              <a:t>HAD: Kunci jawapan draf — belum disahkan.</a:t>
+              <a:t>Keputusan: A1, A2</a:t>
             </a:r>
           </a:p>
         </p:txBody>
@@ -6706,7 +6587,7 @@
                 </a:solidFill>
                 <a:latin typeface="Arial"/>
               </a:rPr>
-              <a:t>T03B03-S11-ST-03   ·   Item kuiz</a:t>
+              <a:t>T03B03-S09-ST-ALL_VIEWED   ·   Penanda selesai</a:t>
             </a:r>
           </a:p>
           <a:p>
@@ -6718,7 +6599,7 @@
                 </a:solidFill>
                 <a:latin typeface="Arial"/>
               </a:rPr>
-              <a:t>Pencetus: Q3 · MULTIPLE_CHOICE  [T03B03-S11-TRG-03]</a:t>
+              <a:t>Pencetus: semua 4 panel dilihat  [T03B03-S09-TRG-ALL]</a:t>
             </a:r>
           </a:p>
           <a:p>
@@ -6736,61 +6617,13 @@
           <a:p>
             <a:pPr algn="l" lvl="1"/>
             <a:r>
-              <a:rPr sz="1000" b="0" i="0">
-                <a:solidFill>
-                  <a:srgbClr val="1A1A1A"/>
-                </a:solidFill>
-                <a:latin typeface="Arial"/>
-              </a:rPr>
-              <a:t>· Pelan manakah yang menentukan jajaran pagar di tapak?</a:t>
-            </a:r>
-          </a:p>
-          <a:p>
-            <a:pPr algn="l" lvl="1"/>
-            <a:r>
-              <a:rPr sz="1000" b="0" i="0">
-                <a:solidFill>
-                  <a:srgbClr val="1A1A1A"/>
-                </a:solidFill>
-                <a:latin typeface="Arial"/>
-              </a:rPr>
-              <a:t>· Pelan Ukur Sempadan.</a:t>
-            </a:r>
-          </a:p>
-          <a:p>
-            <a:pPr algn="l" lvl="1"/>
-            <a:r>
-              <a:rPr sz="1000" b="0" i="0">
-                <a:solidFill>
-                  <a:srgbClr val="1A1A1A"/>
-                </a:solidFill>
-                <a:latin typeface="Arial"/>
-              </a:rPr>
-              <a:t>· Pelan Saliran</a:t>
-            </a:r>
-          </a:p>
-          <a:p>
-            <a:pPr algn="l" lvl="1"/>
-            <a:r>
-              <a:rPr sz="1000" b="0" i="0">
-                <a:solidFill>
-                  <a:srgbClr val="1A1A1A"/>
-                </a:solidFill>
-                <a:latin typeface="Arial"/>
-              </a:rPr>
-              <a:t>· Lukisan Struktur Jurutera</a:t>
-            </a:r>
-          </a:p>
-          <a:p>
-            <a:pPr algn="l" lvl="1"/>
-            <a:r>
-              <a:rPr sz="1000" b="0" i="0">
-                <a:solidFill>
-                  <a:srgbClr val="1A1A1A"/>
-                </a:solidFill>
-                <a:latin typeface="Arial"/>
-              </a:rPr>
-              <a:t>· Pelan Susun Atur Tanaman</a:t>
+              <a:rPr sz="1000" b="0" i="1">
+                <a:solidFill>
+                  <a:srgbClr val="6B6B6B"/>
+                </a:solidFill>
+                <a:latin typeface="Arial"/>
+              </a:rPr>
+              <a:t>Tiada kandungan dipaparkan — penanda sahaja.</a:t>
             </a:r>
           </a:p>
           <a:p>
@@ -6814,7 +6647,7 @@
                 </a:solidFill>
                 <a:latin typeface="Arial"/>
               </a:rPr>
-              <a:t>Item 3 daripada 5.</a:t>
+              <a:t>Tidak dipaparkan; membuka SETERUSNYA.</a:t>
             </a:r>
           </a:p>
           <a:p>
@@ -6838,7 +6671,7 @@
                 </a:solidFill>
                 <a:latin typeface="Arial"/>
               </a:rPr>
-              <a:t>Menghantar jawapan membawa pelajar ke item berikutnya. Tiada navigasi kembali antara item kuiz.</a:t>
+              <a:t>Bukan keadaan yang dipaparkan. Penanda yang menjadi benar setelah semua pendedahan dilihat, dan inilah yang membuka SETERUSNYA.</a:t>
             </a:r>
           </a:p>
           <a:p>
@@ -6862,7 +6695,7 @@
                 </a:solidFill>
                 <a:latin typeface="Arial"/>
               </a:rPr>
-              <a:t>Baris: T03B03-ROW-048</a:t>
+              <a:t>Tiada baris modul — keadaan struktur</a:t>
             </a:r>
           </a:p>
           <a:p>
@@ -6874,19 +6707,7 @@
                 </a:solidFill>
                 <a:latin typeface="Arial"/>
               </a:rPr>
-              <a:t>Keputusan: A7</a:t>
-            </a:r>
-          </a:p>
-          <a:p>
-            <a:pPr algn="l" lvl="1"/>
-            <a:r>
-              <a:rPr sz="900" b="0" i="0">
-                <a:solidFill>
-                  <a:srgbClr val="B71C1C"/>
-                </a:solidFill>
-                <a:latin typeface="Arial"/>
-              </a:rPr>
-              <a:t>HAD: Kunci jawapan draf — belum disahkan.</a:t>
+              <a:t>Keputusan: A1, A2</a:t>
             </a:r>
           </a:p>
         </p:txBody>
@@ -6921,7 +6742,7 @@
                 </a:solidFill>
                 <a:latin typeface="Arial"/>
               </a:rPr>
-              <a:t>Lampiran keadaan · 3 panel/halaman · halaman 13 daripada 14   ·   TECHNICAL_PROOF · DRAFT_FOR_BARIAH_REVIEW · NOT_INSTRUCTIONALLY_APPROVED · NOT_LEARNER_FACING_FINAL</a:t>
+              <a:t>Lampiran keadaan · 3 panel/halaman · halaman 13 daripada 15   ·   TECHNICAL_PROOF · DRAFT_FOR_BARIAH_REVIEW · NOT_INSTRUCTIONALLY_APPROVED · NOT_LEARNER_FACING_FINAL</a:t>
             </a:r>
           </a:p>
         </p:txBody>
@@ -7115,7 +6936,7 @@
                 </a:solidFill>
                 <a:latin typeface="Arial"/>
               </a:rPr>
-              <a:t>T03B03-S11-ST-04   ·   Item kuiz</a:t>
+              <a:t>T03B03-S11-ST-01   ·   Item kuiz</a:t>
             </a:r>
           </a:p>
           <a:p>
@@ -7127,7 +6948,7 @@
                 </a:solidFill>
                 <a:latin typeface="Arial"/>
               </a:rPr>
-              <a:t>Pencetus: Q4 · MULTIPLE_CHOICE  [T03B03-S11-TRG-04]</a:t>
+              <a:t>Pencetus: Q1 · MULTIPLE_CHOICE  [T03B03-S11-TRG-01]</a:t>
             </a:r>
           </a:p>
           <a:p>
@@ -7151,55 +6972,55 @@
                 </a:solidFill>
                 <a:latin typeface="Arial"/>
               </a:rPr>
-              <a:t>· Apakah fungsi kamber (camber) pada permukaan jalan akses?</a:t>
-            </a:r>
-          </a:p>
-          <a:p>
-            <a:pPr algn="l" lvl="1"/>
-            <a:r>
-              <a:rPr sz="1000" b="0" i="0">
-                <a:solidFill>
-                  <a:srgbClr val="1A1A1A"/>
-                </a:solidFill>
-                <a:latin typeface="Arial"/>
-              </a:rPr>
-              <a:t>· Memberikan kecerunan melintang dari tengah ke tepi supaya air tidak bertakung di permukaan.</a:t>
-            </a:r>
-          </a:p>
-          <a:p>
-            <a:pPr algn="l" lvl="1"/>
-            <a:r>
-              <a:rPr sz="1000" b="0" i="0">
-                <a:solidFill>
-                  <a:srgbClr val="1A1A1A"/>
-                </a:solidFill>
-                <a:latin typeface="Arial"/>
-              </a:rPr>
-              <a:t>· Menambah ketebalan lapisan permukaan di bahagian tengah</a:t>
-            </a:r>
-          </a:p>
-          <a:p>
-            <a:pPr algn="l" lvl="1"/>
-            <a:r>
-              <a:rPr sz="1000" b="0" i="0">
-                <a:solidFill>
-                  <a:srgbClr val="1A1A1A"/>
-                </a:solidFill>
-                <a:latin typeface="Arial"/>
-              </a:rPr>
-              <a:t>· Menandakan sempadan jalan untuk pemandu</a:t>
-            </a:r>
-          </a:p>
-          <a:p>
-            <a:pPr algn="l" lvl="1"/>
-            <a:r>
-              <a:rPr sz="1000" b="0" i="0">
-                <a:solidFill>
-                  <a:srgbClr val="1A1A1A"/>
-                </a:solidFill>
-                <a:latin typeface="Arial"/>
-              </a:rPr>
-              <a:t>· Menahan lapisan permukaan daripada bergerak ke tepi</a:t>
+              <a:t>· Apakah ketebalan maksimum setiap lapisan semasa membina busut tanah (earthmound)?</a:t>
+            </a:r>
+          </a:p>
+          <a:p>
+            <a:pPr algn="l" lvl="1"/>
+            <a:r>
+              <a:rPr sz="1000" b="0" i="0">
+                <a:solidFill>
+                  <a:srgbClr val="1A1A1A"/>
+                </a:solidFill>
+                <a:latin typeface="Arial"/>
+              </a:rPr>
+              <a:t>· Tidak melebihi 300mm setiap lapisan, dan setiap lapisan dipadatkan.</a:t>
+            </a:r>
+          </a:p>
+          <a:p>
+            <a:pPr algn="l" lvl="1"/>
+            <a:r>
+              <a:rPr sz="1000" b="0" i="0">
+                <a:solidFill>
+                  <a:srgbClr val="1A1A1A"/>
+                </a:solidFill>
+                <a:latin typeface="Arial"/>
+              </a:rPr>
+              <a:t>· Tidak melebihi 600mm, dipadatkan sekali pada akhir</a:t>
+            </a:r>
+          </a:p>
+          <a:p>
+            <a:pPr algn="l" lvl="1"/>
+            <a:r>
+              <a:rPr sz="1000" b="0" i="0">
+                <a:solidFill>
+                  <a:srgbClr val="1A1A1A"/>
+                </a:solidFill>
+                <a:latin typeface="Arial"/>
+              </a:rPr>
+              <a:t>· Tiada had ketebalan selagi jentera boleh memadat</a:t>
+            </a:r>
+          </a:p>
+          <a:p>
+            <a:pPr algn="l" lvl="1"/>
+            <a:r>
+              <a:rPr sz="1000" b="0" i="0">
+                <a:solidFill>
+                  <a:srgbClr val="1A1A1A"/>
+                </a:solidFill>
+                <a:latin typeface="Arial"/>
+              </a:rPr>
+              <a:t>· Satu lapisan penuh sehingga ketinggian puncak</a:t>
             </a:r>
           </a:p>
           <a:p>
@@ -7223,7 +7044,7 @@
                 </a:solidFill>
                 <a:latin typeface="Arial"/>
               </a:rPr>
-              <a:t>Item 4 daripada 5.</a:t>
+              <a:t>Item 1 daripada 5.</a:t>
             </a:r>
           </a:p>
           <a:p>
@@ -7271,7 +7092,7 @@
                 </a:solidFill>
                 <a:latin typeface="Arial"/>
               </a:rPr>
-              <a:t>Baris: T03B03-ROW-076</a:t>
+              <a:t>Baris: T03B03-ROW-013</a:t>
             </a:r>
           </a:p>
           <a:p>
@@ -7378,7 +7199,7 @@
                 </a:solidFill>
                 <a:latin typeface="Arial"/>
               </a:rPr>
-              <a:t>T03B03-S11-ST-05   ·   Item kuiz</a:t>
+              <a:t>T03B03-S11-ST-02   ·   Item kuiz</a:t>
             </a:r>
           </a:p>
           <a:p>
@@ -7390,7 +7211,7 @@
                 </a:solidFill>
                 <a:latin typeface="Arial"/>
               </a:rPr>
-              <a:t>Pencetus: Q5 · MULTIPLE_RESPONSE  [T03B03-S11-TRG-05]</a:t>
+              <a:t>Pencetus: Q2 · MULTIPLE_CHOICE  [T03B03-S11-TRG-02]</a:t>
             </a:r>
           </a:p>
           <a:p>
@@ -7414,79 +7235,55 @@
                 </a:solidFill>
                 <a:latin typeface="Arial"/>
               </a:rPr>
-              <a:t>· Pilih SEMUA ciri yang menepati swale sebagai alternatif kepada longkang konkrit.</a:t>
-            </a:r>
-          </a:p>
-          <a:p>
-            <a:pPr algn="l" lvl="1"/>
-            <a:r>
-              <a:rPr sz="1000" b="0" i="0">
-                <a:solidFill>
-                  <a:srgbClr val="1A1A1A"/>
-                </a:solidFill>
-                <a:latin typeface="Arial"/>
-              </a:rPr>
-              <a:t>· Parit yang cetek dan lebar</a:t>
-            </a:r>
-          </a:p>
-          <a:p>
-            <a:pPr algn="l" lvl="1"/>
-            <a:r>
-              <a:rPr sz="1000" b="0" i="0">
-                <a:solidFill>
-                  <a:srgbClr val="1A1A1A"/>
-                </a:solidFill>
-                <a:latin typeface="Arial"/>
-              </a:rPr>
-              <a:t>· Ditanami rumput atau tumbuhan tahan air</a:t>
-            </a:r>
-          </a:p>
-          <a:p>
-            <a:pPr algn="l" lvl="1"/>
-            <a:r>
-              <a:rPr sz="1000" b="0" i="0">
-                <a:solidFill>
-                  <a:srgbClr val="1A1A1A"/>
-                </a:solidFill>
-                <a:latin typeface="Arial"/>
-              </a:rPr>
-              <a:t>· Memperlahankan aliran air larian permukaan</a:t>
-            </a:r>
-          </a:p>
-          <a:p>
-            <a:pPr algn="l" lvl="1"/>
-            <a:r>
-              <a:rPr sz="1000" b="0" i="0">
-                <a:solidFill>
-                  <a:srgbClr val="1A1A1A"/>
-                </a:solidFill>
-                <a:latin typeface="Arial"/>
-              </a:rPr>
-              <a:t>· Menggalakkan penyerapan air ke dalam tanah</a:t>
-            </a:r>
-          </a:p>
-          <a:p>
-            <a:pPr algn="l" lvl="1"/>
-            <a:r>
-              <a:rPr sz="1000" b="0" i="0">
-                <a:solidFill>
-                  <a:srgbClr val="1A1A1A"/>
-                </a:solidFill>
-                <a:latin typeface="Arial"/>
-              </a:rPr>
-              <a:t>· Dilapisi konkrit di seluruh permukaannya</a:t>
-            </a:r>
-          </a:p>
-          <a:p>
-            <a:pPr algn="l" lvl="1"/>
-            <a:r>
-              <a:rPr sz="1000" b="0" i="0">
-                <a:solidFill>
-                  <a:srgbClr val="1A1A1A"/>
-                </a:solidFill>
-                <a:latin typeface="Arial"/>
-              </a:rPr>
-              <a:t>· Direka untuk mempercepatkan aliran ke saluran keluar</a:t>
+              <a:t>· Mengapakah sistem perparitan di belakang dinding penahan adalah wajib?</a:t>
+            </a:r>
+          </a:p>
+          <a:p>
+            <a:pPr algn="l" lvl="1"/>
+            <a:r>
+              <a:rPr sz="1000" b="0" i="0">
+                <a:solidFill>
+                  <a:srgbClr val="1A1A1A"/>
+                </a:solidFill>
+                <a:latin typeface="Arial"/>
+              </a:rPr>
+              <a:t>· Kerana kegagalan dinding penahan selalunya berpunca daripada tekanan air (hydrostatic pressure).</a:t>
+            </a:r>
+          </a:p>
+          <a:p>
+            <a:pPr algn="l" lvl="1"/>
+            <a:r>
+              <a:rPr sz="1000" b="0" i="0">
+                <a:solidFill>
+                  <a:srgbClr val="1A1A1A"/>
+                </a:solidFill>
+                <a:latin typeface="Arial"/>
+              </a:rPr>
+              <a:t>· Kerana ia mengurangkan kos konkrit dinding</a:t>
+            </a:r>
+          </a:p>
+          <a:p>
+            <a:pPr algn="l" lvl="1"/>
+            <a:r>
+              <a:rPr sz="1000" b="0" i="0">
+                <a:solidFill>
+                  <a:srgbClr val="1A1A1A"/>
+                </a:solidFill>
+                <a:latin typeface="Arial"/>
+              </a:rPr>
+              <a:t>· Kerana ia diperlukan untuk kemasan estetik belakang dinding</a:t>
+            </a:r>
+          </a:p>
+          <a:p>
+            <a:pPr algn="l" lvl="1"/>
+            <a:r>
+              <a:rPr sz="1000" b="0" i="0">
+                <a:solidFill>
+                  <a:srgbClr val="1A1A1A"/>
+                </a:solidFill>
+                <a:latin typeface="Arial"/>
+              </a:rPr>
+              <a:t>· Kerana ia menggantikan keperluan tapak asas</a:t>
             </a:r>
           </a:p>
           <a:p>
@@ -7510,7 +7307,7 @@
                 </a:solidFill>
                 <a:latin typeface="Arial"/>
               </a:rPr>
-              <a:t>Item 5 daripada 5.</a:t>
+              <a:t>Item 2 daripada 5.</a:t>
             </a:r>
           </a:p>
           <a:p>
@@ -7558,7 +7355,7 @@
                 </a:solidFill>
                 <a:latin typeface="Arial"/>
               </a:rPr>
-              <a:t>Baris: T03B03-ROW-056, T03B03-ROW-058, (+1)</a:t>
+              <a:t>Baris: T03B03-ROW-041</a:t>
             </a:r>
           </a:p>
           <a:p>
@@ -7665,7 +7462,7 @@
                 </a:solidFill>
                 <a:latin typeface="Arial"/>
               </a:rPr>
-              <a:t>T03B03-S11-ST-RESULT   ·   Keputusan kuiz</a:t>
+              <a:t>T03B03-S11-ST-03   ·   Item kuiz</a:t>
             </a:r>
           </a:p>
           <a:p>
@@ -7677,7 +7474,7 @@
                 </a:solidFill>
                 <a:latin typeface="Arial"/>
               </a:rPr>
-              <a:t>Pencetus: item terakhir dihantar  [T03B03-S11-TRG-RESULT]</a:t>
+              <a:t>Pencetus: Q3 · MULTIPLE_CHOICE  [T03B03-S11-TRG-03]</a:t>
             </a:r>
           </a:p>
           <a:p>
@@ -7701,7 +7498,55 @@
                 </a:solidFill>
                 <a:latin typeface="Arial"/>
               </a:rPr>
-              <a:t>· Markah lulus 60 peratus</a:t>
+              <a:t>· Pelan manakah yang menentukan jajaran pagar di tapak?</a:t>
+            </a:r>
+          </a:p>
+          <a:p>
+            <a:pPr algn="l" lvl="1"/>
+            <a:r>
+              <a:rPr sz="1000" b="0" i="0">
+                <a:solidFill>
+                  <a:srgbClr val="1A1A1A"/>
+                </a:solidFill>
+                <a:latin typeface="Arial"/>
+              </a:rPr>
+              <a:t>· Pelan Ukur Sempadan.</a:t>
+            </a:r>
+          </a:p>
+          <a:p>
+            <a:pPr algn="l" lvl="1"/>
+            <a:r>
+              <a:rPr sz="1000" b="0" i="0">
+                <a:solidFill>
+                  <a:srgbClr val="1A1A1A"/>
+                </a:solidFill>
+                <a:latin typeface="Arial"/>
+              </a:rPr>
+              <a:t>· Pelan Saliran</a:t>
+            </a:r>
+          </a:p>
+          <a:p>
+            <a:pPr algn="l" lvl="1"/>
+            <a:r>
+              <a:rPr sz="1000" b="0" i="0">
+                <a:solidFill>
+                  <a:srgbClr val="1A1A1A"/>
+                </a:solidFill>
+                <a:latin typeface="Arial"/>
+              </a:rPr>
+              <a:t>· Lukisan Struktur Jurutera</a:t>
+            </a:r>
+          </a:p>
+          <a:p>
+            <a:pPr algn="l" lvl="1"/>
+            <a:r>
+              <a:rPr sz="1000" b="0" i="0">
+                <a:solidFill>
+                  <a:srgbClr val="1A1A1A"/>
+                </a:solidFill>
+                <a:latin typeface="Arial"/>
+              </a:rPr>
+              <a:t>· Pelan Susun Atur Tanaman</a:t>
             </a:r>
           </a:p>
           <a:p>
@@ -7725,7 +7570,7 @@
                 </a:solidFill>
                 <a:latin typeface="Arial"/>
               </a:rPr>
-              <a:t>Markah dipaparkan selepas item kelima.</a:t>
+              <a:t>Item 3 daripada 5.</a:t>
             </a:r>
           </a:p>
           <a:p>
@@ -7749,7 +7594,7 @@
                 </a:solidFill>
                 <a:latin typeface="Arial"/>
               </a:rPr>
-              <a:t>Keadaan akhir bagi skrin ini. Pelajar meneruskan dengan SETERUSNYA.</a:t>
+              <a:t>Menghantar jawapan membawa pelajar ke item berikutnya. Tiada navigasi kembali antara item kuiz.</a:t>
             </a:r>
           </a:p>
           <a:p>
@@ -7773,7 +7618,7 @@
                 </a:solidFill>
                 <a:latin typeface="Arial"/>
               </a:rPr>
-              <a:t>Tiada baris modul — keadaan struktur</a:t>
+              <a:t>Baris: T03B03-ROW-048</a:t>
             </a:r>
           </a:p>
           <a:p>
@@ -7786,6 +7631,18 @@
                 <a:latin typeface="Arial"/>
               </a:rPr>
               <a:t>Keputusan: A7</a:t>
+            </a:r>
+          </a:p>
+          <a:p>
+            <a:pPr algn="l" lvl="1"/>
+            <a:r>
+              <a:rPr sz="900" b="0" i="0">
+                <a:solidFill>
+                  <a:srgbClr val="B71C1C"/>
+                </a:solidFill>
+                <a:latin typeface="Arial"/>
+              </a:rPr>
+              <a:t>HAD: Kunci jawapan draf — belum disahkan.</a:t>
             </a:r>
           </a:p>
         </p:txBody>
@@ -7820,7 +7677,906 @@
                 </a:solidFill>
                 <a:latin typeface="Arial"/>
               </a:rPr>
-              <a:t>Lampiran keadaan · 3 panel/halaman · halaman 14 daripada 14   ·   TECHNICAL_PROOF · DRAFT_FOR_BARIAH_REVIEW · NOT_INSTRUCTIONALLY_APPROVED · NOT_LEARNER_FACING_FINAL</a:t>
+              <a:t>Lampiran keadaan · 3 panel/halaman · halaman 14 daripada 15   ·   TECHNICAL_PROOF · DRAFT_FOR_BARIAH_REVIEW · NOT_INSTRUCTIONALLY_APPROVED · NOT_LEARNER_FACING_FINAL</a:t>
+            </a:r>
+          </a:p>
+        </p:txBody>
+      </p:sp>
+    </p:spTree>
+  </p:cSld>
+  <p:clrMapOvr>
+    <a:masterClrMapping/>
+  </p:clrMapOvr>
+</p:sld>
+</file>
+
+<file path=ppt/slides/slide16.xml><?xml version="1.0" encoding="utf-8"?>
+<p:sld xmlns:a="http://schemas.openxmlformats.org/drawingml/2006/main" xmlns:p="http://schemas.openxmlformats.org/presentationml/2006/main" xmlns:r="http://schemas.openxmlformats.org/officeDocument/2006/relationships">
+  <p:cSld>
+    <p:spTree>
+      <p:nvGrpSpPr>
+        <p:cNvPr id="1" name=""/>
+        <p:cNvGrpSpPr/>
+        <p:nvPr/>
+      </p:nvGrpSpPr>
+      <p:grpSpPr/>
+      <p:sp>
+        <p:nvSpPr>
+          <p:cNvPr id="2" name="TextBox 1"/>
+          <p:cNvSpPr txBox="1"/>
+          <p:nvPr/>
+        </p:nvSpPr>
+        <p:spPr>
+          <a:xfrm>
+            <a:off x="457200" y="320000"/>
+            <a:ext cx="11277600" cy="700000"/>
+          </a:xfrm>
+          <a:prstGeom prst="rect">
+            <a:avLst/>
+          </a:prstGeom>
+          <a:noFill/>
+        </p:spPr>
+        <p:txBody>
+          <a:bodyPr wrap="square" lIns="0" rIns="0" tIns="0" bIns="0">
+            <a:noAutofit/>
+          </a:bodyPr>
+          <a:lstStyle/>
+          <a:p>
+            <a:pPr algn="l"/>
+            <a:r>
+              <a:rPr sz="1100" b="1" i="0">
+                <a:solidFill>
+                  <a:srgbClr val="6B6B6B"/>
+                </a:solidFill>
+                <a:latin typeface="Arial"/>
+              </a:rPr>
+              <a:t>T03B03-S11   ·   static content</a:t>
+            </a:r>
+          </a:p>
+          <a:p>
+            <a:pPr algn="l"/>
+            <a:r>
+              <a:rPr sz="2200" b="1" i="0">
+                <a:solidFill>
+                  <a:srgbClr val="1A1A1A"/>
+                </a:solidFill>
+                <a:latin typeface="Arial"/>
+              </a:rPr>
+              <a:t>Kuiz</a:t>
+            </a:r>
+          </a:p>
+        </p:txBody>
+      </p:sp>
+      <p:sp>
+        <p:nvSpPr>
+          <p:cNvPr id="3" name="Rectangle 2"/>
+          <p:cNvSpPr/>
+          <p:nvPr/>
+        </p:nvSpPr>
+        <p:spPr>
+          <a:xfrm>
+            <a:off x="457200" y="1120000"/>
+            <a:ext cx="11277600" cy="9525"/>
+          </a:xfrm>
+          <a:prstGeom prst="rect">
+            <a:avLst/>
+          </a:prstGeom>
+          <a:solidFill>
+            <a:srgbClr val="D8D8D8"/>
+          </a:solidFill>
+          <a:ln>
+            <a:noFill/>
+          </a:ln>
+          <a:effectLst/>
+        </p:spPr>
+        <p:style>
+          <a:lnRef idx="1">
+            <a:schemeClr val="accent1"/>
+          </a:lnRef>
+          <a:fillRef idx="3">
+            <a:schemeClr val="accent1"/>
+          </a:fillRef>
+          <a:effectRef idx="0">
+            <a:schemeClr val="accent1"/>
+          </a:effectRef>
+          <a:fontRef idx="minor">
+            <a:schemeClr val="lt1"/>
+          </a:fontRef>
+        </p:style>
+        <p:txBody>
+          <a:bodyPr rtlCol="0" anchor="ctr">
+            <a:noAutofit/>
+          </a:bodyPr>
+          <a:lstStyle/>
+          <a:p>
+            <a:pPr algn="ctr"/>
+          </a:p>
+        </p:txBody>
+      </p:sp>
+      <p:sp>
+        <p:nvSpPr>
+          <p:cNvPr id="4" name="Rectangle 3"/>
+          <p:cNvSpPr/>
+          <p:nvPr/>
+        </p:nvSpPr>
+        <p:spPr>
+          <a:xfrm>
+            <a:off x="457200" y="1280000"/>
+            <a:ext cx="3625866" cy="4700000"/>
+          </a:xfrm>
+          <a:prstGeom prst="rect">
+            <a:avLst/>
+          </a:prstGeom>
+          <a:solidFill>
+            <a:srgbClr val="F7F7F7"/>
+          </a:solidFill>
+          <a:ln>
+            <a:solidFill>
+              <a:srgbClr val="D8D8D8"/>
+            </a:solidFill>
+          </a:ln>
+          <a:effectLst/>
+        </p:spPr>
+        <p:style>
+          <a:lnRef idx="1">
+            <a:schemeClr val="accent1"/>
+          </a:lnRef>
+          <a:fillRef idx="3">
+            <a:schemeClr val="accent1"/>
+          </a:fillRef>
+          <a:effectRef idx="0">
+            <a:schemeClr val="accent1"/>
+          </a:effectRef>
+          <a:fontRef idx="minor">
+            <a:schemeClr val="lt1"/>
+          </a:fontRef>
+        </p:style>
+        <p:txBody>
+          <a:bodyPr rtlCol="0" anchor="ctr">
+            <a:noAutofit/>
+          </a:bodyPr>
+          <a:lstStyle/>
+          <a:p>
+            <a:pPr algn="ctr"/>
+          </a:p>
+        </p:txBody>
+      </p:sp>
+      <p:sp>
+        <p:nvSpPr>
+          <p:cNvPr id="5" name="TextBox 4"/>
+          <p:cNvSpPr txBox="1"/>
+          <p:nvPr/>
+        </p:nvSpPr>
+        <p:spPr>
+          <a:xfrm>
+            <a:off x="637200" y="1460000"/>
+            <a:ext cx="3265866" cy="4340000"/>
+          </a:xfrm>
+          <a:prstGeom prst="rect">
+            <a:avLst/>
+          </a:prstGeom>
+          <a:noFill/>
+        </p:spPr>
+        <p:txBody>
+          <a:bodyPr wrap="square" lIns="0" rIns="0" tIns="0" bIns="0">
+            <a:noAutofit/>
+          </a:bodyPr>
+          <a:lstStyle/>
+          <a:p>
+            <a:pPr algn="l"/>
+            <a:r>
+              <a:rPr sz="1100" b="1" i="0">
+                <a:solidFill>
+                  <a:srgbClr val="6B6B6B"/>
+                </a:solidFill>
+                <a:latin typeface="Arial"/>
+              </a:rPr>
+              <a:t>T03B03-S11-ST-04   ·   Item kuiz</a:t>
+            </a:r>
+          </a:p>
+          <a:p>
+            <a:pPr algn="l"/>
+            <a:r>
+              <a:rPr sz="1200" b="1" i="0">
+                <a:solidFill>
+                  <a:srgbClr val="37474F"/>
+                </a:solidFill>
+                <a:latin typeface="Arial"/>
+              </a:rPr>
+              <a:t>Pencetus: Q4 · MULTIPLE_CHOICE  [T03B03-S11-TRG-04]</a:t>
+            </a:r>
+          </a:p>
+          <a:p>
+            <a:pPr algn="l"/>
+            <a:r>
+              <a:rPr sz="1000" b="1" i="0">
+                <a:solidFill>
+                  <a:srgbClr val="6B6B6B"/>
+                </a:solidFill>
+                <a:latin typeface="Arial"/>
+              </a:rPr>
+              <a:t>Apa yang dipaparkan</a:t>
+            </a:r>
+          </a:p>
+          <a:p>
+            <a:pPr algn="l" lvl="1"/>
+            <a:r>
+              <a:rPr sz="1000" b="0" i="0">
+                <a:solidFill>
+                  <a:srgbClr val="1A1A1A"/>
+                </a:solidFill>
+                <a:latin typeface="Arial"/>
+              </a:rPr>
+              <a:t>· Apakah fungsi kamber (camber) pada permukaan jalan akses?</a:t>
+            </a:r>
+          </a:p>
+          <a:p>
+            <a:pPr algn="l" lvl="1"/>
+            <a:r>
+              <a:rPr sz="1000" b="0" i="0">
+                <a:solidFill>
+                  <a:srgbClr val="1A1A1A"/>
+                </a:solidFill>
+                <a:latin typeface="Arial"/>
+              </a:rPr>
+              <a:t>· Memberikan kecerunan melintang dari tengah ke tepi supaya air tidak bertakung di permukaan.</a:t>
+            </a:r>
+          </a:p>
+          <a:p>
+            <a:pPr algn="l" lvl="1"/>
+            <a:r>
+              <a:rPr sz="1000" b="0" i="0">
+                <a:solidFill>
+                  <a:srgbClr val="1A1A1A"/>
+                </a:solidFill>
+                <a:latin typeface="Arial"/>
+              </a:rPr>
+              <a:t>· Menambah ketebalan lapisan permukaan di bahagian tengah</a:t>
+            </a:r>
+          </a:p>
+          <a:p>
+            <a:pPr algn="l" lvl="1"/>
+            <a:r>
+              <a:rPr sz="1000" b="0" i="0">
+                <a:solidFill>
+                  <a:srgbClr val="1A1A1A"/>
+                </a:solidFill>
+                <a:latin typeface="Arial"/>
+              </a:rPr>
+              <a:t>· Menandakan sempadan jalan untuk pemandu</a:t>
+            </a:r>
+          </a:p>
+          <a:p>
+            <a:pPr algn="l" lvl="1"/>
+            <a:r>
+              <a:rPr sz="1000" b="0" i="0">
+                <a:solidFill>
+                  <a:srgbClr val="1A1A1A"/>
+                </a:solidFill>
+                <a:latin typeface="Arial"/>
+              </a:rPr>
+              <a:t>· Menahan lapisan permukaan daripada bergerak ke tepi</a:t>
+            </a:r>
+          </a:p>
+          <a:p>
+            <a:pPr algn="l"/>
+            <a:r>
+              <a:rPr sz="1000" b="1" i="0">
+                <a:solidFill>
+                  <a:srgbClr val="6B6B6B"/>
+                </a:solidFill>
+                <a:latin typeface="Arial"/>
+              </a:rPr>
+              <a:t>Beza daripada keadaan asas</a:t>
+            </a:r>
+          </a:p>
+          <a:p>
+            <a:pPr algn="l" lvl="1"/>
+            <a:r>
+              <a:rPr sz="1000" b="0" i="0">
+                <a:solidFill>
+                  <a:srgbClr val="1A1A1A"/>
+                </a:solidFill>
+                <a:latin typeface="Arial"/>
+              </a:rPr>
+              <a:t>Item 4 daripada 5.</a:t>
+            </a:r>
+          </a:p>
+          <a:p>
+            <a:pPr algn="l"/>
+            <a:r>
+              <a:rPr sz="1000" b="1" i="0">
+                <a:solidFill>
+                  <a:srgbClr val="6B6B6B"/>
+                </a:solidFill>
+                <a:latin typeface="Arial"/>
+              </a:rPr>
+              <a:t>Cara pelajar kembali / meneruskan</a:t>
+            </a:r>
+          </a:p>
+          <a:p>
+            <a:pPr algn="l" lvl="1"/>
+            <a:r>
+              <a:rPr sz="1000" b="0" i="0">
+                <a:solidFill>
+                  <a:srgbClr val="1A1A1A"/>
+                </a:solidFill>
+                <a:latin typeface="Arial"/>
+              </a:rPr>
+              <a:t>Menghantar jawapan membawa pelajar ke item berikutnya. Tiada navigasi kembali antara item kuiz.</a:t>
+            </a:r>
+          </a:p>
+          <a:p>
+            <a:pPr algn="l"/>
+            <a:r>
+              <a:rPr sz="1000" b="1" i="0">
+                <a:solidFill>
+                  <a:srgbClr val="6B6B6B"/>
+                </a:solidFill>
+                <a:latin typeface="Arial"/>
+              </a:rPr>
+              <a:t>Sumber dan kuasa</a:t>
+            </a:r>
+          </a:p>
+          <a:p>
+            <a:pPr algn="l" lvl="1"/>
+            <a:r>
+              <a:rPr sz="900" b="0" i="0">
+                <a:solidFill>
+                  <a:srgbClr val="0D47A1"/>
+                </a:solidFill>
+                <a:latin typeface="Arial"/>
+              </a:rPr>
+              <a:t>Baris: T03B03-ROW-076</a:t>
+            </a:r>
+          </a:p>
+          <a:p>
+            <a:pPr algn="l" lvl="1"/>
+            <a:r>
+              <a:rPr sz="900" b="0" i="0">
+                <a:solidFill>
+                  <a:srgbClr val="6B6B6B"/>
+                </a:solidFill>
+                <a:latin typeface="Arial"/>
+              </a:rPr>
+              <a:t>Keputusan: A7</a:t>
+            </a:r>
+          </a:p>
+          <a:p>
+            <a:pPr algn="l" lvl="1"/>
+            <a:r>
+              <a:rPr sz="900" b="0" i="0">
+                <a:solidFill>
+                  <a:srgbClr val="B71C1C"/>
+                </a:solidFill>
+                <a:latin typeface="Arial"/>
+              </a:rPr>
+              <a:t>HAD: Kunci jawapan draf — belum disahkan.</a:t>
+            </a:r>
+          </a:p>
+        </p:txBody>
+      </p:sp>
+      <p:sp>
+        <p:nvSpPr>
+          <p:cNvPr id="6" name="Rectangle 5"/>
+          <p:cNvSpPr/>
+          <p:nvPr/>
+        </p:nvSpPr>
+        <p:spPr>
+          <a:xfrm>
+            <a:off x="4283066" y="1280000"/>
+            <a:ext cx="3625866" cy="4700000"/>
+          </a:xfrm>
+          <a:prstGeom prst="rect">
+            <a:avLst/>
+          </a:prstGeom>
+          <a:solidFill>
+            <a:srgbClr val="F7F7F7"/>
+          </a:solidFill>
+          <a:ln>
+            <a:solidFill>
+              <a:srgbClr val="D8D8D8"/>
+            </a:solidFill>
+          </a:ln>
+          <a:effectLst/>
+        </p:spPr>
+        <p:style>
+          <a:lnRef idx="1">
+            <a:schemeClr val="accent1"/>
+          </a:lnRef>
+          <a:fillRef idx="3">
+            <a:schemeClr val="accent1"/>
+          </a:fillRef>
+          <a:effectRef idx="0">
+            <a:schemeClr val="accent1"/>
+          </a:effectRef>
+          <a:fontRef idx="minor">
+            <a:schemeClr val="lt1"/>
+          </a:fontRef>
+        </p:style>
+        <p:txBody>
+          <a:bodyPr rtlCol="0" anchor="ctr">
+            <a:noAutofit/>
+          </a:bodyPr>
+          <a:lstStyle/>
+          <a:p>
+            <a:pPr algn="ctr"/>
+          </a:p>
+        </p:txBody>
+      </p:sp>
+      <p:sp>
+        <p:nvSpPr>
+          <p:cNvPr id="7" name="TextBox 6"/>
+          <p:cNvSpPr txBox="1"/>
+          <p:nvPr/>
+        </p:nvSpPr>
+        <p:spPr>
+          <a:xfrm>
+            <a:off x="4463066" y="1460000"/>
+            <a:ext cx="3265866" cy="4340000"/>
+          </a:xfrm>
+          <a:prstGeom prst="rect">
+            <a:avLst/>
+          </a:prstGeom>
+          <a:noFill/>
+        </p:spPr>
+        <p:txBody>
+          <a:bodyPr wrap="square" lIns="0" rIns="0" tIns="0" bIns="0">
+            <a:noAutofit/>
+          </a:bodyPr>
+          <a:lstStyle/>
+          <a:p>
+            <a:pPr algn="l"/>
+            <a:r>
+              <a:rPr sz="1100" b="1" i="0">
+                <a:solidFill>
+                  <a:srgbClr val="6B6B6B"/>
+                </a:solidFill>
+                <a:latin typeface="Arial"/>
+              </a:rPr>
+              <a:t>T03B03-S11-ST-05   ·   Item kuiz</a:t>
+            </a:r>
+          </a:p>
+          <a:p>
+            <a:pPr algn="l"/>
+            <a:r>
+              <a:rPr sz="1200" b="1" i="0">
+                <a:solidFill>
+                  <a:srgbClr val="37474F"/>
+                </a:solidFill>
+                <a:latin typeface="Arial"/>
+              </a:rPr>
+              <a:t>Pencetus: Q5 · MULTIPLE_RESPONSE  [T03B03-S11-TRG-05]</a:t>
+            </a:r>
+          </a:p>
+          <a:p>
+            <a:pPr algn="l"/>
+            <a:r>
+              <a:rPr sz="1000" b="1" i="0">
+                <a:solidFill>
+                  <a:srgbClr val="6B6B6B"/>
+                </a:solidFill>
+                <a:latin typeface="Arial"/>
+              </a:rPr>
+              <a:t>Apa yang dipaparkan</a:t>
+            </a:r>
+          </a:p>
+          <a:p>
+            <a:pPr algn="l" lvl="1"/>
+            <a:r>
+              <a:rPr sz="1000" b="0" i="0">
+                <a:solidFill>
+                  <a:srgbClr val="1A1A1A"/>
+                </a:solidFill>
+                <a:latin typeface="Arial"/>
+              </a:rPr>
+              <a:t>· Pilih SEMUA ciri yang menepati swale sebagai alternatif kepada longkang konkrit.</a:t>
+            </a:r>
+          </a:p>
+          <a:p>
+            <a:pPr algn="l" lvl="1"/>
+            <a:r>
+              <a:rPr sz="1000" b="0" i="0">
+                <a:solidFill>
+                  <a:srgbClr val="1A1A1A"/>
+                </a:solidFill>
+                <a:latin typeface="Arial"/>
+              </a:rPr>
+              <a:t>· Parit yang cetek dan lebar</a:t>
+            </a:r>
+          </a:p>
+          <a:p>
+            <a:pPr algn="l" lvl="1"/>
+            <a:r>
+              <a:rPr sz="1000" b="0" i="0">
+                <a:solidFill>
+                  <a:srgbClr val="1A1A1A"/>
+                </a:solidFill>
+                <a:latin typeface="Arial"/>
+              </a:rPr>
+              <a:t>· Ditanami rumput atau tumbuhan tahan air</a:t>
+            </a:r>
+          </a:p>
+          <a:p>
+            <a:pPr algn="l" lvl="1"/>
+            <a:r>
+              <a:rPr sz="1000" b="0" i="0">
+                <a:solidFill>
+                  <a:srgbClr val="1A1A1A"/>
+                </a:solidFill>
+                <a:latin typeface="Arial"/>
+              </a:rPr>
+              <a:t>· Memperlahankan aliran air larian permukaan</a:t>
+            </a:r>
+          </a:p>
+          <a:p>
+            <a:pPr algn="l" lvl="1"/>
+            <a:r>
+              <a:rPr sz="1000" b="0" i="0">
+                <a:solidFill>
+                  <a:srgbClr val="1A1A1A"/>
+                </a:solidFill>
+                <a:latin typeface="Arial"/>
+              </a:rPr>
+              <a:t>· Menggalakkan penyerapan air ke dalam tanah</a:t>
+            </a:r>
+          </a:p>
+          <a:p>
+            <a:pPr algn="l" lvl="1"/>
+            <a:r>
+              <a:rPr sz="1000" b="0" i="0">
+                <a:solidFill>
+                  <a:srgbClr val="1A1A1A"/>
+                </a:solidFill>
+                <a:latin typeface="Arial"/>
+              </a:rPr>
+              <a:t>· Dilapisi konkrit di seluruh permukaannya</a:t>
+            </a:r>
+          </a:p>
+          <a:p>
+            <a:pPr algn="l" lvl="1"/>
+            <a:r>
+              <a:rPr sz="1000" b="0" i="0">
+                <a:solidFill>
+                  <a:srgbClr val="1A1A1A"/>
+                </a:solidFill>
+                <a:latin typeface="Arial"/>
+              </a:rPr>
+              <a:t>· Direka untuk mempercepatkan aliran ke saluran keluar</a:t>
+            </a:r>
+          </a:p>
+          <a:p>
+            <a:pPr algn="l"/>
+            <a:r>
+              <a:rPr sz="1000" b="1" i="0">
+                <a:solidFill>
+                  <a:srgbClr val="6B6B6B"/>
+                </a:solidFill>
+                <a:latin typeface="Arial"/>
+              </a:rPr>
+              <a:t>Beza daripada keadaan asas</a:t>
+            </a:r>
+          </a:p>
+          <a:p>
+            <a:pPr algn="l" lvl="1"/>
+            <a:r>
+              <a:rPr sz="1000" b="0" i="0">
+                <a:solidFill>
+                  <a:srgbClr val="1A1A1A"/>
+                </a:solidFill>
+                <a:latin typeface="Arial"/>
+              </a:rPr>
+              <a:t>Item 5 daripada 5.</a:t>
+            </a:r>
+          </a:p>
+          <a:p>
+            <a:pPr algn="l"/>
+            <a:r>
+              <a:rPr sz="1000" b="1" i="0">
+                <a:solidFill>
+                  <a:srgbClr val="6B6B6B"/>
+                </a:solidFill>
+                <a:latin typeface="Arial"/>
+              </a:rPr>
+              <a:t>Cara pelajar kembali / meneruskan</a:t>
+            </a:r>
+          </a:p>
+          <a:p>
+            <a:pPr algn="l" lvl="1"/>
+            <a:r>
+              <a:rPr sz="1000" b="0" i="0">
+                <a:solidFill>
+                  <a:srgbClr val="1A1A1A"/>
+                </a:solidFill>
+                <a:latin typeface="Arial"/>
+              </a:rPr>
+              <a:t>Menghantar jawapan membawa pelajar ke item berikutnya. Tiada navigasi kembali antara item kuiz.</a:t>
+            </a:r>
+          </a:p>
+          <a:p>
+            <a:pPr algn="l"/>
+            <a:r>
+              <a:rPr sz="1000" b="1" i="0">
+                <a:solidFill>
+                  <a:srgbClr val="6B6B6B"/>
+                </a:solidFill>
+                <a:latin typeface="Arial"/>
+              </a:rPr>
+              <a:t>Sumber dan kuasa</a:t>
+            </a:r>
+          </a:p>
+          <a:p>
+            <a:pPr algn="l" lvl="1"/>
+            <a:r>
+              <a:rPr sz="900" b="0" i="0">
+                <a:solidFill>
+                  <a:srgbClr val="0D47A1"/>
+                </a:solidFill>
+                <a:latin typeface="Arial"/>
+              </a:rPr>
+              <a:t>Baris: T03B03-ROW-056, T03B03-ROW-058, (+1)</a:t>
+            </a:r>
+          </a:p>
+          <a:p>
+            <a:pPr algn="l" lvl="1"/>
+            <a:r>
+              <a:rPr sz="900" b="0" i="0">
+                <a:solidFill>
+                  <a:srgbClr val="6B6B6B"/>
+                </a:solidFill>
+                <a:latin typeface="Arial"/>
+              </a:rPr>
+              <a:t>Keputusan: A7</a:t>
+            </a:r>
+          </a:p>
+          <a:p>
+            <a:pPr algn="l" lvl="1"/>
+            <a:r>
+              <a:rPr sz="900" b="0" i="0">
+                <a:solidFill>
+                  <a:srgbClr val="B71C1C"/>
+                </a:solidFill>
+                <a:latin typeface="Arial"/>
+              </a:rPr>
+              <a:t>HAD: Kunci jawapan draf — belum disahkan.</a:t>
+            </a:r>
+          </a:p>
+        </p:txBody>
+      </p:sp>
+      <p:sp>
+        <p:nvSpPr>
+          <p:cNvPr id="8" name="Rectangle 7"/>
+          <p:cNvSpPr/>
+          <p:nvPr/>
+        </p:nvSpPr>
+        <p:spPr>
+          <a:xfrm>
+            <a:off x="8108932" y="1280000"/>
+            <a:ext cx="3625866" cy="4700000"/>
+          </a:xfrm>
+          <a:prstGeom prst="rect">
+            <a:avLst/>
+          </a:prstGeom>
+          <a:solidFill>
+            <a:srgbClr val="F7F7F7"/>
+          </a:solidFill>
+          <a:ln>
+            <a:solidFill>
+              <a:srgbClr val="D8D8D8"/>
+            </a:solidFill>
+          </a:ln>
+          <a:effectLst/>
+        </p:spPr>
+        <p:style>
+          <a:lnRef idx="1">
+            <a:schemeClr val="accent1"/>
+          </a:lnRef>
+          <a:fillRef idx="3">
+            <a:schemeClr val="accent1"/>
+          </a:fillRef>
+          <a:effectRef idx="0">
+            <a:schemeClr val="accent1"/>
+          </a:effectRef>
+          <a:fontRef idx="minor">
+            <a:schemeClr val="lt1"/>
+          </a:fontRef>
+        </p:style>
+        <p:txBody>
+          <a:bodyPr rtlCol="0" anchor="ctr">
+            <a:noAutofit/>
+          </a:bodyPr>
+          <a:lstStyle/>
+          <a:p>
+            <a:pPr algn="ctr"/>
+          </a:p>
+        </p:txBody>
+      </p:sp>
+      <p:sp>
+        <p:nvSpPr>
+          <p:cNvPr id="9" name="TextBox 8"/>
+          <p:cNvSpPr txBox="1"/>
+          <p:nvPr/>
+        </p:nvSpPr>
+        <p:spPr>
+          <a:xfrm>
+            <a:off x="8288932" y="1460000"/>
+            <a:ext cx="3265866" cy="4340000"/>
+          </a:xfrm>
+          <a:prstGeom prst="rect">
+            <a:avLst/>
+          </a:prstGeom>
+          <a:noFill/>
+        </p:spPr>
+        <p:txBody>
+          <a:bodyPr wrap="square" lIns="0" rIns="0" tIns="0" bIns="0">
+            <a:noAutofit/>
+          </a:bodyPr>
+          <a:lstStyle/>
+          <a:p>
+            <a:pPr algn="l"/>
+            <a:r>
+              <a:rPr sz="1100" b="1" i="0">
+                <a:solidFill>
+                  <a:srgbClr val="6B6B6B"/>
+                </a:solidFill>
+                <a:latin typeface="Arial"/>
+              </a:rPr>
+              <a:t>T03B03-S11-ST-RESULT   ·   Keputusan kuiz</a:t>
+            </a:r>
+          </a:p>
+          <a:p>
+            <a:pPr algn="l"/>
+            <a:r>
+              <a:rPr sz="1200" b="1" i="0">
+                <a:solidFill>
+                  <a:srgbClr val="37474F"/>
+                </a:solidFill>
+                <a:latin typeface="Arial"/>
+              </a:rPr>
+              <a:t>Pencetus: item terakhir dihantar  [T03B03-S11-TRG-RESULT]</a:t>
+            </a:r>
+          </a:p>
+          <a:p>
+            <a:pPr algn="l"/>
+            <a:r>
+              <a:rPr sz="1000" b="1" i="0">
+                <a:solidFill>
+                  <a:srgbClr val="6B6B6B"/>
+                </a:solidFill>
+                <a:latin typeface="Arial"/>
+              </a:rPr>
+              <a:t>Apa yang dipaparkan</a:t>
+            </a:r>
+          </a:p>
+          <a:p>
+            <a:pPr algn="l" lvl="1"/>
+            <a:r>
+              <a:rPr sz="1000" b="0" i="0">
+                <a:solidFill>
+                  <a:srgbClr val="1A1A1A"/>
+                </a:solidFill>
+                <a:latin typeface="Arial"/>
+              </a:rPr>
+              <a:t>· Markah lulus 60 peratus</a:t>
+            </a:r>
+          </a:p>
+          <a:p>
+            <a:pPr algn="l"/>
+            <a:r>
+              <a:rPr sz="1000" b="1" i="0">
+                <a:solidFill>
+                  <a:srgbClr val="6B6B6B"/>
+                </a:solidFill>
+                <a:latin typeface="Arial"/>
+              </a:rPr>
+              <a:t>Beza daripada keadaan asas</a:t>
+            </a:r>
+          </a:p>
+          <a:p>
+            <a:pPr algn="l" lvl="1"/>
+            <a:r>
+              <a:rPr sz="1000" b="0" i="0">
+                <a:solidFill>
+                  <a:srgbClr val="1A1A1A"/>
+                </a:solidFill>
+                <a:latin typeface="Arial"/>
+              </a:rPr>
+              <a:t>Markah dipaparkan selepas item kelima.</a:t>
+            </a:r>
+          </a:p>
+          <a:p>
+            <a:pPr algn="l"/>
+            <a:r>
+              <a:rPr sz="1000" b="1" i="0">
+                <a:solidFill>
+                  <a:srgbClr val="6B6B6B"/>
+                </a:solidFill>
+                <a:latin typeface="Arial"/>
+              </a:rPr>
+              <a:t>Cara pelajar kembali / meneruskan</a:t>
+            </a:r>
+          </a:p>
+          <a:p>
+            <a:pPr algn="l" lvl="1"/>
+            <a:r>
+              <a:rPr sz="1000" b="0" i="0">
+                <a:solidFill>
+                  <a:srgbClr val="1A1A1A"/>
+                </a:solidFill>
+                <a:latin typeface="Arial"/>
+              </a:rPr>
+              <a:t>Keadaan akhir bagi skrin ini. Pelajar meneruskan dengan SETERUSNYA.</a:t>
+            </a:r>
+          </a:p>
+          <a:p>
+            <a:pPr algn="l"/>
+            <a:r>
+              <a:rPr sz="1000" b="1" i="0">
+                <a:solidFill>
+                  <a:srgbClr val="6B6B6B"/>
+                </a:solidFill>
+                <a:latin typeface="Arial"/>
+              </a:rPr>
+              <a:t>Sumber dan kuasa</a:t>
+            </a:r>
+          </a:p>
+          <a:p>
+            <a:pPr algn="l" lvl="1"/>
+            <a:r>
+              <a:rPr sz="900" b="0" i="0">
+                <a:solidFill>
+                  <a:srgbClr val="0D47A1"/>
+                </a:solidFill>
+                <a:latin typeface="Arial"/>
+              </a:rPr>
+              <a:t>Tiada baris modul — keadaan struktur</a:t>
+            </a:r>
+          </a:p>
+          <a:p>
+            <a:pPr algn="l" lvl="1"/>
+            <a:r>
+              <a:rPr sz="900" b="0" i="0">
+                <a:solidFill>
+                  <a:srgbClr val="6B6B6B"/>
+                </a:solidFill>
+                <a:latin typeface="Arial"/>
+              </a:rPr>
+              <a:t>Keputusan: A7</a:t>
+            </a:r>
+          </a:p>
+        </p:txBody>
+      </p:sp>
+      <p:sp>
+        <p:nvSpPr>
+          <p:cNvPr id="10" name="TextBox 9"/>
+          <p:cNvSpPr txBox="1"/>
+          <p:nvPr/>
+        </p:nvSpPr>
+        <p:spPr>
+          <a:xfrm>
+            <a:off x="457200" y="6150000"/>
+            <a:ext cx="11277600" cy="400000"/>
+          </a:xfrm>
+          <a:prstGeom prst="rect">
+            <a:avLst/>
+          </a:prstGeom>
+          <a:noFill/>
+        </p:spPr>
+        <p:txBody>
+          <a:bodyPr wrap="square" lIns="0" rIns="0" tIns="0" bIns="0">
+            <a:noAutofit/>
+          </a:bodyPr>
+          <a:lstStyle/>
+          <a:p>
+            <a:pPr algn="l"/>
+            <a:r>
+              <a:rPr sz="900" b="0" i="0">
+                <a:solidFill>
+                  <a:srgbClr val="6B6B6B"/>
+                </a:solidFill>
+                <a:latin typeface="Arial"/>
+              </a:rPr>
+              <a:t>Lampiran keadaan · 3 panel/halaman · halaman 15 daripada 15   ·   TECHNICAL_PROOF · DRAFT_FOR_BARIAH_REVIEW · NOT_INSTRUCTIONALLY_APPROVED · NOT_LEARNER_FACING_FINAL</a:t>
             </a:r>
           </a:p>
         </p:txBody>
@@ -7873,7 +8629,7 @@
                 </a:solidFill>
                 <a:latin typeface="Arial"/>
               </a:rPr>
-              <a:t>T03B03-S04   ·   click-to-reveal</a:t>
+              <a:t>T03B03-S04   ·   Click-to-Reveal</a:t>
             </a:r>
           </a:p>
           <a:p>
@@ -8659,7 +9415,7 @@
                 </a:solidFill>
                 <a:latin typeface="Arial"/>
               </a:rPr>
-              <a:t>Lampiran keadaan · 3 panel/halaman · halaman 1 daripada 14   ·   TECHNICAL_PROOF · DRAFT_FOR_BARIAH_REVIEW · NOT_INSTRUCTIONALLY_APPROVED · NOT_LEARNER_FACING_FINAL</a:t>
+              <a:t>Lampiran keadaan · 3 panel/halaman · halaman 1 daripada 15   ·   TECHNICAL_PROOF · DRAFT_FOR_BARIAH_REVIEW · NOT_INSTRUCTIONALLY_APPROVED · NOT_LEARNER_FACING_FINAL</a:t>
             </a:r>
           </a:p>
         </p:txBody>
@@ -8712,7 +9468,7 @@
                 </a:solidFill>
                 <a:latin typeface="Arial"/>
               </a:rPr>
-              <a:t>T03B03-S04   ·   click-to-reveal</a:t>
+              <a:t>T03B03-S04   ·   Click-to-Reveal</a:t>
             </a:r>
           </a:p>
           <a:p>
@@ -9414,7 +10170,7 @@
                 </a:solidFill>
                 <a:latin typeface="Arial"/>
               </a:rPr>
-              <a:t>Lampiran keadaan · 3 panel/halaman · halaman 2 daripada 14   ·   TECHNICAL_PROOF · DRAFT_FOR_BARIAH_REVIEW · NOT_INSTRUCTIONALLY_APPROVED · NOT_LEARNER_FACING_FINAL</a:t>
+              <a:t>Lampiran keadaan · 3 panel/halaman · halaman 2 daripada 15   ·   TECHNICAL_PROOF · DRAFT_FOR_BARIAH_REVIEW · NOT_INSTRUCTIONALLY_APPROVED · NOT_LEARNER_FACING_FINAL</a:t>
             </a:r>
           </a:p>
         </p:txBody>
@@ -9467,7 +10223,7 @@
                 </a:solidFill>
                 <a:latin typeface="Arial"/>
               </a:rPr>
-              <a:t>T03B03-S05   ·   click-to-reveal</a:t>
+              <a:t>T03B03-S05   ·   Langkah demi langkah</a:t>
             </a:r>
           </a:p>
           <a:p>
@@ -9656,6 +10412,18 @@
                 </a:solidFill>
                 <a:latin typeface="Arial"/>
               </a:rPr>
+              <a:t>· Sistem saliran bawah tanah mesti disambungkan ke saluran keluar yang berfungsi.</a:t>
+            </a:r>
+          </a:p>
+          <a:p>
+            <a:pPr algn="l" lvl="1"/>
+            <a:r>
+              <a:rPr sz="1000" b="0" i="0">
+                <a:solidFill>
+                  <a:srgbClr val="1A1A1A"/>
+                </a:solidFill>
+                <a:latin typeface="Arial"/>
+              </a:rPr>
               <a:t>· Fungsi</a:t>
             </a:r>
           </a:p>
@@ -9710,25 +10478,13 @@
           <a:p>
             <a:pPr algn="l" lvl="1"/>
             <a:r>
-              <a:rPr sz="1000" b="0" i="0">
-                <a:solidFill>
-                  <a:srgbClr val="1A1A1A"/>
-                </a:solidFill>
-                <a:latin typeface="Arial"/>
-              </a:rPr>
-              <a:t>· Sambungan ke Saluran Keluar</a:t>
-            </a:r>
-          </a:p>
-          <a:p>
-            <a:pPr algn="l" lvl="1"/>
-            <a:r>
               <a:rPr sz="900" b="0" i="0">
                 <a:solidFill>
                   <a:srgbClr val="6B6B6B"/>
                 </a:solidFill>
                 <a:latin typeface="Arial"/>
               </a:rPr>
-              <a:t>· … 1 rekod lagi</a:t>
+              <a:t>· … 3 rekod lagi</a:t>
             </a:r>
           </a:p>
           <a:p>
@@ -9800,7 +10556,7 @@
                 </a:solidFill>
                 <a:latin typeface="Arial"/>
               </a:rPr>
-              <a:t>Baris: T03B03-ROW-016, T03B03-ROW-017, (+5)</a:t>
+              <a:t>Baris: T03B03-ROW-016, T03B03-ROW-031, (+7)</a:t>
             </a:r>
           </a:p>
           <a:p>
@@ -9895,7 +10651,7 @@
                 </a:solidFill>
                 <a:latin typeface="Arial"/>
               </a:rPr>
-              <a:t>T03B03-S05-ST-01   ·   Panel pendedahan</a:t>
+              <a:t>T03B03-S05-ST-01   ·   Langkah proses</a:t>
             </a:r>
           </a:p>
           <a:p>
@@ -9907,7 +10663,7 @@
                 </a:solidFill>
                 <a:latin typeface="Arial"/>
               </a:rPr>
-              <a:t>Pencetus: Penggalian Peparit  [T03B03-S05-TRG-01]</a:t>
+              <a:t>Pencetus: langkah 1  [T03B03-S05-TRG-01]</a:t>
             </a:r>
           </a:p>
           <a:p>
@@ -9931,7 +10687,7 @@
                 </a:solidFill>
                 <a:latin typeface="Arial"/>
               </a:rPr>
-              <a:t>· Peparit (trench) digali mengikut jajaran, kedalaman, dan kecerunan yang ditetapkan dalam Pelan Saliran (Drainage Plan). Kecerunan yang betul adalah kritikal untuk memastikan air mengalir.</a:t>
+              <a:t>· Lapik peparit dengan kain geotekstil (geotextile fabric).</a:t>
             </a:r>
           </a:p>
           <a:p>
@@ -9955,7 +10711,7 @@
                 </a:solidFill>
                 <a:latin typeface="Arial"/>
               </a:rPr>
-              <a:t>Menambah 1 rekod yang tersembunyi dalam keadaan asas.</a:t>
+              <a:t>Langkah 1 daripada 6 ditandakan.</a:t>
             </a:r>
           </a:p>
           <a:p>
@@ -9979,7 +10735,7 @@
                 </a:solidFill>
                 <a:latin typeface="Arial"/>
               </a:rPr>
-              <a:t>Panel tertutup apabila ditekan sekali lagi atau apabila panel lain dibuka. Keadaan asas kembali dan sentiasa boleh dicapai. Tiada navigasi berlaku.</a:t>
+              <a:t>Langkah kekal ditandakan. Pelajar meneruskan ke langkah berikutnya atau kembali ke pandangan aliran. Tiada navigasi keluar dari skrin.</a:t>
             </a:r>
           </a:p>
           <a:p>
@@ -10003,7 +10759,7 @@
                 </a:solidFill>
                 <a:latin typeface="Arial"/>
               </a:rPr>
-              <a:t>Baris: T03B03-ROW-021</a:t>
+              <a:t>Baris: T03B03-ROW-024</a:t>
             </a:r>
           </a:p>
           <a:p>
@@ -10098,7 +10854,7 @@
                 </a:solidFill>
                 <a:latin typeface="Arial"/>
               </a:rPr>
-              <a:t>T03B03-S05-ST-02   ·   Panel pendedahan</a:t>
+              <a:t>T03B03-S05-ST-02   ·   Langkah proses</a:t>
             </a:r>
           </a:p>
           <a:p>
@@ -10110,7 +10866,7 @@
                 </a:solidFill>
                 <a:latin typeface="Arial"/>
               </a:rPr>
-              <a:t>Pencetus: Pemasangan Sistematik  [T03B03-S05-TRG-02]</a:t>
+              <a:t>Pencetus: langkah 2  [T03B03-S05-TRG-02]</a:t>
             </a:r>
           </a:p>
           <a:p>
@@ -10134,82 +10890,10 @@
                 </a:solidFill>
                 <a:latin typeface="Arial"/>
               </a:rPr>
-              <a:t>· Proses pemasangan yang betul adalah kunci kejayaan sistem ini:</a:t>
-            </a:r>
-          </a:p>
-          <a:p>
-            <a:pPr algn="l" lvl="1"/>
-            <a:r>
-              <a:rPr sz="1000" b="0" i="0">
-                <a:solidFill>
-                  <a:srgbClr val="1A1A1A"/>
-                </a:solidFill>
-                <a:latin typeface="Arial"/>
-              </a:rPr>
-              <a:t>· Lapik peparit dengan kain geotekstil (geotextile fabric).</a:t>
-            </a:r>
-          </a:p>
-          <a:p>
-            <a:pPr algn="l" lvl="1"/>
-            <a:r>
-              <a:rPr sz="1000" b="0" i="0">
-                <a:solidFill>
-                  <a:srgbClr val="1A1A1A"/>
-                </a:solidFill>
-                <a:latin typeface="Arial"/>
-              </a:rPr>
               <a:t>· Letakkan lapisan batu kelikir penapis (filter aggregate).</a:t>
             </a:r>
           </a:p>
           <a:p>
-            <a:pPr algn="l" lvl="1"/>
-            <a:r>
-              <a:rPr sz="1000" b="0" i="0">
-                <a:solidFill>
-                  <a:srgbClr val="1A1A1A"/>
-                </a:solidFill>
-                <a:latin typeface="Arial"/>
-              </a:rPr>
-              <a:t>· Pasang paip berlubang (perforated pipe) dengan lubangnya menghadap ke bawah.</a:t>
-            </a:r>
-          </a:p>
-          <a:p>
-            <a:pPr algn="l" lvl="1"/>
-            <a:r>
-              <a:rPr sz="1000" b="0" i="0">
-                <a:solidFill>
-                  <a:srgbClr val="1A1A1A"/>
-                </a:solidFill>
-                <a:latin typeface="Arial"/>
-              </a:rPr>
-              <a:t>· Timbus sekeliling paip dengan batu kelikir.</a:t>
-            </a:r>
-          </a:p>
-          <a:p>
-            <a:pPr algn="l" lvl="1"/>
-            <a:r>
-              <a:rPr sz="1000" b="0" i="0">
-                <a:solidFill>
-                  <a:srgbClr val="1A1A1A"/>
-                </a:solidFill>
-                <a:latin typeface="Arial"/>
-              </a:rPr>
-              <a:t>· Lipat lebihan geotekstil untuk menutup lapisan batu kelikir.</a:t>
-            </a:r>
-          </a:p>
-          <a:p>
-            <a:pPr algn="l" lvl="1"/>
-            <a:r>
-              <a:rPr sz="1000" b="0" i="0">
-                <a:solidFill>
-                  <a:srgbClr val="1A1A1A"/>
-                </a:solidFill>
-                <a:latin typeface="Arial"/>
-              </a:rPr>
-              <a:t>· Timbus lapisan atas dengan pasir kasar dan tanah atas.</a:t>
-            </a:r>
-          </a:p>
-          <a:p>
             <a:pPr algn="l"/>
             <a:r>
               <a:rPr sz="1000" b="1" i="0">
@@ -10230,7 +10914,7 @@
                 </a:solidFill>
                 <a:latin typeface="Arial"/>
               </a:rPr>
-              <a:t>Menambah 7 rekod yang tersembunyi dalam keadaan asas.</a:t>
+              <a:t>Langkah 2 daripada 6 ditandakan.</a:t>
             </a:r>
           </a:p>
           <a:p>
@@ -10254,7 +10938,7 @@
                 </a:solidFill>
                 <a:latin typeface="Arial"/>
               </a:rPr>
-              <a:t>Panel tertutup apabila ditekan sekali lagi atau apabila panel lain dibuka. Keadaan asas kembali dan sentiasa boleh dicapai. Tiada navigasi berlaku.</a:t>
+              <a:t>Langkah kekal ditandakan. Pelajar meneruskan ke langkah berikutnya atau kembali ke pandangan aliran. Tiada navigasi keluar dari skrin.</a:t>
             </a:r>
           </a:p>
           <a:p>
@@ -10278,7 +10962,7 @@
                 </a:solidFill>
                 <a:latin typeface="Arial"/>
               </a:rPr>
-              <a:t>Baris: T03B03-ROW-023, T03B03-ROW-024, (+5)</a:t>
+              <a:t>Baris: T03B03-ROW-025</a:t>
             </a:r>
           </a:p>
           <a:p>
@@ -10325,7 +11009,7 @@
                 </a:solidFill>
                 <a:latin typeface="Arial"/>
               </a:rPr>
-              <a:t>Lampiran keadaan · 3 panel/halaman · halaman 3 daripada 14   ·   TECHNICAL_PROOF · DRAFT_FOR_BARIAH_REVIEW · NOT_INSTRUCTIONALLY_APPROVED · NOT_LEARNER_FACING_FINAL</a:t>
+              <a:t>Lampiran keadaan · 3 panel/halaman · halaman 3 daripada 15   ·   TECHNICAL_PROOF · DRAFT_FOR_BARIAH_REVIEW · NOT_INSTRUCTIONALLY_APPROVED · NOT_LEARNER_FACING_FINAL</a:t>
             </a:r>
           </a:p>
         </p:txBody>
@@ -10378,7 +11062,7 @@
                 </a:solidFill>
                 <a:latin typeface="Arial"/>
               </a:rPr>
-              <a:t>T03B03-S05   ·   click-to-reveal</a:t>
+              <a:t>T03B03-S05   ·   Langkah demi langkah</a:t>
             </a:r>
           </a:p>
           <a:p>
@@ -10519,7 +11203,7 @@
                 </a:solidFill>
                 <a:latin typeface="Arial"/>
               </a:rPr>
-              <a:t>T03B03-S05-ST-03   ·   Panel pendedahan</a:t>
+              <a:t>T03B03-S05-ST-03   ·   Langkah proses</a:t>
             </a:r>
           </a:p>
           <a:p>
@@ -10531,7 +11215,7 @@
                 </a:solidFill>
                 <a:latin typeface="Arial"/>
               </a:rPr>
-              <a:t>Pencetus: Sambungan ke Saluran Keluar  [T03B03-S05-TRG-03]</a:t>
+              <a:t>Pencetus: langkah 3  [T03B03-S05-TRG-03]</a:t>
             </a:r>
           </a:p>
           <a:p>
@@ -10555,7 +11239,7 @@
                 </a:solidFill>
                 <a:latin typeface="Arial"/>
               </a:rPr>
-              <a:t>· Pastikan sistem saliran bawah tanah ini disambungkan ke saluran keluar yang berfungsi seperti parit utama atau sump.</a:t>
+              <a:t>· Pasang paip berlubang (perforated pipe) dengan lubangnya menghadap ke bawah.</a:t>
             </a:r>
           </a:p>
           <a:p>
@@ -10579,7 +11263,7 @@
                 </a:solidFill>
                 <a:latin typeface="Arial"/>
               </a:rPr>
-              <a:t>Menambah 1 rekod yang tersembunyi dalam keadaan asas.</a:t>
+              <a:t>Langkah 3 daripada 6 ditandakan.</a:t>
             </a:r>
           </a:p>
           <a:p>
@@ -10603,7 +11287,7 @@
                 </a:solidFill>
                 <a:latin typeface="Arial"/>
               </a:rPr>
-              <a:t>Panel tertutup apabila ditekan sekali lagi atau apabila panel lain dibuka. Keadaan asas kembali dan sentiasa boleh dicapai. Tiada navigasi berlaku.</a:t>
+              <a:t>Langkah kekal ditandakan. Pelajar meneruskan ke langkah berikutnya atau kembali ke pandangan aliran. Tiada navigasi keluar dari skrin.</a:t>
             </a:r>
           </a:p>
           <a:p>
@@ -10627,7 +11311,7 @@
                 </a:solidFill>
                 <a:latin typeface="Arial"/>
               </a:rPr>
-              <a:t>Baris: T03B03-ROW-031</a:t>
+              <a:t>Baris: T03B03-ROW-026</a:t>
             </a:r>
           </a:p>
           <a:p>
@@ -10722,7 +11406,7 @@
                 </a:solidFill>
                 <a:latin typeface="Arial"/>
               </a:rPr>
-              <a:t>T03B03-S05-ST-ALL_VIEWED   ·   Penanda selesai</a:t>
+              <a:t>T03B03-S05-ST-04   ·   Langkah proses</a:t>
             </a:r>
           </a:p>
           <a:p>
@@ -10734,7 +11418,7 @@
                 </a:solidFill>
                 <a:latin typeface="Arial"/>
               </a:rPr>
-              <a:t>Pencetus: semua 3 panel dilihat  [T03B03-S05-TRG-ALL]</a:t>
+              <a:t>Pencetus: langkah 4  [T03B03-S05-TRG-04]</a:t>
             </a:r>
           </a:p>
           <a:p>
@@ -10752,13 +11436,13 @@
           <a:p>
             <a:pPr algn="l" lvl="1"/>
             <a:r>
-              <a:rPr sz="1000" b="0" i="1">
-                <a:solidFill>
-                  <a:srgbClr val="6B6B6B"/>
-                </a:solidFill>
-                <a:latin typeface="Arial"/>
-              </a:rPr>
-              <a:t>Tiada kandungan dipaparkan — penanda sahaja.</a:t>
+              <a:rPr sz="1000" b="0" i="0">
+                <a:solidFill>
+                  <a:srgbClr val="1A1A1A"/>
+                </a:solidFill>
+                <a:latin typeface="Arial"/>
+              </a:rPr>
+              <a:t>· Timbus sekeliling paip dengan batu kelikir.</a:t>
             </a:r>
           </a:p>
           <a:p>
@@ -10782,7 +11466,7 @@
                 </a:solidFill>
                 <a:latin typeface="Arial"/>
               </a:rPr>
-              <a:t>Tidak dipaparkan; membuka SETERUSNYA.</a:t>
+              <a:t>Langkah 4 daripada 6 ditandakan.</a:t>
             </a:r>
           </a:p>
           <a:p>
@@ -10806,7 +11490,7 @@
                 </a:solidFill>
                 <a:latin typeface="Arial"/>
               </a:rPr>
-              <a:t>Bukan keadaan yang dipaparkan. Penanda yang menjadi benar setelah semua pendedahan dilihat, dan inilah yang membuka SETERUSNYA.</a:t>
+              <a:t>Langkah kekal ditandakan. Pelajar meneruskan ke langkah berikutnya atau kembali ke pandangan aliran. Tiada navigasi keluar dari skrin.</a:t>
             </a:r>
           </a:p>
           <a:p>
@@ -10830,7 +11514,7 @@
                 </a:solidFill>
                 <a:latin typeface="Arial"/>
               </a:rPr>
-              <a:t>Tiada baris modul — keadaan struktur</a:t>
+              <a:t>Baris: T03B03-ROW-027</a:t>
             </a:r>
           </a:p>
           <a:p>
@@ -10849,14 +11533,62 @@
       </p:sp>
       <p:sp>
         <p:nvSpPr>
-          <p:cNvPr id="8" name="TextBox 7"/>
+          <p:cNvPr id="8" name="Rectangle 7"/>
+          <p:cNvSpPr/>
+          <p:nvPr/>
+        </p:nvSpPr>
+        <p:spPr>
+          <a:xfrm>
+            <a:off x="8108932" y="1280000"/>
+            <a:ext cx="3625866" cy="4700000"/>
+          </a:xfrm>
+          <a:prstGeom prst="rect">
+            <a:avLst/>
+          </a:prstGeom>
+          <a:solidFill>
+            <a:srgbClr val="F7F7F7"/>
+          </a:solidFill>
+          <a:ln>
+            <a:solidFill>
+              <a:srgbClr val="D8D8D8"/>
+            </a:solidFill>
+          </a:ln>
+          <a:effectLst/>
+        </p:spPr>
+        <p:style>
+          <a:lnRef idx="1">
+            <a:schemeClr val="accent1"/>
+          </a:lnRef>
+          <a:fillRef idx="3">
+            <a:schemeClr val="accent1"/>
+          </a:fillRef>
+          <a:effectRef idx="0">
+            <a:schemeClr val="accent1"/>
+          </a:effectRef>
+          <a:fontRef idx="minor">
+            <a:schemeClr val="lt1"/>
+          </a:fontRef>
+        </p:style>
+        <p:txBody>
+          <a:bodyPr rtlCol="0" anchor="ctr">
+            <a:noAutofit/>
+          </a:bodyPr>
+          <a:lstStyle/>
+          <a:p>
+            <a:pPr algn="ctr"/>
+          </a:p>
+        </p:txBody>
+      </p:sp>
+      <p:sp>
+        <p:nvSpPr>
+          <p:cNvPr id="9" name="TextBox 8"/>
           <p:cNvSpPr txBox="1"/>
           <p:nvPr/>
         </p:nvSpPr>
         <p:spPr>
           <a:xfrm>
-            <a:off x="457200" y="6150000"/>
-            <a:ext cx="11277600" cy="400000"/>
+            <a:off x="8288932" y="1460000"/>
+            <a:ext cx="3265866" cy="4340000"/>
           </a:xfrm>
           <a:prstGeom prst="rect">
             <a:avLst/>
@@ -10871,13 +11603,168 @@
           <a:p>
             <a:pPr algn="l"/>
             <a:r>
+              <a:rPr sz="1100" b="1" i="0">
+                <a:solidFill>
+                  <a:srgbClr val="6B6B6B"/>
+                </a:solidFill>
+                <a:latin typeface="Arial"/>
+              </a:rPr>
+              <a:t>T03B03-S05-ST-05   ·   Langkah proses</a:t>
+            </a:r>
+          </a:p>
+          <a:p>
+            <a:pPr algn="l"/>
+            <a:r>
+              <a:rPr sz="1200" b="1" i="0">
+                <a:solidFill>
+                  <a:srgbClr val="37474F"/>
+                </a:solidFill>
+                <a:latin typeface="Arial"/>
+              </a:rPr>
+              <a:t>Pencetus: langkah 5  [T03B03-S05-TRG-05]</a:t>
+            </a:r>
+          </a:p>
+          <a:p>
+            <a:pPr algn="l"/>
+            <a:r>
+              <a:rPr sz="1000" b="1" i="0">
+                <a:solidFill>
+                  <a:srgbClr val="6B6B6B"/>
+                </a:solidFill>
+                <a:latin typeface="Arial"/>
+              </a:rPr>
+              <a:t>Apa yang dipaparkan</a:t>
+            </a:r>
+          </a:p>
+          <a:p>
+            <a:pPr algn="l" lvl="1"/>
+            <a:r>
+              <a:rPr sz="1000" b="0" i="0">
+                <a:solidFill>
+                  <a:srgbClr val="1A1A1A"/>
+                </a:solidFill>
+                <a:latin typeface="Arial"/>
+              </a:rPr>
+              <a:t>· Lipat lebihan geotekstil untuk menutup lapisan batu kelikir.</a:t>
+            </a:r>
+          </a:p>
+          <a:p>
+            <a:pPr algn="l"/>
+            <a:r>
+              <a:rPr sz="1000" b="1" i="0">
+                <a:solidFill>
+                  <a:srgbClr val="6B6B6B"/>
+                </a:solidFill>
+                <a:latin typeface="Arial"/>
+              </a:rPr>
+              <a:t>Beza daripada keadaan asas</a:t>
+            </a:r>
+          </a:p>
+          <a:p>
+            <a:pPr algn="l" lvl="1"/>
+            <a:r>
+              <a:rPr sz="1000" b="0" i="0">
+                <a:solidFill>
+                  <a:srgbClr val="1A1A1A"/>
+                </a:solidFill>
+                <a:latin typeface="Arial"/>
+              </a:rPr>
+              <a:t>Langkah 5 daripada 6 ditandakan.</a:t>
+            </a:r>
+          </a:p>
+          <a:p>
+            <a:pPr algn="l"/>
+            <a:r>
+              <a:rPr sz="1000" b="1" i="0">
+                <a:solidFill>
+                  <a:srgbClr val="6B6B6B"/>
+                </a:solidFill>
+                <a:latin typeface="Arial"/>
+              </a:rPr>
+              <a:t>Cara pelajar kembali / meneruskan</a:t>
+            </a:r>
+          </a:p>
+          <a:p>
+            <a:pPr algn="l" lvl="1"/>
+            <a:r>
+              <a:rPr sz="1000" b="0" i="0">
+                <a:solidFill>
+                  <a:srgbClr val="1A1A1A"/>
+                </a:solidFill>
+                <a:latin typeface="Arial"/>
+              </a:rPr>
+              <a:t>Langkah kekal ditandakan. Pelajar meneruskan ke langkah berikutnya atau kembali ke pandangan aliran. Tiada navigasi keluar dari skrin.</a:t>
+            </a:r>
+          </a:p>
+          <a:p>
+            <a:pPr algn="l"/>
+            <a:r>
+              <a:rPr sz="1000" b="1" i="0">
+                <a:solidFill>
+                  <a:srgbClr val="6B6B6B"/>
+                </a:solidFill>
+                <a:latin typeface="Arial"/>
+              </a:rPr>
+              <a:t>Sumber dan kuasa</a:t>
+            </a:r>
+          </a:p>
+          <a:p>
+            <a:pPr algn="l" lvl="1"/>
+            <a:r>
               <a:rPr sz="900" b="0" i="0">
                 <a:solidFill>
-                  <a:srgbClr val="6B6B6B"/>
-                </a:solidFill>
-                <a:latin typeface="Arial"/>
-              </a:rPr>
-              <a:t>Lampiran keadaan · 3 panel/halaman · halaman 4 daripada 14   ·   TECHNICAL_PROOF · DRAFT_FOR_BARIAH_REVIEW · NOT_INSTRUCTIONALLY_APPROVED · NOT_LEARNER_FACING_FINAL</a:t>
+                  <a:srgbClr val="0D47A1"/>
+                </a:solidFill>
+                <a:latin typeface="Arial"/>
+              </a:rPr>
+              <a:t>Baris: T03B03-ROW-028</a:t>
+            </a:r>
+          </a:p>
+          <a:p>
+            <a:pPr algn="l" lvl="1"/>
+            <a:r>
+              <a:rPr sz="900" b="0" i="0">
+                <a:solidFill>
+                  <a:srgbClr val="6B6B6B"/>
+                </a:solidFill>
+                <a:latin typeface="Arial"/>
+              </a:rPr>
+              <a:t>Keputusan: A1, A2</a:t>
+            </a:r>
+          </a:p>
+        </p:txBody>
+      </p:sp>
+      <p:sp>
+        <p:nvSpPr>
+          <p:cNvPr id="10" name="TextBox 9"/>
+          <p:cNvSpPr txBox="1"/>
+          <p:nvPr/>
+        </p:nvSpPr>
+        <p:spPr>
+          <a:xfrm>
+            <a:off x="457200" y="6150000"/>
+            <a:ext cx="11277600" cy="400000"/>
+          </a:xfrm>
+          <a:prstGeom prst="rect">
+            <a:avLst/>
+          </a:prstGeom>
+          <a:noFill/>
+        </p:spPr>
+        <p:txBody>
+          <a:bodyPr wrap="square" lIns="0" rIns="0" tIns="0" bIns="0">
+            <a:noAutofit/>
+          </a:bodyPr>
+          <a:lstStyle/>
+          <a:p>
+            <a:pPr algn="l"/>
+            <a:r>
+              <a:rPr sz="900" b="0" i="0">
+                <a:solidFill>
+                  <a:srgbClr val="6B6B6B"/>
+                </a:solidFill>
+                <a:latin typeface="Arial"/>
+              </a:rPr>
+              <a:t>Lampiran keadaan · 3 panel/halaman · halaman 4 daripada 15   ·   TECHNICAL_PROOF · DRAFT_FOR_BARIAH_REVIEW · NOT_INSTRUCTIONALLY_APPROVED · NOT_LEARNER_FACING_FINAL</a:t>
             </a:r>
           </a:p>
         </p:txBody>
@@ -10930,7 +11817,7 @@
                 </a:solidFill>
                 <a:latin typeface="Arial"/>
               </a:rPr>
-              <a:t>T03B03-S06   ·   click-to-reveal</a:t>
+              <a:t>T03B03-S05   ·   Langkah demi langkah</a:t>
             </a:r>
           </a:p>
           <a:p>
@@ -10942,7 +11829,7 @@
                 </a:solidFill>
                 <a:latin typeface="Arial"/>
               </a:rPr>
-              <a:t>Dinding Penahan (Retaining Wall)</a:t>
+              <a:t>Sub soil drainage</a:t>
             </a:r>
           </a:p>
         </p:txBody>
@@ -11071,7 +11958,7 @@
                 </a:solidFill>
                 <a:latin typeface="Arial"/>
               </a:rPr>
-              <a:t>T03B03-S06-ST-BASE   ·   Keadaan asas</a:t>
+              <a:t>T03B03-S05-ST-06   ·   Langkah proses</a:t>
             </a:r>
           </a:p>
           <a:p>
@@ -11079,11 +11966,11 @@
             <a:r>
               <a:rPr sz="1200" b="1" i="0">
                 <a:solidFill>
-                  <a:srgbClr val="1B5E20"/>
-                </a:solidFill>
-                <a:latin typeface="Arial"/>
-              </a:rPr>
-              <a:t>Pencetus: screen entry</a:t>
+                  <a:srgbClr val="37474F"/>
+                </a:solidFill>
+                <a:latin typeface="Arial"/>
+              </a:rPr>
+              <a:t>Pencetus: langkah 6  [T03B03-S05-TRG-06]</a:t>
             </a:r>
           </a:p>
           <a:p>
@@ -11107,79 +11994,67 @@
                 </a:solidFill>
                 <a:latin typeface="Arial"/>
               </a:rPr>
-              <a:t>· Dinding Penahan (Retaining Wall)</a:t>
-            </a:r>
-          </a:p>
-          <a:p>
-            <a:pPr algn="l" lvl="1"/>
-            <a:r>
-              <a:rPr sz="1000" b="0" i="0">
-                <a:solidFill>
-                  <a:srgbClr val="1A1A1A"/>
-                </a:solidFill>
-                <a:latin typeface="Arial"/>
-              </a:rPr>
-              <a:t>· Fungsi</a:t>
-            </a:r>
-          </a:p>
-          <a:p>
-            <a:pPr algn="l" lvl="1"/>
-            <a:r>
-              <a:rPr sz="1000" b="0" i="0">
-                <a:solidFill>
-                  <a:srgbClr val="1A1A1A"/>
-                </a:solidFill>
-                <a:latin typeface="Arial"/>
-              </a:rPr>
-              <a:t>· Membentuk kawasan rata di lereng bukit, menstabilkan cerun, dan menetapkan sempadan aras.</a:t>
-            </a:r>
-          </a:p>
-          <a:p>
-            <a:pPr algn="l" lvl="1"/>
-            <a:r>
-              <a:rPr sz="1000" b="0" i="0">
-                <a:solidFill>
-                  <a:srgbClr val="1A1A1A"/>
-                </a:solidFill>
-                <a:latin typeface="Arial"/>
-              </a:rPr>
-              <a:t>· Fokus Utama Kontraktor</a:t>
-            </a:r>
-          </a:p>
-          <a:p>
-            <a:pPr algn="l" lvl="1"/>
-            <a:r>
-              <a:rPr sz="1000" b="0" i="0">
-                <a:solidFill>
-                  <a:srgbClr val="1A1A1A"/>
-                </a:solidFill>
-                <a:latin typeface="Arial"/>
-              </a:rPr>
-              <a:t>· Lukisan Jurutera</a:t>
-            </a:r>
-          </a:p>
-          <a:p>
-            <a:pPr algn="l" lvl="1"/>
-            <a:r>
-              <a:rPr sz="1000" b="0" i="0">
-                <a:solidFill>
-                  <a:srgbClr val="1A1A1A"/>
-                </a:solidFill>
-                <a:latin typeface="Arial"/>
-              </a:rPr>
-              <a:t>· Pembinaan Tapak Asas (Foundation)</a:t>
-            </a:r>
-          </a:p>
-          <a:p>
-            <a:pPr algn="l" lvl="1"/>
-            <a:r>
-              <a:rPr sz="1000" b="0" i="0">
-                <a:solidFill>
-                  <a:srgbClr val="1A1A1A"/>
-                </a:solidFill>
-                <a:latin typeface="Arial"/>
-              </a:rPr>
-              <a:t>· Sistem Perparitan di Belakang Dinding</a:t>
+              <a:t>· Timbus lapisan atas dengan pasir kasar dan tanah atas.</a:t>
+            </a:r>
+          </a:p>
+          <a:p>
+            <a:pPr algn="l"/>
+            <a:r>
+              <a:rPr sz="1000" b="1" i="0">
+                <a:solidFill>
+                  <a:srgbClr val="6B6B6B"/>
+                </a:solidFill>
+                <a:latin typeface="Arial"/>
+              </a:rPr>
+              <a:t>Beza daripada keadaan asas</a:t>
+            </a:r>
+          </a:p>
+          <a:p>
+            <a:pPr algn="l" lvl="1"/>
+            <a:r>
+              <a:rPr sz="1000" b="0" i="0">
+                <a:solidFill>
+                  <a:srgbClr val="1A1A1A"/>
+                </a:solidFill>
+                <a:latin typeface="Arial"/>
+              </a:rPr>
+              <a:t>Langkah 6 daripada 6 ditandakan.</a:t>
+            </a:r>
+          </a:p>
+          <a:p>
+            <a:pPr algn="l"/>
+            <a:r>
+              <a:rPr sz="1000" b="1" i="0">
+                <a:solidFill>
+                  <a:srgbClr val="6B6B6B"/>
+                </a:solidFill>
+                <a:latin typeface="Arial"/>
+              </a:rPr>
+              <a:t>Cara pelajar kembali / meneruskan</a:t>
+            </a:r>
+          </a:p>
+          <a:p>
+            <a:pPr algn="l" lvl="1"/>
+            <a:r>
+              <a:rPr sz="1000" b="0" i="0">
+                <a:solidFill>
+                  <a:srgbClr val="1A1A1A"/>
+                </a:solidFill>
+                <a:latin typeface="Arial"/>
+              </a:rPr>
+              <a:t>Langkah kekal ditandakan. Pelajar meneruskan ke langkah berikutnya atau kembali ke pandangan aliran. Tiada navigasi keluar dari skrin.</a:t>
+            </a:r>
+          </a:p>
+          <a:p>
+            <a:pPr algn="l"/>
+            <a:r>
+              <a:rPr sz="1000" b="1" i="0">
+                <a:solidFill>
+                  <a:srgbClr val="6B6B6B"/>
+                </a:solidFill>
+                <a:latin typeface="Arial"/>
+              </a:rPr>
+              <a:t>Sumber dan kuasa</a:t>
             </a:r>
           </a:p>
           <a:p>
@@ -11187,83 +12062,11 @@
             <a:r>
               <a:rPr sz="900" b="0" i="0">
                 <a:solidFill>
-                  <a:srgbClr val="6B6B6B"/>
-                </a:solidFill>
-                <a:latin typeface="Arial"/>
-              </a:rPr>
-              <a:t>· … 1 rekod lagi</a:t>
-            </a:r>
-          </a:p>
-          <a:p>
-            <a:pPr algn="l"/>
-            <a:r>
-              <a:rPr sz="1000" b="1" i="0">
-                <a:solidFill>
-                  <a:srgbClr val="6B6B6B"/>
-                </a:solidFill>
-                <a:latin typeface="Arial"/>
-              </a:rPr>
-              <a:t>Beza daripada keadaan asas</a:t>
-            </a:r>
-          </a:p>
-          <a:p>
-            <a:pPr algn="l" lvl="1"/>
-            <a:r>
-              <a:rPr sz="1000" b="0" i="0">
-                <a:solidFill>
-                  <a:srgbClr val="1A1A1A"/>
-                </a:solidFill>
-                <a:latin typeface="Arial"/>
-              </a:rPr>
-              <a:t>— ini keadaan asas —</a:t>
-            </a:r>
-          </a:p>
-          <a:p>
-            <a:pPr algn="l"/>
-            <a:r>
-              <a:rPr sz="1000" b="1" i="0">
-                <a:solidFill>
-                  <a:srgbClr val="6B6B6B"/>
-                </a:solidFill>
-                <a:latin typeface="Arial"/>
-              </a:rPr>
-              <a:t>Cara pelajar kembali / meneruskan</a:t>
-            </a:r>
-          </a:p>
-          <a:p>
-            <a:pPr algn="l" lvl="1"/>
-            <a:r>
-              <a:rPr sz="1000" b="0" i="0">
-                <a:solidFill>
-                  <a:srgbClr val="1A1A1A"/>
-                </a:solidFill>
-                <a:latin typeface="Arial"/>
-              </a:rPr>
-              <a:t>Keadaan masuk. Pelajar meneruskan dengan SETERUSNYA setelah syarat selesai dipenuhi.</a:t>
-            </a:r>
-          </a:p>
-          <a:p>
-            <a:pPr algn="l"/>
-            <a:r>
-              <a:rPr sz="1000" b="1" i="0">
-                <a:solidFill>
-                  <a:srgbClr val="6B6B6B"/>
-                </a:solidFill>
-                <a:latin typeface="Arial"/>
-              </a:rPr>
-              <a:t>Sumber dan kuasa</a:t>
-            </a:r>
-          </a:p>
-          <a:p>
-            <a:pPr algn="l" lvl="1"/>
-            <a:r>
-              <a:rPr sz="900" b="0" i="0">
-                <a:solidFill>
                   <a:srgbClr val="0D47A1"/>
                 </a:solidFill>
                 <a:latin typeface="Arial"/>
               </a:rPr>
-              <a:t>Baris: T03B03-ROW-032, T03B03-ROW-033, (+5)</a:t>
+              <a:t>Baris: T03B03-ROW-029</a:t>
             </a:r>
           </a:p>
           <a:p>
@@ -11358,7 +12161,7 @@
                 </a:solidFill>
                 <a:latin typeface="Arial"/>
               </a:rPr>
-              <a:t>T03B03-S06-ST-01   ·   Panel pendedahan</a:t>
+              <a:t>T03B03-S05-ST-ALL_VIEWED   ·   Penanda selesai</a:t>
             </a:r>
           </a:p>
           <a:p>
@@ -11370,7 +12173,7 @@
                 </a:solidFill>
                 <a:latin typeface="Arial"/>
               </a:rPr>
-              <a:t>Pencetus: Lukisan Jurutera  [T03B03-S06-TRG-01]</a:t>
+              <a:t>Pencetus: semua 6 langkah dilihat  [T03B03-S05-TRG-ALL]</a:t>
             </a:r>
           </a:p>
           <a:p>
@@ -11388,13 +12191,13 @@
           <a:p>
             <a:pPr algn="l" lvl="1"/>
             <a:r>
-              <a:rPr sz="1000" b="0" i="0">
-                <a:solidFill>
-                  <a:srgbClr val="1A1A1A"/>
-                </a:solidFill>
-                <a:latin typeface="Arial"/>
-              </a:rPr>
-              <a:t>· Dinding penahan mesti dibina dengan mematuhi sepenuhnya Lukisan Struktur Jurutera Bertauliah (Ir.). Sebarang perubahan memerlukan kelulusan jurutera.</a:t>
+              <a:rPr sz="1000" b="0" i="1">
+                <a:solidFill>
+                  <a:srgbClr val="6B6B6B"/>
+                </a:solidFill>
+                <a:latin typeface="Arial"/>
+              </a:rPr>
+              <a:t>Tiada kandungan dipaparkan — penanda sahaja.</a:t>
             </a:r>
           </a:p>
           <a:p>
@@ -11418,7 +12221,7 @@
                 </a:solidFill>
                 <a:latin typeface="Arial"/>
               </a:rPr>
-              <a:t>Menambah 1 rekod yang tersembunyi dalam keadaan asas.</a:t>
+              <a:t>Tidak dipaparkan; membuka SETERUSNYA.</a:t>
             </a:r>
           </a:p>
           <a:p>
@@ -11442,7 +12245,7 @@
                 </a:solidFill>
                 <a:latin typeface="Arial"/>
               </a:rPr>
-              <a:t>Panel tertutup apabila ditekan sekali lagi atau apabila panel lain dibuka. Keadaan asas kembali dan sentiasa boleh dicapai. Tiada navigasi berlaku.</a:t>
+              <a:t>Bukan keadaan yang dipaparkan. Penanda yang menjadi benar setelah semua pendedahan dilihat, dan inilah yang membuka SETERUSNYA.</a:t>
             </a:r>
           </a:p>
           <a:p>
@@ -11466,7 +12269,7 @@
                 </a:solidFill>
                 <a:latin typeface="Arial"/>
               </a:rPr>
-              <a:t>Baris: T03B03-ROW-037</a:t>
+              <a:t>Tiada baris modul — keadaan struktur</a:t>
             </a:r>
           </a:p>
           <a:p>
@@ -11485,62 +12288,14 @@
       </p:sp>
       <p:sp>
         <p:nvSpPr>
-          <p:cNvPr id="8" name="Rectangle 7"/>
-          <p:cNvSpPr/>
-          <p:nvPr/>
-        </p:nvSpPr>
-        <p:spPr>
-          <a:xfrm>
-            <a:off x="8108932" y="1280000"/>
-            <a:ext cx="3625866" cy="4700000"/>
-          </a:xfrm>
-          <a:prstGeom prst="rect">
-            <a:avLst/>
-          </a:prstGeom>
-          <a:solidFill>
-            <a:srgbClr val="F7F7F7"/>
-          </a:solidFill>
-          <a:ln>
-            <a:solidFill>
-              <a:srgbClr val="D8D8D8"/>
-            </a:solidFill>
-          </a:ln>
-          <a:effectLst/>
-        </p:spPr>
-        <p:style>
-          <a:lnRef idx="1">
-            <a:schemeClr val="accent1"/>
-          </a:lnRef>
-          <a:fillRef idx="3">
-            <a:schemeClr val="accent1"/>
-          </a:fillRef>
-          <a:effectRef idx="0">
-            <a:schemeClr val="accent1"/>
-          </a:effectRef>
-          <a:fontRef idx="minor">
-            <a:schemeClr val="lt1"/>
-          </a:fontRef>
-        </p:style>
-        <p:txBody>
-          <a:bodyPr rtlCol="0" anchor="ctr">
-            <a:noAutofit/>
-          </a:bodyPr>
-          <a:lstStyle/>
-          <a:p>
-            <a:pPr algn="ctr"/>
-          </a:p>
-        </p:txBody>
-      </p:sp>
-      <p:sp>
-        <p:nvSpPr>
-          <p:cNvPr id="9" name="TextBox 8"/>
+          <p:cNvPr id="8" name="TextBox 7"/>
           <p:cNvSpPr txBox="1"/>
           <p:nvPr/>
         </p:nvSpPr>
         <p:spPr>
           <a:xfrm>
-            <a:off x="8288932" y="1460000"/>
-            <a:ext cx="3265866" cy="4340000"/>
+            <a:off x="457200" y="6150000"/>
+            <a:ext cx="11277600" cy="400000"/>
           </a:xfrm>
           <a:prstGeom prst="rect">
             <a:avLst/>
@@ -11555,168 +12310,13 @@
           <a:p>
             <a:pPr algn="l"/>
             <a:r>
-              <a:rPr sz="1100" b="1" i="0">
-                <a:solidFill>
-                  <a:srgbClr val="6B6B6B"/>
-                </a:solidFill>
-                <a:latin typeface="Arial"/>
-              </a:rPr>
-              <a:t>T03B03-S06-ST-02   ·   Panel pendedahan</a:t>
-            </a:r>
-          </a:p>
-          <a:p>
-            <a:pPr algn="l"/>
-            <a:r>
-              <a:rPr sz="1200" b="1" i="0">
-                <a:solidFill>
-                  <a:srgbClr val="37474F"/>
-                </a:solidFill>
-                <a:latin typeface="Arial"/>
-              </a:rPr>
-              <a:t>Pencetus: Pembinaan Tapak Asas (Foundation)  [T03B03-S06-TRG-02]</a:t>
-            </a:r>
-          </a:p>
-          <a:p>
-            <a:pPr algn="l"/>
-            <a:r>
-              <a:rPr sz="1000" b="1" i="0">
-                <a:solidFill>
-                  <a:srgbClr val="6B6B6B"/>
-                </a:solidFill>
-                <a:latin typeface="Arial"/>
-              </a:rPr>
-              <a:t>Apa yang dipaparkan</a:t>
-            </a:r>
-          </a:p>
-          <a:p>
-            <a:pPr algn="l" lvl="1"/>
-            <a:r>
-              <a:rPr sz="1000" b="0" i="0">
-                <a:solidFill>
-                  <a:srgbClr val="1A1A1A"/>
-                </a:solidFill>
-                <a:latin typeface="Arial"/>
-              </a:rPr>
-              <a:t>· Tapak asas adalah komponen paling kritikal. Ia mesti dibina di atas tanah yang stabil pada kedalaman dan saiz yang betul.</a:t>
-            </a:r>
-          </a:p>
-          <a:p>
-            <a:pPr algn="l"/>
-            <a:r>
-              <a:rPr sz="1000" b="1" i="0">
-                <a:solidFill>
-                  <a:srgbClr val="6B6B6B"/>
-                </a:solidFill>
-                <a:latin typeface="Arial"/>
-              </a:rPr>
-              <a:t>Beza daripada keadaan asas</a:t>
-            </a:r>
-          </a:p>
-          <a:p>
-            <a:pPr algn="l" lvl="1"/>
-            <a:r>
-              <a:rPr sz="1000" b="0" i="0">
-                <a:solidFill>
-                  <a:srgbClr val="1A1A1A"/>
-                </a:solidFill>
-                <a:latin typeface="Arial"/>
-              </a:rPr>
-              <a:t>Menambah 1 rekod yang tersembunyi dalam keadaan asas.</a:t>
-            </a:r>
-          </a:p>
-          <a:p>
-            <a:pPr algn="l"/>
-            <a:r>
-              <a:rPr sz="1000" b="1" i="0">
-                <a:solidFill>
-                  <a:srgbClr val="6B6B6B"/>
-                </a:solidFill>
-                <a:latin typeface="Arial"/>
-              </a:rPr>
-              <a:t>Cara pelajar kembali / meneruskan</a:t>
-            </a:r>
-          </a:p>
-          <a:p>
-            <a:pPr algn="l" lvl="1"/>
-            <a:r>
-              <a:rPr sz="1000" b="0" i="0">
-                <a:solidFill>
-                  <a:srgbClr val="1A1A1A"/>
-                </a:solidFill>
-                <a:latin typeface="Arial"/>
-              </a:rPr>
-              <a:t>Panel tertutup apabila ditekan sekali lagi atau apabila panel lain dibuka. Keadaan asas kembali dan sentiasa boleh dicapai. Tiada navigasi berlaku.</a:t>
-            </a:r>
-          </a:p>
-          <a:p>
-            <a:pPr algn="l"/>
-            <a:r>
-              <a:rPr sz="1000" b="1" i="0">
-                <a:solidFill>
-                  <a:srgbClr val="6B6B6B"/>
-                </a:solidFill>
-                <a:latin typeface="Arial"/>
-              </a:rPr>
-              <a:t>Sumber dan kuasa</a:t>
-            </a:r>
-          </a:p>
-          <a:p>
-            <a:pPr algn="l" lvl="1"/>
-            <a:r>
               <a:rPr sz="900" b="0" i="0">
                 <a:solidFill>
-                  <a:srgbClr val="0D47A1"/>
-                </a:solidFill>
-                <a:latin typeface="Arial"/>
-              </a:rPr>
-              <a:t>Baris: T03B03-ROW-039</a:t>
-            </a:r>
-          </a:p>
-          <a:p>
-            <a:pPr algn="l" lvl="1"/>
-            <a:r>
-              <a:rPr sz="900" b="0" i="0">
-                <a:solidFill>
-                  <a:srgbClr val="6B6B6B"/>
-                </a:solidFill>
-                <a:latin typeface="Arial"/>
-              </a:rPr>
-              <a:t>Keputusan: A1, A2</a:t>
-            </a:r>
-          </a:p>
-        </p:txBody>
-      </p:sp>
-      <p:sp>
-        <p:nvSpPr>
-          <p:cNvPr id="10" name="TextBox 9"/>
-          <p:cNvSpPr txBox="1"/>
-          <p:nvPr/>
-        </p:nvSpPr>
-        <p:spPr>
-          <a:xfrm>
-            <a:off x="457200" y="6150000"/>
-            <a:ext cx="11277600" cy="400000"/>
-          </a:xfrm>
-          <a:prstGeom prst="rect">
-            <a:avLst/>
-          </a:prstGeom>
-          <a:noFill/>
-        </p:spPr>
-        <p:txBody>
-          <a:bodyPr wrap="square" lIns="0" rIns="0" tIns="0" bIns="0">
-            <a:noAutofit/>
-          </a:bodyPr>
-          <a:lstStyle/>
-          <a:p>
-            <a:pPr algn="l"/>
-            <a:r>
-              <a:rPr sz="900" b="0" i="0">
-                <a:solidFill>
-                  <a:srgbClr val="6B6B6B"/>
-                </a:solidFill>
-                <a:latin typeface="Arial"/>
-              </a:rPr>
-              <a:t>Lampiran keadaan · 3 panel/halaman · halaman 5 daripada 14   ·   TECHNICAL_PROOF · DRAFT_FOR_BARIAH_REVIEW · NOT_INSTRUCTIONALLY_APPROVED · NOT_LEARNER_FACING_FINAL</a:t>
+                  <a:srgbClr val="6B6B6B"/>
+                </a:solidFill>
+                <a:latin typeface="Arial"/>
+              </a:rPr>
+              <a:t>Lampiran keadaan · 3 panel/halaman · halaman 5 daripada 15   ·   TECHNICAL_PROOF · DRAFT_FOR_BARIAH_REVIEW · NOT_INSTRUCTIONALLY_APPROVED · NOT_LEARNER_FACING_FINAL</a:t>
             </a:r>
           </a:p>
         </p:txBody>
@@ -11769,7 +12369,7 @@
                 </a:solidFill>
                 <a:latin typeface="Arial"/>
               </a:rPr>
-              <a:t>T03B03-S06   ·   click-to-reveal</a:t>
+              <a:t>T03B03-S06   ·   Click-to-Reveal</a:t>
             </a:r>
           </a:p>
           <a:p>
@@ -11910,7 +12510,7 @@
                 </a:solidFill>
                 <a:latin typeface="Arial"/>
               </a:rPr>
-              <a:t>T03B03-S06-ST-03   ·   Panel pendedahan</a:t>
+              <a:t>T03B03-S06-ST-BASE   ·   Keadaan asas</a:t>
             </a:r>
           </a:p>
           <a:p>
@@ -11918,11 +12518,11 @@
             <a:r>
               <a:rPr sz="1200" b="1" i="0">
                 <a:solidFill>
-                  <a:srgbClr val="37474F"/>
-                </a:solidFill>
-                <a:latin typeface="Arial"/>
-              </a:rPr>
-              <a:t>Pencetus: Sistem Perparitan di Belakang Dinding  [T03B03-S06-TRG-03]</a:t>
+                  <a:srgbClr val="1B5E20"/>
+                </a:solidFill>
+                <a:latin typeface="Arial"/>
+              </a:rPr>
+              <a:t>Pencetus: screen entry</a:t>
             </a:r>
           </a:p>
           <a:p>
@@ -11946,7 +12546,91 @@
                 </a:solidFill>
                 <a:latin typeface="Arial"/>
               </a:rPr>
-              <a:t>· Kegagalan dinding penahan selalunya berpunca daripada tekanan air (hydrostatic pressure). Kontraktor wajib memastikan lubang saliran air (weep holes) dibina dan lapisan penapis (seperti batu kelikir) diletakkan di belakang dinding untuk membolehkan air keluar.</a:t>
+              <a:t>· Dinding Penahan (Retaining Wall)</a:t>
+            </a:r>
+          </a:p>
+          <a:p>
+            <a:pPr algn="l" lvl="1"/>
+            <a:r>
+              <a:rPr sz="1000" b="0" i="0">
+                <a:solidFill>
+                  <a:srgbClr val="1A1A1A"/>
+                </a:solidFill>
+                <a:latin typeface="Arial"/>
+              </a:rPr>
+              <a:t>· Fungsi</a:t>
+            </a:r>
+          </a:p>
+          <a:p>
+            <a:pPr algn="l" lvl="1"/>
+            <a:r>
+              <a:rPr sz="1000" b="0" i="0">
+                <a:solidFill>
+                  <a:srgbClr val="1A1A1A"/>
+                </a:solidFill>
+                <a:latin typeface="Arial"/>
+              </a:rPr>
+              <a:t>· Membentuk kawasan rata di lereng bukit, menstabilkan cerun, dan menetapkan sempadan aras.</a:t>
+            </a:r>
+          </a:p>
+          <a:p>
+            <a:pPr algn="l" lvl="1"/>
+            <a:r>
+              <a:rPr sz="1000" b="0" i="0">
+                <a:solidFill>
+                  <a:srgbClr val="1A1A1A"/>
+                </a:solidFill>
+                <a:latin typeface="Arial"/>
+              </a:rPr>
+              <a:t>· Fokus Utama Kontraktor</a:t>
+            </a:r>
+          </a:p>
+          <a:p>
+            <a:pPr algn="l" lvl="1"/>
+            <a:r>
+              <a:rPr sz="1000" b="0" i="0">
+                <a:solidFill>
+                  <a:srgbClr val="1A1A1A"/>
+                </a:solidFill>
+                <a:latin typeface="Arial"/>
+              </a:rPr>
+              <a:t>· Lukisan Jurutera</a:t>
+            </a:r>
+          </a:p>
+          <a:p>
+            <a:pPr algn="l" lvl="1"/>
+            <a:r>
+              <a:rPr sz="1000" b="0" i="0">
+                <a:solidFill>
+                  <a:srgbClr val="1A1A1A"/>
+                </a:solidFill>
+                <a:latin typeface="Arial"/>
+              </a:rPr>
+              <a:t>· Pembinaan Tapak Asas (Foundation)</a:t>
+            </a:r>
+          </a:p>
+          <a:p>
+            <a:pPr algn="l" lvl="1"/>
+            <a:r>
+              <a:rPr sz="1000" b="0" i="0">
+                <a:solidFill>
+                  <a:srgbClr val="1A1A1A"/>
+                </a:solidFill>
+                <a:latin typeface="Arial"/>
+              </a:rPr>
+              <a:t>· Sistem Perparitan di Belakang Dinding</a:t>
+            </a:r>
+          </a:p>
+          <a:p>
+            <a:pPr algn="l" lvl="1"/>
+            <a:r>
+              <a:rPr sz="900" b="0" i="0">
+                <a:solidFill>
+                  <a:srgbClr val="6B6B6B"/>
+                </a:solidFill>
+                <a:latin typeface="Arial"/>
+              </a:rPr>
+              <a:t>· … 1 rekod lagi</a:t>
             </a:r>
           </a:p>
           <a:p>
@@ -11970,7 +12654,7 @@
                 </a:solidFill>
                 <a:latin typeface="Arial"/>
               </a:rPr>
-              <a:t>Menambah 1 rekod yang tersembunyi dalam keadaan asas.</a:t>
+              <a:t>— ini keadaan asas —</a:t>
             </a:r>
           </a:p>
           <a:p>
@@ -11994,7 +12678,7 @@
                 </a:solidFill>
                 <a:latin typeface="Arial"/>
               </a:rPr>
-              <a:t>Panel tertutup apabila ditekan sekali lagi atau apabila panel lain dibuka. Keadaan asas kembali dan sentiasa boleh dicapai. Tiada navigasi berlaku.</a:t>
+              <a:t>Keadaan masuk. Pelajar meneruskan dengan SETERUSNYA setelah syarat selesai dipenuhi.</a:t>
             </a:r>
           </a:p>
           <a:p>
@@ -12018,7 +12702,7 @@
                 </a:solidFill>
                 <a:latin typeface="Arial"/>
               </a:rPr>
-              <a:t>Baris: T03B03-ROW-041</a:t>
+              <a:t>Baris: T03B03-ROW-032, T03B03-ROW-033, (+5)</a:t>
             </a:r>
           </a:p>
           <a:p>
@@ -12113,7 +12797,7 @@
                 </a:solidFill>
                 <a:latin typeface="Arial"/>
               </a:rPr>
-              <a:t>T03B03-S06-ST-ALL_VIEWED   ·   Penanda selesai</a:t>
+              <a:t>T03B03-S06-ST-01   ·   Panel pendedahan</a:t>
             </a:r>
           </a:p>
           <a:p>
@@ -12125,7 +12809,7 @@
                 </a:solidFill>
                 <a:latin typeface="Arial"/>
               </a:rPr>
-              <a:t>Pencetus: semua 3 panel dilihat  [T03B03-S06-TRG-ALL]</a:t>
+              <a:t>Pencetus: Lukisan Jurutera  [T03B03-S06-TRG-01]</a:t>
             </a:r>
           </a:p>
           <a:p>
@@ -12143,13 +12827,13 @@
           <a:p>
             <a:pPr algn="l" lvl="1"/>
             <a:r>
-              <a:rPr sz="1000" b="0" i="1">
-                <a:solidFill>
-                  <a:srgbClr val="6B6B6B"/>
-                </a:solidFill>
-                <a:latin typeface="Arial"/>
-              </a:rPr>
-              <a:t>Tiada kandungan dipaparkan — penanda sahaja.</a:t>
+              <a:rPr sz="1000" b="0" i="0">
+                <a:solidFill>
+                  <a:srgbClr val="1A1A1A"/>
+                </a:solidFill>
+                <a:latin typeface="Arial"/>
+              </a:rPr>
+              <a:t>· Dinding penahan mesti dibina dengan mematuhi sepenuhnya Lukisan Struktur Jurutera Bertauliah (Ir.). Sebarang perubahan memerlukan kelulusan jurutera.</a:t>
             </a:r>
           </a:p>
           <a:p>
@@ -12173,7 +12857,7 @@
                 </a:solidFill>
                 <a:latin typeface="Arial"/>
               </a:rPr>
-              <a:t>Tidak dipaparkan; membuka SETERUSNYA.</a:t>
+              <a:t>Menambah 1 rekod yang tersembunyi dalam keadaan asas.</a:t>
             </a:r>
           </a:p>
           <a:p>
@@ -12197,7 +12881,7 @@
                 </a:solidFill>
                 <a:latin typeface="Arial"/>
               </a:rPr>
-              <a:t>Bukan keadaan yang dipaparkan. Penanda yang menjadi benar setelah semua pendedahan dilihat, dan inilah yang membuka SETERUSNYA.</a:t>
+              <a:t>Panel tertutup apabila ditekan sekali lagi atau apabila panel lain dibuka. Keadaan asas kembali dan sentiasa boleh dicapai. Tiada navigasi berlaku.</a:t>
             </a:r>
           </a:p>
           <a:p>
@@ -12221,7 +12905,7 @@
                 </a:solidFill>
                 <a:latin typeface="Arial"/>
               </a:rPr>
-              <a:t>Tiada baris modul — keadaan struktur</a:t>
+              <a:t>Baris: T03B03-ROW-037</a:t>
             </a:r>
           </a:p>
           <a:p>
@@ -12240,14 +12924,62 @@
       </p:sp>
       <p:sp>
         <p:nvSpPr>
-          <p:cNvPr id="8" name="TextBox 7"/>
+          <p:cNvPr id="8" name="Rectangle 7"/>
+          <p:cNvSpPr/>
+          <p:nvPr/>
+        </p:nvSpPr>
+        <p:spPr>
+          <a:xfrm>
+            <a:off x="8108932" y="1280000"/>
+            <a:ext cx="3625866" cy="4700000"/>
+          </a:xfrm>
+          <a:prstGeom prst="rect">
+            <a:avLst/>
+          </a:prstGeom>
+          <a:solidFill>
+            <a:srgbClr val="F7F7F7"/>
+          </a:solidFill>
+          <a:ln>
+            <a:solidFill>
+              <a:srgbClr val="D8D8D8"/>
+            </a:solidFill>
+          </a:ln>
+          <a:effectLst/>
+        </p:spPr>
+        <p:style>
+          <a:lnRef idx="1">
+            <a:schemeClr val="accent1"/>
+          </a:lnRef>
+          <a:fillRef idx="3">
+            <a:schemeClr val="accent1"/>
+          </a:fillRef>
+          <a:effectRef idx="0">
+            <a:schemeClr val="accent1"/>
+          </a:effectRef>
+          <a:fontRef idx="minor">
+            <a:schemeClr val="lt1"/>
+          </a:fontRef>
+        </p:style>
+        <p:txBody>
+          <a:bodyPr rtlCol="0" anchor="ctr">
+            <a:noAutofit/>
+          </a:bodyPr>
+          <a:lstStyle/>
+          <a:p>
+            <a:pPr algn="ctr"/>
+          </a:p>
+        </p:txBody>
+      </p:sp>
+      <p:sp>
+        <p:nvSpPr>
+          <p:cNvPr id="9" name="TextBox 8"/>
           <p:cNvSpPr txBox="1"/>
           <p:nvPr/>
         </p:nvSpPr>
         <p:spPr>
           <a:xfrm>
-            <a:off x="457200" y="6150000"/>
-            <a:ext cx="11277600" cy="400000"/>
+            <a:off x="8288932" y="1460000"/>
+            <a:ext cx="3265866" cy="4340000"/>
           </a:xfrm>
           <a:prstGeom prst="rect">
             <a:avLst/>
@@ -12262,13 +12994,168 @@
           <a:p>
             <a:pPr algn="l"/>
             <a:r>
+              <a:rPr sz="1100" b="1" i="0">
+                <a:solidFill>
+                  <a:srgbClr val="6B6B6B"/>
+                </a:solidFill>
+                <a:latin typeface="Arial"/>
+              </a:rPr>
+              <a:t>T03B03-S06-ST-02   ·   Panel pendedahan</a:t>
+            </a:r>
+          </a:p>
+          <a:p>
+            <a:pPr algn="l"/>
+            <a:r>
+              <a:rPr sz="1200" b="1" i="0">
+                <a:solidFill>
+                  <a:srgbClr val="37474F"/>
+                </a:solidFill>
+                <a:latin typeface="Arial"/>
+              </a:rPr>
+              <a:t>Pencetus: Pembinaan Tapak Asas (Foundation)  [T03B03-S06-TRG-02]</a:t>
+            </a:r>
+          </a:p>
+          <a:p>
+            <a:pPr algn="l"/>
+            <a:r>
+              <a:rPr sz="1000" b="1" i="0">
+                <a:solidFill>
+                  <a:srgbClr val="6B6B6B"/>
+                </a:solidFill>
+                <a:latin typeface="Arial"/>
+              </a:rPr>
+              <a:t>Apa yang dipaparkan</a:t>
+            </a:r>
+          </a:p>
+          <a:p>
+            <a:pPr algn="l" lvl="1"/>
+            <a:r>
+              <a:rPr sz="1000" b="0" i="0">
+                <a:solidFill>
+                  <a:srgbClr val="1A1A1A"/>
+                </a:solidFill>
+                <a:latin typeface="Arial"/>
+              </a:rPr>
+              <a:t>· Tapak asas adalah komponen paling kritikal. Ia mesti dibina di atas tanah yang stabil pada kedalaman dan saiz yang betul.</a:t>
+            </a:r>
+          </a:p>
+          <a:p>
+            <a:pPr algn="l"/>
+            <a:r>
+              <a:rPr sz="1000" b="1" i="0">
+                <a:solidFill>
+                  <a:srgbClr val="6B6B6B"/>
+                </a:solidFill>
+                <a:latin typeface="Arial"/>
+              </a:rPr>
+              <a:t>Beza daripada keadaan asas</a:t>
+            </a:r>
+          </a:p>
+          <a:p>
+            <a:pPr algn="l" lvl="1"/>
+            <a:r>
+              <a:rPr sz="1000" b="0" i="0">
+                <a:solidFill>
+                  <a:srgbClr val="1A1A1A"/>
+                </a:solidFill>
+                <a:latin typeface="Arial"/>
+              </a:rPr>
+              <a:t>Menambah 1 rekod yang tersembunyi dalam keadaan asas.</a:t>
+            </a:r>
+          </a:p>
+          <a:p>
+            <a:pPr algn="l"/>
+            <a:r>
+              <a:rPr sz="1000" b="1" i="0">
+                <a:solidFill>
+                  <a:srgbClr val="6B6B6B"/>
+                </a:solidFill>
+                <a:latin typeface="Arial"/>
+              </a:rPr>
+              <a:t>Cara pelajar kembali / meneruskan</a:t>
+            </a:r>
+          </a:p>
+          <a:p>
+            <a:pPr algn="l" lvl="1"/>
+            <a:r>
+              <a:rPr sz="1000" b="0" i="0">
+                <a:solidFill>
+                  <a:srgbClr val="1A1A1A"/>
+                </a:solidFill>
+                <a:latin typeface="Arial"/>
+              </a:rPr>
+              <a:t>Panel tertutup apabila ditekan sekali lagi atau apabila panel lain dibuka. Keadaan asas kembali dan sentiasa boleh dicapai. Tiada navigasi berlaku.</a:t>
+            </a:r>
+          </a:p>
+          <a:p>
+            <a:pPr algn="l"/>
+            <a:r>
+              <a:rPr sz="1000" b="1" i="0">
+                <a:solidFill>
+                  <a:srgbClr val="6B6B6B"/>
+                </a:solidFill>
+                <a:latin typeface="Arial"/>
+              </a:rPr>
+              <a:t>Sumber dan kuasa</a:t>
+            </a:r>
+          </a:p>
+          <a:p>
+            <a:pPr algn="l" lvl="1"/>
+            <a:r>
               <a:rPr sz="900" b="0" i="0">
                 <a:solidFill>
-                  <a:srgbClr val="6B6B6B"/>
-                </a:solidFill>
-                <a:latin typeface="Arial"/>
-              </a:rPr>
-              <a:t>Lampiran keadaan · 3 panel/halaman · halaman 6 daripada 14   ·   TECHNICAL_PROOF · DRAFT_FOR_BARIAH_REVIEW · NOT_INSTRUCTIONALLY_APPROVED · NOT_LEARNER_FACING_FINAL</a:t>
+                  <a:srgbClr val="0D47A1"/>
+                </a:solidFill>
+                <a:latin typeface="Arial"/>
+              </a:rPr>
+              <a:t>Baris: T03B03-ROW-039</a:t>
+            </a:r>
+          </a:p>
+          <a:p>
+            <a:pPr algn="l" lvl="1"/>
+            <a:r>
+              <a:rPr sz="900" b="0" i="0">
+                <a:solidFill>
+                  <a:srgbClr val="6B6B6B"/>
+                </a:solidFill>
+                <a:latin typeface="Arial"/>
+              </a:rPr>
+              <a:t>Keputusan: A1, A2</a:t>
+            </a:r>
+          </a:p>
+        </p:txBody>
+      </p:sp>
+      <p:sp>
+        <p:nvSpPr>
+          <p:cNvPr id="10" name="TextBox 9"/>
+          <p:cNvSpPr txBox="1"/>
+          <p:nvPr/>
+        </p:nvSpPr>
+        <p:spPr>
+          <a:xfrm>
+            <a:off x="457200" y="6150000"/>
+            <a:ext cx="11277600" cy="400000"/>
+          </a:xfrm>
+          <a:prstGeom prst="rect">
+            <a:avLst/>
+          </a:prstGeom>
+          <a:noFill/>
+        </p:spPr>
+        <p:txBody>
+          <a:bodyPr wrap="square" lIns="0" rIns="0" tIns="0" bIns="0">
+            <a:noAutofit/>
+          </a:bodyPr>
+          <a:lstStyle/>
+          <a:p>
+            <a:pPr algn="l"/>
+            <a:r>
+              <a:rPr sz="900" b="0" i="0">
+                <a:solidFill>
+                  <a:srgbClr val="6B6B6B"/>
+                </a:solidFill>
+                <a:latin typeface="Arial"/>
+              </a:rPr>
+              <a:t>Lampiran keadaan · 3 panel/halaman · halaman 6 daripada 15   ·   TECHNICAL_PROOF · DRAFT_FOR_BARIAH_REVIEW · NOT_INSTRUCTIONALLY_APPROVED · NOT_LEARNER_FACING_FINAL</a:t>
             </a:r>
           </a:p>
         </p:txBody>
@@ -12321,7 +13208,7 @@
                 </a:solidFill>
                 <a:latin typeface="Arial"/>
               </a:rPr>
-              <a:t>T03B03-S07   ·   click-to-reveal</a:t>
+              <a:t>T03B03-S06   ·   Click-to-Reveal</a:t>
             </a:r>
           </a:p>
           <a:p>
@@ -12333,7 +13220,7 @@
                 </a:solidFill>
                 <a:latin typeface="Arial"/>
               </a:rPr>
-              <a:t>Fencing</a:t>
+              <a:t>Dinding Penahan (Retaining Wall)</a:t>
             </a:r>
           </a:p>
         </p:txBody>
@@ -12462,7 +13349,7 @@
                 </a:solidFill>
                 <a:latin typeface="Arial"/>
               </a:rPr>
-              <a:t>T03B03-S07-ST-BASE   ·   Keadaan asas</a:t>
+              <a:t>T03B03-S06-ST-03   ·   Panel pendedahan</a:t>
             </a:r>
           </a:p>
           <a:p>
@@ -12470,11 +13357,11 @@
             <a:r>
               <a:rPr sz="1200" b="1" i="0">
                 <a:solidFill>
-                  <a:srgbClr val="1B5E20"/>
-                </a:solidFill>
-                <a:latin typeface="Arial"/>
-              </a:rPr>
-              <a:t>Pencetus: screen entry</a:t>
+                  <a:srgbClr val="37474F"/>
+                </a:solidFill>
+                <a:latin typeface="Arial"/>
+              </a:rPr>
+              <a:t>Pencetus: Sistem Perparitan di Belakang Dinding  [T03B03-S06-TRG-03]</a:t>
             </a:r>
           </a:p>
           <a:p>
@@ -12498,79 +13385,67 @@
                 </a:solidFill>
                 <a:latin typeface="Arial"/>
               </a:rPr>
-              <a:t>· Fencing</a:t>
-            </a:r>
-          </a:p>
-          <a:p>
-            <a:pPr algn="l" lvl="1"/>
-            <a:r>
-              <a:rPr sz="1000" b="0" i="0">
-                <a:solidFill>
-                  <a:srgbClr val="1A1A1A"/>
-                </a:solidFill>
-                <a:latin typeface="Arial"/>
-              </a:rPr>
-              <a:t>· Pagar dibina untuk tujuan keselamatan, menandakan sempadan, privasi, atau sebagai elemen hiasan.</a:t>
-            </a:r>
-          </a:p>
-          <a:p>
-            <a:pPr algn="l" lvl="1"/>
-            <a:r>
-              <a:rPr sz="1000" b="0" i="0">
-                <a:solidFill>
-                  <a:srgbClr val="1A1A1A"/>
-                </a:solidFill>
-                <a:latin typeface="Arial"/>
-              </a:rPr>
-              <a:t>· Fungsi</a:t>
-            </a:r>
-          </a:p>
-          <a:p>
-            <a:pPr algn="l" lvl="1"/>
-            <a:r>
-              <a:rPr sz="1000" b="0" i="0">
-                <a:solidFill>
-                  <a:srgbClr val="1A1A1A"/>
-                </a:solidFill>
-                <a:latin typeface="Arial"/>
-              </a:rPr>
-              <a:t>· Mengawal akses, menetapkan sempadan hartanah, dan meningkatkan keselamatan.</a:t>
-            </a:r>
-          </a:p>
-          <a:p>
-            <a:pPr algn="l" lvl="1"/>
-            <a:r>
-              <a:rPr sz="1000" b="0" i="0">
-                <a:solidFill>
-                  <a:srgbClr val="1A1A1A"/>
-                </a:solidFill>
-                <a:latin typeface="Arial"/>
-              </a:rPr>
-              <a:t>· Fokus Utama Kontraktor</a:t>
-            </a:r>
-          </a:p>
-          <a:p>
-            <a:pPr algn="l" lvl="1"/>
-            <a:r>
-              <a:rPr sz="1000" b="0" i="0">
-                <a:solidFill>
-                  <a:srgbClr val="1A1A1A"/>
-                </a:solidFill>
-                <a:latin typeface="Arial"/>
-              </a:rPr>
-              <a:t>· Penjajaran Sempadan</a:t>
-            </a:r>
-          </a:p>
-          <a:p>
-            <a:pPr algn="l" lvl="1"/>
-            <a:r>
-              <a:rPr sz="1000" b="0" i="0">
-                <a:solidFill>
-                  <a:srgbClr val="1A1A1A"/>
-                </a:solidFill>
-                <a:latin typeface="Arial"/>
-              </a:rPr>
-              <a:t>· Pemasangan Tiang</a:t>
+              <a:t>· Kegagalan dinding penahan selalunya berpunca daripada tekanan air (hydrostatic pressure). Kontraktor wajib memastikan lubang saliran air (weep holes) dibina dan lapisan penapis (seperti batu kelikir) diletakkan di belakang dinding untuk membolehkan air keluar.</a:t>
+            </a:r>
+          </a:p>
+          <a:p>
+            <a:pPr algn="l"/>
+            <a:r>
+              <a:rPr sz="1000" b="1" i="0">
+                <a:solidFill>
+                  <a:srgbClr val="6B6B6B"/>
+                </a:solidFill>
+                <a:latin typeface="Arial"/>
+              </a:rPr>
+              <a:t>Beza daripada keadaan asas</a:t>
+            </a:r>
+          </a:p>
+          <a:p>
+            <a:pPr algn="l" lvl="1"/>
+            <a:r>
+              <a:rPr sz="1000" b="0" i="0">
+                <a:solidFill>
+                  <a:srgbClr val="1A1A1A"/>
+                </a:solidFill>
+                <a:latin typeface="Arial"/>
+              </a:rPr>
+              <a:t>Menambah 1 rekod yang tersembunyi dalam keadaan asas.</a:t>
+            </a:r>
+          </a:p>
+          <a:p>
+            <a:pPr algn="l"/>
+            <a:r>
+              <a:rPr sz="1000" b="1" i="0">
+                <a:solidFill>
+                  <a:srgbClr val="6B6B6B"/>
+                </a:solidFill>
+                <a:latin typeface="Arial"/>
+              </a:rPr>
+              <a:t>Cara pelajar kembali / meneruskan</a:t>
+            </a:r>
+          </a:p>
+          <a:p>
+            <a:pPr algn="l" lvl="1"/>
+            <a:r>
+              <a:rPr sz="1000" b="0" i="0">
+                <a:solidFill>
+                  <a:srgbClr val="1A1A1A"/>
+                </a:solidFill>
+                <a:latin typeface="Arial"/>
+              </a:rPr>
+              <a:t>Panel tertutup apabila ditekan sekali lagi atau apabila panel lain dibuka. Keadaan asas kembali dan sentiasa boleh dicapai. Tiada navigasi berlaku.</a:t>
+            </a:r>
+          </a:p>
+          <a:p>
+            <a:pPr algn="l"/>
+            <a:r>
+              <a:rPr sz="1000" b="1" i="0">
+                <a:solidFill>
+                  <a:srgbClr val="6B6B6B"/>
+                </a:solidFill>
+                <a:latin typeface="Arial"/>
+              </a:rPr>
+              <a:t>Sumber dan kuasa</a:t>
             </a:r>
           </a:p>
           <a:p>
@@ -12578,83 +13453,11 @@
             <a:r>
               <a:rPr sz="900" b="0" i="0">
                 <a:solidFill>
-                  <a:srgbClr val="6B6B6B"/>
-                </a:solidFill>
-                <a:latin typeface="Arial"/>
-              </a:rPr>
-              <a:t>· … 3 rekod lagi</a:t>
-            </a:r>
-          </a:p>
-          <a:p>
-            <a:pPr algn="l"/>
-            <a:r>
-              <a:rPr sz="1000" b="1" i="0">
-                <a:solidFill>
-                  <a:srgbClr val="6B6B6B"/>
-                </a:solidFill>
-                <a:latin typeface="Arial"/>
-              </a:rPr>
-              <a:t>Beza daripada keadaan asas</a:t>
-            </a:r>
-          </a:p>
-          <a:p>
-            <a:pPr algn="l" lvl="1"/>
-            <a:r>
-              <a:rPr sz="1000" b="0" i="0">
-                <a:solidFill>
-                  <a:srgbClr val="1A1A1A"/>
-                </a:solidFill>
-                <a:latin typeface="Arial"/>
-              </a:rPr>
-              <a:t>— ini keadaan asas —</a:t>
-            </a:r>
-          </a:p>
-          <a:p>
-            <a:pPr algn="l"/>
-            <a:r>
-              <a:rPr sz="1000" b="1" i="0">
-                <a:solidFill>
-                  <a:srgbClr val="6B6B6B"/>
-                </a:solidFill>
-                <a:latin typeface="Arial"/>
-              </a:rPr>
-              <a:t>Cara pelajar kembali / meneruskan</a:t>
-            </a:r>
-          </a:p>
-          <a:p>
-            <a:pPr algn="l" lvl="1"/>
-            <a:r>
-              <a:rPr sz="1000" b="0" i="0">
-                <a:solidFill>
-                  <a:srgbClr val="1A1A1A"/>
-                </a:solidFill>
-                <a:latin typeface="Arial"/>
-              </a:rPr>
-              <a:t>Keadaan masuk. Pelajar meneruskan dengan SETERUSNYA setelah syarat selesai dipenuhi.</a:t>
-            </a:r>
-          </a:p>
-          <a:p>
-            <a:pPr algn="l"/>
-            <a:r>
-              <a:rPr sz="1000" b="1" i="0">
-                <a:solidFill>
-                  <a:srgbClr val="6B6B6B"/>
-                </a:solidFill>
-                <a:latin typeface="Arial"/>
-              </a:rPr>
-              <a:t>Sumber dan kuasa</a:t>
-            </a:r>
-          </a:p>
-          <a:p>
-            <a:pPr algn="l" lvl="1"/>
-            <a:r>
-              <a:rPr sz="900" b="0" i="0">
-                <a:solidFill>
                   <a:srgbClr val="0D47A1"/>
                 </a:solidFill>
                 <a:latin typeface="Arial"/>
               </a:rPr>
-              <a:t>Baris: T03B03-ROW-042, T03B03-ROW-043, (+7)</a:t>
+              <a:t>Baris: T03B03-ROW-041</a:t>
             </a:r>
           </a:p>
           <a:p>
@@ -12749,7 +13552,7 @@
                 </a:solidFill>
                 <a:latin typeface="Arial"/>
               </a:rPr>
-              <a:t>T03B03-S07-ST-01   ·   Panel pendedahan</a:t>
+              <a:t>T03B03-S06-ST-ALL_VIEWED   ·   Penanda selesai</a:t>
             </a:r>
           </a:p>
           <a:p>
@@ -12761,7 +13564,7 @@
                 </a:solidFill>
                 <a:latin typeface="Arial"/>
               </a:rPr>
-              <a:t>Pencetus: Penjajaran Sempadan  [T03B03-S07-TRG-01]</a:t>
+              <a:t>Pencetus: semua 3 panel dilihat  [T03B03-S06-TRG-ALL]</a:t>
             </a:r>
           </a:p>
           <a:p>
@@ -12779,13 +13582,13 @@
           <a:p>
             <a:pPr algn="l" lvl="1"/>
             <a:r>
-              <a:rPr sz="1000" b="0" i="0">
-                <a:solidFill>
-                  <a:srgbClr val="1A1A1A"/>
-                </a:solidFill>
-                <a:latin typeface="Arial"/>
-              </a:rPr>
-              <a:t>· Jajaran pagar mesti ditanda mengikut Pelan Ukur Sempadan untuk mengelakkan isu pencerobohan tanah.</a:t>
+              <a:rPr sz="1000" b="0" i="1">
+                <a:solidFill>
+                  <a:srgbClr val="6B6B6B"/>
+                </a:solidFill>
+                <a:latin typeface="Arial"/>
+              </a:rPr>
+              <a:t>Tiada kandungan dipaparkan — penanda sahaja.</a:t>
             </a:r>
           </a:p>
           <a:p>
@@ -12809,7 +13612,7 @@
                 </a:solidFill>
                 <a:latin typeface="Arial"/>
               </a:rPr>
-              <a:t>Menambah 1 rekod yang tersembunyi dalam keadaan asas.</a:t>
+              <a:t>Tidak dipaparkan; membuka SETERUSNYA.</a:t>
             </a:r>
           </a:p>
           <a:p>
@@ -12833,7 +13636,7 @@
                 </a:solidFill>
                 <a:latin typeface="Arial"/>
               </a:rPr>
-              <a:t>Panel tertutup apabila ditekan sekali lagi atau apabila panel lain dibuka. Keadaan asas kembali dan sentiasa boleh dicapai. Tiada navigasi berlaku.</a:t>
+              <a:t>Bukan keadaan yang dipaparkan. Penanda yang menjadi benar setelah semua pendedahan dilihat, dan inilah yang membuka SETERUSNYA.</a:t>
             </a:r>
           </a:p>
           <a:p>
@@ -12857,7 +13660,7 @@
                 </a:solidFill>
                 <a:latin typeface="Arial"/>
               </a:rPr>
-              <a:t>Baris: T03B03-ROW-048</a:t>
+              <a:t>Tiada baris modul — keadaan struktur</a:t>
             </a:r>
           </a:p>
           <a:p>
@@ -12876,62 +13679,14 @@
       </p:sp>
       <p:sp>
         <p:nvSpPr>
-          <p:cNvPr id="8" name="Rectangle 7"/>
-          <p:cNvSpPr/>
-          <p:nvPr/>
-        </p:nvSpPr>
-        <p:spPr>
-          <a:xfrm>
-            <a:off x="8108932" y="1280000"/>
-            <a:ext cx="3625866" cy="4700000"/>
-          </a:xfrm>
-          <a:prstGeom prst="rect">
-            <a:avLst/>
-          </a:prstGeom>
-          <a:solidFill>
-            <a:srgbClr val="F7F7F7"/>
-          </a:solidFill>
-          <a:ln>
-            <a:solidFill>
-              <a:srgbClr val="D8D8D8"/>
-            </a:solidFill>
-          </a:ln>
-          <a:effectLst/>
-        </p:spPr>
-        <p:style>
-          <a:lnRef idx="1">
-            <a:schemeClr val="accent1"/>
-          </a:lnRef>
-          <a:fillRef idx="3">
-            <a:schemeClr val="accent1"/>
-          </a:fillRef>
-          <a:effectRef idx="0">
-            <a:schemeClr val="accent1"/>
-          </a:effectRef>
-          <a:fontRef idx="minor">
-            <a:schemeClr val="lt1"/>
-          </a:fontRef>
-        </p:style>
-        <p:txBody>
-          <a:bodyPr rtlCol="0" anchor="ctr">
-            <a:noAutofit/>
-          </a:bodyPr>
-          <a:lstStyle/>
-          <a:p>
-            <a:pPr algn="ctr"/>
-          </a:p>
-        </p:txBody>
-      </p:sp>
-      <p:sp>
-        <p:nvSpPr>
-          <p:cNvPr id="9" name="TextBox 8"/>
+          <p:cNvPr id="8" name="TextBox 7"/>
           <p:cNvSpPr txBox="1"/>
           <p:nvPr/>
         </p:nvSpPr>
         <p:spPr>
           <a:xfrm>
-            <a:off x="8288932" y="1460000"/>
-            <a:ext cx="3265866" cy="4340000"/>
+            <a:off x="457200" y="6150000"/>
+            <a:ext cx="11277600" cy="400000"/>
           </a:xfrm>
           <a:prstGeom prst="rect">
             <a:avLst/>
@@ -12946,168 +13701,13 @@
           <a:p>
             <a:pPr algn="l"/>
             <a:r>
-              <a:rPr sz="1100" b="1" i="0">
-                <a:solidFill>
-                  <a:srgbClr val="6B6B6B"/>
-                </a:solidFill>
-                <a:latin typeface="Arial"/>
-              </a:rPr>
-              <a:t>T03B03-S07-ST-02   ·   Panel pendedahan</a:t>
-            </a:r>
-          </a:p>
-          <a:p>
-            <a:pPr algn="l"/>
-            <a:r>
-              <a:rPr sz="1200" b="1" i="0">
-                <a:solidFill>
-                  <a:srgbClr val="37474F"/>
-                </a:solidFill>
-                <a:latin typeface="Arial"/>
-              </a:rPr>
-              <a:t>Pencetus: Pemasangan Tiang  [T03B03-S07-TRG-02]</a:t>
-            </a:r>
-          </a:p>
-          <a:p>
-            <a:pPr algn="l"/>
-            <a:r>
-              <a:rPr sz="1000" b="1" i="0">
-                <a:solidFill>
-                  <a:srgbClr val="6B6B6B"/>
-                </a:solidFill>
-                <a:latin typeface="Arial"/>
-              </a:rPr>
-              <a:t>Apa yang dipaparkan</a:t>
-            </a:r>
-          </a:p>
-          <a:p>
-            <a:pPr algn="l" lvl="1"/>
-            <a:r>
-              <a:rPr sz="1000" b="0" i="0">
-                <a:solidFill>
-                  <a:srgbClr val="1A1A1A"/>
-                </a:solidFill>
-                <a:latin typeface="Arial"/>
-              </a:rPr>
-              <a:t>· Kestabilan pagar bergantung pada tiangnya. Tiang mesti dipasang pada jarak yang seragam dan ditanam dalam tapak konkrit dengan saiz dan kedalaman yang mencukupi seperti dalam spesifikasi.</a:t>
-            </a:r>
-          </a:p>
-          <a:p>
-            <a:pPr algn="l"/>
-            <a:r>
-              <a:rPr sz="1000" b="1" i="0">
-                <a:solidFill>
-                  <a:srgbClr val="6B6B6B"/>
-                </a:solidFill>
-                <a:latin typeface="Arial"/>
-              </a:rPr>
-              <a:t>Beza daripada keadaan asas</a:t>
-            </a:r>
-          </a:p>
-          <a:p>
-            <a:pPr algn="l" lvl="1"/>
-            <a:r>
-              <a:rPr sz="1000" b="0" i="0">
-                <a:solidFill>
-                  <a:srgbClr val="1A1A1A"/>
-                </a:solidFill>
-                <a:latin typeface="Arial"/>
-              </a:rPr>
-              <a:t>Menambah 1 rekod yang tersembunyi dalam keadaan asas.</a:t>
-            </a:r>
-          </a:p>
-          <a:p>
-            <a:pPr algn="l"/>
-            <a:r>
-              <a:rPr sz="1000" b="1" i="0">
-                <a:solidFill>
-                  <a:srgbClr val="6B6B6B"/>
-                </a:solidFill>
-                <a:latin typeface="Arial"/>
-              </a:rPr>
-              <a:t>Cara pelajar kembali / meneruskan</a:t>
-            </a:r>
-          </a:p>
-          <a:p>
-            <a:pPr algn="l" lvl="1"/>
-            <a:r>
-              <a:rPr sz="1000" b="0" i="0">
-                <a:solidFill>
-                  <a:srgbClr val="1A1A1A"/>
-                </a:solidFill>
-                <a:latin typeface="Arial"/>
-              </a:rPr>
-              <a:t>Panel tertutup apabila ditekan sekali lagi atau apabila panel lain dibuka. Keadaan asas kembali dan sentiasa boleh dicapai. Tiada navigasi berlaku.</a:t>
-            </a:r>
-          </a:p>
-          <a:p>
-            <a:pPr algn="l"/>
-            <a:r>
-              <a:rPr sz="1000" b="1" i="0">
-                <a:solidFill>
-                  <a:srgbClr val="6B6B6B"/>
-                </a:solidFill>
-                <a:latin typeface="Arial"/>
-              </a:rPr>
-              <a:t>Sumber dan kuasa</a:t>
-            </a:r>
-          </a:p>
-          <a:p>
-            <a:pPr algn="l" lvl="1"/>
-            <a:r>
               <a:rPr sz="900" b="0" i="0">
                 <a:solidFill>
-                  <a:srgbClr val="0D47A1"/>
-                </a:solidFill>
-                <a:latin typeface="Arial"/>
-              </a:rPr>
-              <a:t>Baris: T03B03-ROW-050</a:t>
-            </a:r>
-          </a:p>
-          <a:p>
-            <a:pPr algn="l" lvl="1"/>
-            <a:r>
-              <a:rPr sz="900" b="0" i="0">
-                <a:solidFill>
-                  <a:srgbClr val="6B6B6B"/>
-                </a:solidFill>
-                <a:latin typeface="Arial"/>
-              </a:rPr>
-              <a:t>Keputusan: A1, A2</a:t>
-            </a:r>
-          </a:p>
-        </p:txBody>
-      </p:sp>
-      <p:sp>
-        <p:nvSpPr>
-          <p:cNvPr id="10" name="TextBox 9"/>
-          <p:cNvSpPr txBox="1"/>
-          <p:nvPr/>
-        </p:nvSpPr>
-        <p:spPr>
-          <a:xfrm>
-            <a:off x="457200" y="6150000"/>
-            <a:ext cx="11277600" cy="400000"/>
-          </a:xfrm>
-          <a:prstGeom prst="rect">
-            <a:avLst/>
-          </a:prstGeom>
-          <a:noFill/>
-        </p:spPr>
-        <p:txBody>
-          <a:bodyPr wrap="square" lIns="0" rIns="0" tIns="0" bIns="0">
-            <a:noAutofit/>
-          </a:bodyPr>
-          <a:lstStyle/>
-          <a:p>
-            <a:pPr algn="l"/>
-            <a:r>
-              <a:rPr sz="900" b="0" i="0">
-                <a:solidFill>
-                  <a:srgbClr val="6B6B6B"/>
-                </a:solidFill>
-                <a:latin typeface="Arial"/>
-              </a:rPr>
-              <a:t>Lampiran keadaan · 3 panel/halaman · halaman 7 daripada 14   ·   TECHNICAL_PROOF · DRAFT_FOR_BARIAH_REVIEW · NOT_INSTRUCTIONALLY_APPROVED · NOT_LEARNER_FACING_FINAL</a:t>
+                  <a:srgbClr val="6B6B6B"/>
+                </a:solidFill>
+                <a:latin typeface="Arial"/>
+              </a:rPr>
+              <a:t>Lampiran keadaan · 3 panel/halaman · halaman 7 daripada 15   ·   TECHNICAL_PROOF · DRAFT_FOR_BARIAH_REVIEW · NOT_INSTRUCTIONALLY_APPROVED · NOT_LEARNER_FACING_FINAL</a:t>
             </a:r>
           </a:p>
         </p:txBody>
@@ -13160,7 +13760,7 @@
                 </a:solidFill>
                 <a:latin typeface="Arial"/>
               </a:rPr>
-              <a:t>T03B03-S07   ·   click-to-reveal</a:t>
+              <a:t>T03B03-S07   ·   Click-to-Reveal</a:t>
             </a:r>
           </a:p>
           <a:p>
@@ -13301,7 +13901,7 @@
                 </a:solidFill>
                 <a:latin typeface="Arial"/>
               </a:rPr>
-              <a:t>T03B03-S07-ST-03   ·   Panel pendedahan</a:t>
+              <a:t>T03B03-S07-ST-BASE   ·   Keadaan asas</a:t>
             </a:r>
           </a:p>
           <a:p>
@@ -13309,11 +13909,11 @@
             <a:r>
               <a:rPr sz="1200" b="1" i="0">
                 <a:solidFill>
-                  <a:srgbClr val="37474F"/>
-                </a:solidFill>
-                <a:latin typeface="Arial"/>
-              </a:rPr>
-              <a:t>Pencetus: Ketegangan Pemasangan  [T03B03-S07-TRG-03]</a:t>
+                  <a:srgbClr val="1B5E20"/>
+                </a:solidFill>
+                <a:latin typeface="Arial"/>
+              </a:rPr>
+              <a:t>Pencetus: screen entry</a:t>
             </a:r>
           </a:p>
           <a:p>
@@ -13337,7 +13937,91 @@
                 </a:solidFill>
                 <a:latin typeface="Arial"/>
               </a:rPr>
-              <a:t>· Bagi pagar jenis jejaring (chain-link) atau BRC, ia mesti ditegangkan dengan sempurna untuk mengelakkannya daripada melendut.</a:t>
+              <a:t>· Fencing</a:t>
+            </a:r>
+          </a:p>
+          <a:p>
+            <a:pPr algn="l" lvl="1"/>
+            <a:r>
+              <a:rPr sz="1000" b="0" i="0">
+                <a:solidFill>
+                  <a:srgbClr val="1A1A1A"/>
+                </a:solidFill>
+                <a:latin typeface="Arial"/>
+              </a:rPr>
+              <a:t>· Pagar dibina untuk tujuan keselamatan, menandakan sempadan, privasi, atau sebagai elemen hiasan.</a:t>
+            </a:r>
+          </a:p>
+          <a:p>
+            <a:pPr algn="l" lvl="1"/>
+            <a:r>
+              <a:rPr sz="1000" b="0" i="0">
+                <a:solidFill>
+                  <a:srgbClr val="1A1A1A"/>
+                </a:solidFill>
+                <a:latin typeface="Arial"/>
+              </a:rPr>
+              <a:t>· Fungsi</a:t>
+            </a:r>
+          </a:p>
+          <a:p>
+            <a:pPr algn="l" lvl="1"/>
+            <a:r>
+              <a:rPr sz="1000" b="0" i="0">
+                <a:solidFill>
+                  <a:srgbClr val="1A1A1A"/>
+                </a:solidFill>
+                <a:latin typeface="Arial"/>
+              </a:rPr>
+              <a:t>· Mengawal akses, menetapkan sempadan hartanah, dan meningkatkan keselamatan.</a:t>
+            </a:r>
+          </a:p>
+          <a:p>
+            <a:pPr algn="l" lvl="1"/>
+            <a:r>
+              <a:rPr sz="1000" b="0" i="0">
+                <a:solidFill>
+                  <a:srgbClr val="1A1A1A"/>
+                </a:solidFill>
+                <a:latin typeface="Arial"/>
+              </a:rPr>
+              <a:t>· Fokus Utama Kontraktor</a:t>
+            </a:r>
+          </a:p>
+          <a:p>
+            <a:pPr algn="l" lvl="1"/>
+            <a:r>
+              <a:rPr sz="1000" b="0" i="0">
+                <a:solidFill>
+                  <a:srgbClr val="1A1A1A"/>
+                </a:solidFill>
+                <a:latin typeface="Arial"/>
+              </a:rPr>
+              <a:t>· Penjajaran Sempadan</a:t>
+            </a:r>
+          </a:p>
+          <a:p>
+            <a:pPr algn="l" lvl="1"/>
+            <a:r>
+              <a:rPr sz="1000" b="0" i="0">
+                <a:solidFill>
+                  <a:srgbClr val="1A1A1A"/>
+                </a:solidFill>
+                <a:latin typeface="Arial"/>
+              </a:rPr>
+              <a:t>· Pemasangan Tiang</a:t>
+            </a:r>
+          </a:p>
+          <a:p>
+            <a:pPr algn="l" lvl="1"/>
+            <a:r>
+              <a:rPr sz="900" b="0" i="0">
+                <a:solidFill>
+                  <a:srgbClr val="6B6B6B"/>
+                </a:solidFill>
+                <a:latin typeface="Arial"/>
+              </a:rPr>
+              <a:t>· … 3 rekod lagi</a:t>
             </a:r>
           </a:p>
           <a:p>
@@ -13361,7 +14045,7 @@
                 </a:solidFill>
                 <a:latin typeface="Arial"/>
               </a:rPr>
-              <a:t>Menambah 1 rekod yang tersembunyi dalam keadaan asas.</a:t>
+              <a:t>— ini keadaan asas —</a:t>
             </a:r>
           </a:p>
           <a:p>
@@ -13385,7 +14069,7 @@
                 </a:solidFill>
                 <a:latin typeface="Arial"/>
               </a:rPr>
-              <a:t>Panel tertutup apabila ditekan sekali lagi atau apabila panel lain dibuka. Keadaan asas kembali dan sentiasa boleh dicapai. Tiada navigasi berlaku.</a:t>
+              <a:t>Keadaan masuk. Pelajar meneruskan dengan SETERUSNYA setelah syarat selesai dipenuhi.</a:t>
             </a:r>
           </a:p>
           <a:p>
@@ -13409,7 +14093,7 @@
                 </a:solidFill>
                 <a:latin typeface="Arial"/>
               </a:rPr>
-              <a:t>Baris: T03B03-ROW-052</a:t>
+              <a:t>Baris: T03B03-ROW-042, T03B03-ROW-043, (+7)</a:t>
             </a:r>
           </a:p>
           <a:p>
@@ -13504,7 +14188,7 @@
                 </a:solidFill>
                 <a:latin typeface="Arial"/>
               </a:rPr>
-              <a:t>T03B03-S07-ST-04   ·   Panel pendedahan</a:t>
+              <a:t>T03B03-S07-ST-01   ·   Panel pendedahan</a:t>
             </a:r>
           </a:p>
           <a:p>
@@ -13516,7 +14200,7 @@
                 </a:solidFill>
                 <a:latin typeface="Arial"/>
               </a:rPr>
-              <a:t>Pencetus: Kemasan Anti-Karat  [T03B03-S07-TRG-04]</a:t>
+              <a:t>Pencetus: Penjajaran Sempadan  [T03B03-S07-TRG-01]</a:t>
             </a:r>
           </a:p>
           <a:p>
@@ -13540,7 +14224,7 @@
                 </a:solidFill>
                 <a:latin typeface="Arial"/>
               </a:rPr>
-              <a:t>· Pastikan semua komponen keluli mempunyai lapisan pelindung karat yang sempurna seperti tergalvani panas (hot-dip galvanized) atau cat epoksi.</a:t>
+              <a:t>· Jajaran pagar mesti ditanda mengikut Pelan Ukur Sempadan untuk mengelakkan isu pencerobohan tanah.</a:t>
             </a:r>
           </a:p>
           <a:p>
@@ -13612,7 +14296,7 @@
                 </a:solidFill>
                 <a:latin typeface="Arial"/>
               </a:rPr>
-              <a:t>Baris: T03B03-ROW-054</a:t>
+              <a:t>Baris: T03B03-ROW-048</a:t>
             </a:r>
           </a:p>
           <a:p>
@@ -13707,7 +14391,7 @@
                 </a:solidFill>
                 <a:latin typeface="Arial"/>
               </a:rPr>
-              <a:t>T03B03-S07-ST-ALL_VIEWED   ·   Penanda selesai</a:t>
+              <a:t>T03B03-S07-ST-02   ·   Panel pendedahan</a:t>
             </a:r>
           </a:p>
           <a:p>
@@ -13719,7 +14403,7 @@
                 </a:solidFill>
                 <a:latin typeface="Arial"/>
               </a:rPr>
-              <a:t>Pencetus: semua 4 panel dilihat  [T03B03-S07-TRG-ALL]</a:t>
+              <a:t>Pencetus: Pemasangan Tiang  [T03B03-S07-TRG-02]</a:t>
             </a:r>
           </a:p>
           <a:p>
@@ -13737,13 +14421,13 @@
           <a:p>
             <a:pPr algn="l" lvl="1"/>
             <a:r>
-              <a:rPr sz="1000" b="0" i="1">
-                <a:solidFill>
-                  <a:srgbClr val="6B6B6B"/>
-                </a:solidFill>
-                <a:latin typeface="Arial"/>
-              </a:rPr>
-              <a:t>Tiada kandungan dipaparkan — penanda sahaja.</a:t>
+              <a:rPr sz="1000" b="0" i="0">
+                <a:solidFill>
+                  <a:srgbClr val="1A1A1A"/>
+                </a:solidFill>
+                <a:latin typeface="Arial"/>
+              </a:rPr>
+              <a:t>· Kestabilan pagar bergantung pada tiangnya. Tiang mesti dipasang pada jarak yang seragam dan ditanam dalam tapak konkrit dengan saiz dan kedalaman yang mencukupi seperti dalam spesifikasi.</a:t>
             </a:r>
           </a:p>
           <a:p>
@@ -13767,7 +14451,7 @@
                 </a:solidFill>
                 <a:latin typeface="Arial"/>
               </a:rPr>
-              <a:t>Tidak dipaparkan; membuka SETERUSNYA.</a:t>
+              <a:t>Menambah 1 rekod yang tersembunyi dalam keadaan asas.</a:t>
             </a:r>
           </a:p>
           <a:p>
@@ -13791,7 +14475,7 @@
                 </a:solidFill>
                 <a:latin typeface="Arial"/>
               </a:rPr>
-              <a:t>Bukan keadaan yang dipaparkan. Penanda yang menjadi benar setelah semua pendedahan dilihat, dan inilah yang membuka SETERUSNYA.</a:t>
+              <a:t>Panel tertutup apabila ditekan sekali lagi atau apabila panel lain dibuka. Keadaan asas kembali dan sentiasa boleh dicapai. Tiada navigasi berlaku.</a:t>
             </a:r>
           </a:p>
           <a:p>
@@ -13815,7 +14499,7 @@
                 </a:solidFill>
                 <a:latin typeface="Arial"/>
               </a:rPr>
-              <a:t>Tiada baris modul — keadaan struktur</a:t>
+              <a:t>Baris: T03B03-ROW-050</a:t>
             </a:r>
           </a:p>
           <a:p>
@@ -13862,7 +14546,7 @@
                 </a:solidFill>
                 <a:latin typeface="Arial"/>
               </a:rPr>
-              <a:t>Lampiran keadaan · 3 panel/halaman · halaman 8 daripada 14   ·   TECHNICAL_PROOF · DRAFT_FOR_BARIAH_REVIEW · NOT_INSTRUCTIONALLY_APPROVED · NOT_LEARNER_FACING_FINAL</a:t>
+              <a:t>Lampiran keadaan · 3 panel/halaman · halaman 8 daripada 15   ·   TECHNICAL_PROOF · DRAFT_FOR_BARIAH_REVIEW · NOT_INSTRUCTIONALLY_APPROVED · NOT_LEARNER_FACING_FINAL</a:t>
             </a:r>
           </a:p>
         </p:txBody>
